--- a/deck/Medical_Omnichannel_Daiichi_Deck.pptx
+++ b/deck/Medical_Omnichannel_Daiichi_Deck.pptx
@@ -20,7 +20,6 @@
     <p:sldId id="265" r:id="rId15"/>
     <p:sldId id="266" r:id="rId16"/>
     <p:sldId id="267" r:id="rId17"/>
-    <p:sldId id="268" r:id="rId18"/>
   </p:sldIdLst>
   <p:sldSz cy="6858000" cx="12191675"/>
   <p:notesSz cx="6858000" cy="9144000"/>

--- a/deck/Medical_Omnichannel_Daiichi_Deck.pptx
+++ b/deck/Medical_Omnichannel_Daiichi_Deck.pptx
@@ -9,6 +9,7 @@
   </p:notesMasterIdLst>
   <p:sldIdLst>
     <p:sldId id="256" r:id="rId6"/>
+    <p:sldId id="268" r:id="rId18"/>
     <p:sldId id="257" r:id="rId7"/>
     <p:sldId id="258" r:id="rId8"/>
     <p:sldId id="259" r:id="rId9"/>
@@ -18,8 +19,10 @@
     <p:sldId id="263" r:id="rId13"/>
     <p:sldId id="264" r:id="rId14"/>
     <p:sldId id="265" r:id="rId15"/>
+    <p:sldId id="269" r:id="rId23"/>
+    <p:sldId id="270" r:id="rId24"/>
+    <p:sldId id="267" r:id="rId17"/>
     <p:sldId id="266" r:id="rId16"/>
-    <p:sldId id="267" r:id="rId17"/>
   </p:sldIdLst>
   <p:sldSz cy="6858000" cx="12191675"/>
   <p:notesSz cx="6858000" cy="9144000"/>
@@ -1071,105 +1074,6 @@
           <a:xfrm>
             <a:off x="1143225" y="685800"/>
             <a:ext cx="4572225" cy="3429000"/>
-          </a:xfrm>
-          <a:custGeom>
-            <a:rect b="b" l="l" r="r" t="t"/>
-            <a:pathLst>
-              <a:path extrusionOk="0" h="120000" w="120000">
-                <a:moveTo>
-                  <a:pt x="0" y="0"/>
-                </a:moveTo>
-                <a:lnTo>
-                  <a:pt x="120000" y="0"/>
-                </a:lnTo>
-                <a:lnTo>
-                  <a:pt x="120000" y="120000"/>
-                </a:lnTo>
-                <a:lnTo>
-                  <a:pt x="0" y="120000"/>
-                </a:lnTo>
-                <a:close/>
-              </a:path>
-            </a:pathLst>
-          </a:custGeom>
-        </p:spPr>
-      </p:sp>
-    </p:spTree>
-  </p:cSld>
-  <p:clrMapOvr>
-    <a:masterClrMapping/>
-  </p:clrMapOvr>
-</p:notes>
-</file>
-
-<file path=ppt/notesSlides/notesSlide13.xml><?xml version="1.0" encoding="utf-8"?>
-<p:notes xmlns:a="http://schemas.openxmlformats.org/drawingml/2006/main" xmlns:r="http://schemas.openxmlformats.org/officeDocument/2006/relationships" xmlns:mc="http://schemas.openxmlformats.org/markup-compatibility/2006" xmlns:mv="urn:schemas-microsoft-com:mac:vml" xmlns:p="http://schemas.openxmlformats.org/presentationml/2006/main" xmlns:c="http://schemas.openxmlformats.org/drawingml/2006/chart" xmlns:dgm="http://schemas.openxmlformats.org/drawingml/2006/diagram" xmlns:o="urn:schemas-microsoft-com:office:office" xmlns:v="urn:schemas-microsoft-com:vml" xmlns:pvml="urn:schemas-microsoft-com:office:powerpoint" xmlns:com="http://schemas.openxmlformats.org/drawingml/2006/compatibility" xmlns:p14="http://schemas.microsoft.com/office/powerpoint/2010/main" xmlns:p15="http://schemas.microsoft.com/office/powerpoint/2012/main" xmlns:ahyp="http://schemas.microsoft.com/office/drawing/2018/hyperlinkcolor" showMasterPhAnim="0" showMasterSp="0">
-  <p:cSld>
-    <p:spTree>
-      <p:nvGrpSpPr>
-        <p:cNvPr id="464" name="Shape 464"/>
-        <p:cNvGrpSpPr/>
-        <p:nvPr/>
-      </p:nvGrpSpPr>
-      <p:grpSpPr>
-        <a:xfrm>
-          <a:off x="0" y="0"/>
-          <a:ext cx="0" cy="0"/>
-          <a:chOff x="0" y="0"/>
-          <a:chExt cx="0" cy="0"/>
-        </a:xfrm>
-      </p:grpSpPr>
-      <p:sp>
-        <p:nvSpPr>
-          <p:cNvPr id="465" name="Google Shape;465;g3f97c5f57f6_0_1:notes"/>
-          <p:cNvSpPr txBox="1"/>
-          <p:nvPr>
-            <p:ph idx="1" type="body"/>
-          </p:nvPr>
-        </p:nvSpPr>
-        <p:spPr>
-          <a:xfrm>
-            <a:off x="685800" y="4343400"/>
-            <a:ext cx="5486400" cy="4114800"/>
-          </a:xfrm>
-          <a:prstGeom prst="rect">
-            <a:avLst/>
-          </a:prstGeom>
-        </p:spPr>
-        <p:txBody>
-          <a:bodyPr anchorCtr="0" anchor="t" bIns="91425" lIns="91425" spcFirstLastPara="1" rIns="91425" wrap="square" tIns="91425">
-            <a:noAutofit/>
-          </a:bodyPr>
-          <a:lstStyle/>
-          <a:p>
-            <a:pPr indent="0" lvl="0" marL="0" rtl="0" algn="l">
-              <a:spcBef>
-                <a:spcPts val="0"/>
-              </a:spcBef>
-              <a:spcAft>
-                <a:spcPts val="0"/>
-              </a:spcAft>
-              <a:buNone/>
-            </a:pPr>
-            <a:r>
-              <a:t/>
-            </a:r>
-            <a:endParaRPr/>
-          </a:p>
-        </p:txBody>
-      </p:sp>
-      <p:sp>
-        <p:nvSpPr>
-          <p:cNvPr id="466" name="Google Shape;466;g3f97c5f57f6_0_1:notes"/>
-          <p:cNvSpPr/>
-          <p:nvPr>
-            <p:ph idx="2" type="sldImg"/>
-          </p:nvPr>
-        </p:nvSpPr>
-        <p:spPr>
-          <a:xfrm>
-            <a:off x="1143225" y="685800"/>
-            <a:ext cx="4572300" cy="3429000"/>
           </a:xfrm>
           <a:custGeom>
             <a:rect b="b" l="l" r="r" t="t"/>
@@ -12611,7 +12515,7 @@
                 <a:cs typeface="Quattrocento Sans"/>
                 <a:sym typeface="Quattrocento Sans"/>
               </a:rPr>
-              <a:t>Business value for Medical Affairs</a:t>
+              <a:t>Impact in your KPIs — baseline → target</a:t>
             </a:r>
             <a:endParaRPr/>
           </a:p>
@@ -12887,7 +12791,7 @@
                 <a:cs typeface="Quattrocento Sans"/>
                 <a:sym typeface="Quattrocento Sans"/>
               </a:rPr>
-              <a:t>Faster</a:t>
+              <a:t>Reach</a:t>
             </a:r>
             <a:endParaRPr/>
           </a:p>
@@ -12940,7 +12844,7 @@
                 <a:cs typeface="Quattrocento Sans"/>
                 <a:sym typeface="Quattrocento Sans"/>
               </a:rPr>
-              <a:t>MSL prep</a:t>
+              <a:t>62% → 80%</a:t>
             </a:r>
             <a:endParaRPr/>
           </a:p>
@@ -12993,7 +12897,7 @@
                 <a:cs typeface="Quattrocento Sans"/>
                 <a:sym typeface="Quattrocento Sans"/>
               </a:rPr>
-              <a:t>AI briefings replace ~2 h/MSL/week of prep — est. ~$1.3M / year.</a:t>
+              <a:t>Priority-KOL 90-day reach, lifted by under-engaged flags + priority score. ~$1.5M/yr.</a:t>
             </a:r>
             <a:endParaRPr/>
           </a:p>
@@ -13165,7 +13069,7 @@
                 <a:cs typeface="Quattrocento Sans"/>
                 <a:sym typeface="Quattrocento Sans"/>
               </a:rPr>
-              <a:t>Sharper</a:t>
+              <a:t>Speed</a:t>
             </a:r>
             <a:endParaRPr/>
           </a:p>
@@ -13218,7 +13122,7 @@
                 <a:cs typeface="Quattrocento Sans"/>
                 <a:sym typeface="Quattrocento Sans"/>
               </a:rPr>
-              <a:t>prioritization</a:t>
+              <a:t>~2h → mins</a:t>
             </a:r>
             <a:endParaRPr/>
           </a:p>
@@ -13271,7 +13175,7 @@
                 <a:cs typeface="Quattrocento Sans"/>
                 <a:sym typeface="Quattrocento Sans"/>
               </a:rPr>
-              <a:t>Priority score + under-engaged flags lift priority-KOL reach — est. ~$1.5M / year.</a:t>
+              <a:t>MSL prep per engagement — AI briefing replaces manual context assembly. ~$1.3M/yr.</a:t>
             </a:r>
             <a:endParaRPr/>
           </a:p>
@@ -13443,7 +13347,7 @@
                 <a:cs typeface="Quattrocento Sans"/>
                 <a:sym typeface="Quattrocento Sans"/>
               </a:rPr>
-              <a:t>Deeper</a:t>
+              <a:t>Service</a:t>
             </a:r>
             <a:endParaRPr/>
           </a:p>
@@ -13496,7 +13400,7 @@
                 <a:cs typeface="Quattrocento Sans"/>
                 <a:sym typeface="Quattrocento Sans"/>
               </a:rPr>
-              <a:t>scientific insight</a:t>
+              <a:t>71% → 95%</a:t>
             </a:r>
             <a:endParaRPr/>
           </a:p>
@@ -13549,7 +13453,7 @@
                 <a:cs typeface="Quattrocento Sans"/>
                 <a:sym typeface="Quattrocento Sans"/>
               </a:rPr>
-              <a:t>500+ free-text MSL notes become queryable topic-interest signal.</a:t>
+              <a:t>Medical-inquiry SLA compliance — overdue items flagged by product. ~$0.6M/yr.</a:t>
             </a:r>
             <a:endParaRPr/>
           </a:p>
@@ -13721,7 +13625,7 @@
                 <a:cs typeface="Quattrocento Sans"/>
                 <a:sym typeface="Quattrocento Sans"/>
               </a:rPr>
-              <a:t>Safer</a:t>
+              <a:t>Insight</a:t>
             </a:r>
             <a:endParaRPr/>
           </a:p>
@@ -13774,7 +13678,7 @@
                 <a:cs typeface="Quattrocento Sans"/>
                 <a:sym typeface="Quattrocento Sans"/>
               </a:rPr>
-              <a:t>governance</a:t>
+              <a:t>0 → 500+</a:t>
             </a:r>
             <a:endParaRPr/>
           </a:p>
@@ -13827,7 +13731,7 @@
                 <a:cs typeface="Quattrocento Sans"/>
                 <a:sym typeface="Quattrocento Sans"/>
               </a:rPr>
-              <a:t>Faster inquiry SLAs + approved-only content + full UC lineage — est. ~$0.6M / year.</a:t>
+              <a:t>Free-text MSL notes turned into queryable topic-interest signal.</a:t>
             </a:r>
             <a:endParaRPr/>
           </a:p>
@@ -13946,7 +13850,7 @@
                 <a:cs typeface="Quattrocento Sans"/>
                 <a:sym typeface="Quattrocento Sans"/>
               </a:rPr>
-              <a:t>The platform story</a:t>
+              <a:t>The ROI, quantified</a:t>
             </a:r>
             <a:endParaRPr/>
           </a:p>
@@ -13999,7 +13903,7 @@
                 <a:cs typeface="Quattrocento Sans"/>
                 <a:sym typeface="Quattrocento Sans"/>
               </a:rPr>
-              <a:t>One governed Lakehouse — Lakeflow to Lakebase to app — delivers analytics, natural-language self-service and an AI cockpit with no data copies and one security model. Estimated ~$3.4M / year for a 120-MSL field-medical org.</a:t>
+              <a:t>~$3.4M / year estimated for a 120-MSL field-medical org — faster prep, sharper prioritization and faster SLAs — on one governed Lakehouse, no data copies, one security model.</a:t>
             </a:r>
             <a:endParaRPr/>
           </a:p>
@@ -14571,7 +14475,7 @@
                 <a:cs typeface="Quattrocento Sans"/>
                 <a:sym typeface="Quattrocento Sans"/>
               </a:rPr>
-              <a:t>10</a:t>
+              <a:t>14</a:t>
             </a:r>
             <a:endParaRPr/>
           </a:p>
@@ -16040,38 +15944,31 @@
 </file>
 
 <file path=ppt/slides/slide13.xml><?xml version="1.0" encoding="utf-8"?>
-<p:sld xmlns:a="http://schemas.openxmlformats.org/drawingml/2006/main" xmlns:r="http://schemas.openxmlformats.org/officeDocument/2006/relationships" xmlns:mc="http://schemas.openxmlformats.org/markup-compatibility/2006" xmlns:mv="urn:schemas-microsoft-com:mac:vml" xmlns:p="http://schemas.openxmlformats.org/presentationml/2006/main" xmlns:c="http://schemas.openxmlformats.org/drawingml/2006/chart" xmlns:dgm="http://schemas.openxmlformats.org/drawingml/2006/diagram" xmlns:o="urn:schemas-microsoft-com:office:office" xmlns:v="urn:schemas-microsoft-com:vml" xmlns:pvml="urn:schemas-microsoft-com:office:powerpoint" xmlns:com="http://schemas.openxmlformats.org/drawingml/2006/compatibility" xmlns:p14="http://schemas.microsoft.com/office/powerpoint/2010/main" xmlns:p15="http://schemas.microsoft.com/office/powerpoint/2012/main" xmlns:ahyp="http://schemas.microsoft.com/office/drawing/2018/hyperlinkcolor">
+<p:sld xmlns:a="http://schemas.openxmlformats.org/drawingml/2006/main" xmlns:p="http://schemas.openxmlformats.org/presentationml/2006/main" xmlns:r="http://schemas.openxmlformats.org/officeDocument/2006/relationships">
   <p:cSld>
     <p:spTree>
       <p:nvGrpSpPr>
-        <p:cNvPr id="467" name="Shape 467"/>
+        <p:cNvPr id="1" name=""/>
         <p:cNvGrpSpPr/>
         <p:nvPr/>
       </p:nvGrpSpPr>
-      <p:grpSpPr>
-        <a:xfrm>
-          <a:off x="0" y="0"/>
-          <a:ext cx="0" cy="0"/>
-          <a:chOff x="0" y="0"/>
-          <a:chExt cx="0" cy="0"/>
-        </a:xfrm>
-      </p:grpSpPr>
-      <p:sp>
-        <p:nvSpPr>
-          <p:cNvPr id="468" name="Google Shape;468;p25"/>
+      <p:grpSpPr/>
+      <p:sp>
+        <p:nvSpPr>
+          <p:cNvPr id="392" name="Google Shape;392;p22"/>
           <p:cNvSpPr/>
           <p:nvPr/>
         </p:nvSpPr>
         <p:spPr>
           <a:xfrm>
             <a:off x="0" y="0"/>
-            <a:ext cx="12191700" cy="6858000"/>
+            <a:ext cx="12191695" cy="128016"/>
           </a:xfrm>
           <a:prstGeom prst="rect">
             <a:avLst/>
           </a:prstGeom>
           <a:solidFill>
-            <a:srgbClr val="0B1733"/>
+            <a:srgbClr val="FF3621"/>
           </a:solidFill>
           <a:ln>
             <a:noFill/>
@@ -16109,20 +16006,179 @@
       </p:sp>
       <p:sp>
         <p:nvSpPr>
-          <p:cNvPr id="469" name="Google Shape;469;p25"/>
+          <p:cNvPr id="393" name="Google Shape;393;p22"/>
+          <p:cNvSpPr txBox="1"/>
+          <p:nvPr/>
+        </p:nvSpPr>
+        <p:spPr>
+          <a:xfrm>
+            <a:off x="548640" y="384048"/>
+            <a:ext cx="10058400" cy="274320"/>
+          </a:xfrm>
+          <a:prstGeom prst="rect">
+            <a:avLst/>
+          </a:prstGeom>
+          <a:noFill/>
+          <a:ln>
+            <a:noFill/>
+          </a:ln>
+        </p:spPr>
+        <p:txBody>
+          <a:bodyPr anchorCtr="0" anchor="t" bIns="0" lIns="0" spcFirstLastPara="1" rIns="0" wrap="square" tIns="0">
+            <a:spAutoFit/>
+          </a:bodyPr>
+          <a:lstStyle/>
+          <a:p>
+            <a:pPr indent="0" lvl="0" marL="0" marR="0" rtl="0" algn="l">
+              <a:lnSpc>
+                <a:spcPct val="100000"/>
+              </a:lnSpc>
+              <a:spcBef>
+                <a:spcPts val="0"/>
+              </a:spcBef>
+              <a:spcAft>
+                <a:spcPts val="0"/>
+              </a:spcAft>
+              <a:buNone/>
+            </a:pPr>
+            <a:r>
+              <a:rPr b="1" i="0" lang="en-US" sz="1200" u="none" cap="none" strike="noStrike">
+                <a:solidFill>
+                  <a:srgbClr val="FF3621"/>
+                </a:solidFill>
+                <a:latin typeface="Quattrocento Sans"/>
+                <a:ea typeface="Quattrocento Sans"/>
+                <a:cs typeface="Quattrocento Sans"/>
+                <a:sym typeface="Quattrocento Sans"/>
+              </a:rPr>
+              <a:t>THE BUSINESS OUTCOME</a:t>
+            </a:r>
+            <a:endParaRPr/>
+          </a:p>
+        </p:txBody>
+      </p:sp>
+      <p:sp>
+        <p:nvSpPr>
+          <p:cNvPr id="394" name="Google Shape;394;p22"/>
+          <p:cNvSpPr txBox="1"/>
+          <p:nvPr/>
+        </p:nvSpPr>
+        <p:spPr>
+          <a:xfrm>
+            <a:off x="548640" y="658368"/>
+            <a:ext cx="11064240" cy="640080"/>
+          </a:xfrm>
+          <a:prstGeom prst="rect">
+            <a:avLst/>
+          </a:prstGeom>
+          <a:noFill/>
+          <a:ln>
+            <a:noFill/>
+          </a:ln>
+        </p:spPr>
+        <p:txBody>
+          <a:bodyPr anchorCtr="0" anchor="t" bIns="0" lIns="0" spcFirstLastPara="1" rIns="0" wrap="square" tIns="0">
+            <a:spAutoFit/>
+          </a:bodyPr>
+          <a:lstStyle/>
+          <a:p>
+            <a:pPr indent="0" lvl="0" marL="0" marR="0" rtl="0" algn="l">
+              <a:lnSpc>
+                <a:spcPct val="100000"/>
+              </a:lnSpc>
+              <a:spcBef>
+                <a:spcPts val="0"/>
+              </a:spcBef>
+              <a:spcAft>
+                <a:spcPts val="0"/>
+              </a:spcAft>
+              <a:buNone/>
+            </a:pPr>
+            <a:r>
+              <a:rPr b="1" i="0" lang="en-US" sz="2700" u="none" cap="none" strike="noStrike">
+                <a:solidFill>
+                  <a:srgbClr val="0B1733"/>
+                </a:solidFill>
+                <a:latin typeface="Quattrocento Sans"/>
+                <a:ea typeface="Quattrocento Sans"/>
+                <a:cs typeface="Quattrocento Sans"/>
+                <a:sym typeface="Quattrocento Sans"/>
+              </a:rPr>
+              <a:t>One prepared, governed view of every KOL — ~$3.4M/year of impact</a:t>
+            </a:r>
+            <a:endParaRPr/>
+          </a:p>
+        </p:txBody>
+      </p:sp>
+      <p:sp>
+        <p:nvSpPr>
+          <p:cNvPr id="395" name="Google Shape;395;p22"/>
+          <p:cNvSpPr txBox="1"/>
+          <p:nvPr/>
+        </p:nvSpPr>
+        <p:spPr>
+          <a:xfrm>
+            <a:off x="11430000" y="384048"/>
+            <a:ext cx="548640" cy="274320"/>
+          </a:xfrm>
+          <a:prstGeom prst="rect">
+            <a:avLst/>
+          </a:prstGeom>
+          <a:noFill/>
+          <a:ln>
+            <a:noFill/>
+          </a:ln>
+        </p:spPr>
+        <p:txBody>
+          <a:bodyPr anchorCtr="0" anchor="t" bIns="0" lIns="0" spcFirstLastPara="1" rIns="0" wrap="square" tIns="0">
+            <a:spAutoFit/>
+          </a:bodyPr>
+          <a:lstStyle/>
+          <a:p>
+            <a:pPr indent="0" lvl="0" marL="0" marR="0" rtl="0" algn="r">
+              <a:lnSpc>
+                <a:spcPct val="100000"/>
+              </a:lnSpc>
+              <a:spcBef>
+                <a:spcPts val="0"/>
+              </a:spcBef>
+              <a:spcAft>
+                <a:spcPts val="0"/>
+              </a:spcAft>
+              <a:buNone/>
+            </a:pPr>
+            <a:r>
+              <a:rPr b="1" i="0" lang="en-US" sz="1100" u="none" cap="none" strike="noStrike">
+                <a:solidFill>
+                  <a:srgbClr val="909AAA"/>
+                </a:solidFill>
+                <a:latin typeface="Quattrocento Sans"/>
+                <a:ea typeface="Quattrocento Sans"/>
+                <a:cs typeface="Quattrocento Sans"/>
+                <a:sym typeface="Quattrocento Sans"/>
+              </a:rPr>
+              <a:t>02</a:t>
+            </a:r>
+            <a:endParaRPr/>
+          </a:p>
+        </p:txBody>
+      </p:sp>
+      <p:sp>
+        <p:nvSpPr>
+          <p:cNvPr id="396" name="Google Shape;396;p22"/>
           <p:cNvSpPr/>
           <p:nvPr/>
         </p:nvSpPr>
         <p:spPr>
           <a:xfrm>
-            <a:off x="0" y="0"/>
-            <a:ext cx="255900" cy="6858000"/>
+            <a:off x="548640" y="1371600"/>
+            <a:ext cx="11091672" cy="17780"/>
           </a:xfrm>
           <a:prstGeom prst="rect">
             <a:avLst/>
           </a:prstGeom>
           <a:solidFill>
-            <a:srgbClr val="FF3621"/>
+            <a:srgbClr val="DDE3ED"/>
           </a:solidFill>
           <a:ln>
             <a:noFill/>
@@ -16160,130 +16216,39 @@
       </p:sp>
       <p:sp>
         <p:nvSpPr>
-          <p:cNvPr id="470" name="Google Shape;470;p25"/>
-          <p:cNvSpPr txBox="1"/>
-          <p:nvPr/>
-        </p:nvSpPr>
-        <p:spPr>
-          <a:xfrm>
-            <a:off x="822960" y="777240"/>
-            <a:ext cx="10058400" cy="200100"/>
-          </a:xfrm>
-          <a:prstGeom prst="rect">
-            <a:avLst/>
-          </a:prstGeom>
-          <a:noFill/>
-          <a:ln>
-            <a:noFill/>
-          </a:ln>
-        </p:spPr>
-        <p:txBody>
-          <a:bodyPr anchorCtr="0" anchor="t" bIns="0" lIns="0" spcFirstLastPara="1" rIns="0" wrap="square" tIns="0">
-            <a:spAutoFit/>
-          </a:bodyPr>
-          <a:lstStyle/>
-          <a:p>
-            <a:pPr indent="0" lvl="0" marL="0" marR="0" rtl="0" algn="l">
-              <a:lnSpc>
-                <a:spcPct val="100000"/>
-              </a:lnSpc>
-              <a:spcBef>
-                <a:spcPts val="0"/>
-              </a:spcBef>
-              <a:spcAft>
-                <a:spcPts val="0"/>
-              </a:spcAft>
-              <a:buNone/>
-            </a:pPr>
-            <a:r>
-              <a:rPr b="1" i="0" lang="en-US" sz="1300" u="none" cap="none" strike="noStrike">
-                <a:solidFill>
-                  <a:srgbClr val="7EC8E3"/>
-                </a:solidFill>
-                <a:latin typeface="Quattrocento Sans"/>
-                <a:ea typeface="Quattrocento Sans"/>
-                <a:cs typeface="Quattrocento Sans"/>
-                <a:sym typeface="Quattrocento Sans"/>
-              </a:rPr>
-              <a:t>LIVE DEMO FLOW</a:t>
-            </a:r>
-            <a:endParaRPr/>
-          </a:p>
-        </p:txBody>
-      </p:sp>
-      <p:sp>
-        <p:nvSpPr>
-          <p:cNvPr id="471" name="Google Shape;471;p25"/>
-          <p:cNvSpPr txBox="1"/>
-          <p:nvPr/>
-        </p:nvSpPr>
-        <p:spPr>
-          <a:xfrm>
-            <a:off x="777240" y="1188720"/>
-            <a:ext cx="10515600" cy="615600"/>
-          </a:xfrm>
-          <a:prstGeom prst="rect">
-            <a:avLst/>
-          </a:prstGeom>
-          <a:noFill/>
-          <a:ln>
-            <a:noFill/>
-          </a:ln>
-        </p:spPr>
-        <p:txBody>
-          <a:bodyPr anchorCtr="0" anchor="t" bIns="0" lIns="0" spcFirstLastPara="1" rIns="0" wrap="square" tIns="0">
-            <a:spAutoFit/>
-          </a:bodyPr>
-          <a:lstStyle/>
-          <a:p>
-            <a:pPr indent="0" lvl="0" marL="0" marR="0" rtl="0" algn="l">
-              <a:lnSpc>
-                <a:spcPct val="100000"/>
-              </a:lnSpc>
-              <a:spcBef>
-                <a:spcPts val="0"/>
-              </a:spcBef>
-              <a:spcAft>
-                <a:spcPts val="0"/>
-              </a:spcAft>
-              <a:buNone/>
-            </a:pPr>
-            <a:r>
-              <a:rPr b="1" i="0" lang="en-US" sz="4000" u="none" cap="none" strike="noStrike">
-                <a:solidFill>
-                  <a:srgbClr val="FFFFFF"/>
-                </a:solidFill>
-                <a:latin typeface="Quattrocento Sans"/>
-                <a:ea typeface="Quattrocento Sans"/>
-                <a:cs typeface="Quattrocento Sans"/>
-                <a:sym typeface="Quattrocento Sans"/>
-              </a:rPr>
-              <a:t>Suggested walk-through</a:t>
-            </a:r>
-            <a:endParaRPr/>
-          </a:p>
-        </p:txBody>
-      </p:sp>
-      <p:sp>
-        <p:nvSpPr>
-          <p:cNvPr id="472" name="Google Shape;472;p25"/>
+          <p:cNvPr id="397" name="Google Shape;397;p22"/>
           <p:cNvSpPr/>
           <p:nvPr/>
         </p:nvSpPr>
         <p:spPr>
           <a:xfrm>
-            <a:off x="822960" y="2286000"/>
-            <a:ext cx="685800" cy="685800"/>
-          </a:xfrm>
-          <a:prstGeom prst="ellipse">
-            <a:avLst/>
+            <a:off x="548640" y="1691640"/>
+            <a:ext cx="2697480" cy="2286000"/>
+          </a:xfrm>
+          <a:prstGeom prst="roundRect">
+            <a:avLst>
+              <a:gd fmla="val 16667" name="adj"/>
+            </a:avLst>
           </a:prstGeom>
           <a:solidFill>
-            <a:srgbClr val="FF3621"/>
+            <a:srgbClr val="FFFFFF"/>
           </a:solidFill>
-          <a:ln>
-            <a:noFill/>
-          </a:ln>
+          <a:ln cap="flat" cmpd="sng" w="12700">
+            <a:solidFill>
+              <a:srgbClr val="DDE3ED"/>
+            </a:solidFill>
+            <a:prstDash val="solid"/>
+            <a:round/>
+            <a:headEnd len="sm" w="sm" type="none"/>
+            <a:tailEnd len="sm" w="sm" type="none"/>
+          </a:ln>
+          <a:effectLst>
+            <a:outerShdw blurRad="90000" rotWithShape="0" dir="5400000" dist="40000">
+              <a:srgbClr val="9AA5B5">
+                <a:alpha val="40000"/>
+              </a:srgbClr>
+            </a:outerShdw>
+          </a:effectLst>
         </p:spPr>
         <p:txBody>
           <a:bodyPr anchorCtr="0" anchor="ctr" bIns="45700" lIns="91425" spcFirstLastPara="1" rIns="91425" wrap="square" tIns="45700">
@@ -16317,179 +16282,22 @@
       </p:sp>
       <p:sp>
         <p:nvSpPr>
-          <p:cNvPr id="473" name="Google Shape;473;p25"/>
-          <p:cNvSpPr txBox="1"/>
-          <p:nvPr/>
-        </p:nvSpPr>
-        <p:spPr>
-          <a:xfrm>
-            <a:off x="822960" y="2286000"/>
-            <a:ext cx="685800" cy="261600"/>
-          </a:xfrm>
-          <a:prstGeom prst="rect">
-            <a:avLst/>
-          </a:prstGeom>
-          <a:noFill/>
-          <a:ln>
-            <a:noFill/>
-          </a:ln>
-        </p:spPr>
-        <p:txBody>
-          <a:bodyPr anchorCtr="0" anchor="ctr" bIns="0" lIns="0" spcFirstLastPara="1" rIns="0" wrap="square" tIns="0">
-            <a:spAutoFit/>
-          </a:bodyPr>
-          <a:lstStyle/>
-          <a:p>
-            <a:pPr indent="0" lvl="0" marL="0" marR="0" rtl="0" algn="ctr">
-              <a:lnSpc>
-                <a:spcPct val="100000"/>
-              </a:lnSpc>
-              <a:spcBef>
-                <a:spcPts val="0"/>
-              </a:spcBef>
-              <a:spcAft>
-                <a:spcPts val="0"/>
-              </a:spcAft>
-              <a:buNone/>
-            </a:pPr>
-            <a:r>
-              <a:rPr b="1" i="0" lang="en-US" sz="1700" u="none" cap="none" strike="noStrike">
-                <a:solidFill>
-                  <a:srgbClr val="FFFFFF"/>
-                </a:solidFill>
-                <a:latin typeface="Quattrocento Sans"/>
-                <a:ea typeface="Quattrocento Sans"/>
-                <a:cs typeface="Quattrocento Sans"/>
-                <a:sym typeface="Quattrocento Sans"/>
-              </a:rPr>
-              <a:t>01</a:t>
-            </a:r>
-            <a:endParaRPr/>
-          </a:p>
-        </p:txBody>
-      </p:sp>
-      <p:sp>
-        <p:nvSpPr>
-          <p:cNvPr id="474" name="Google Shape;474;p25"/>
-          <p:cNvSpPr txBox="1"/>
-          <p:nvPr/>
-        </p:nvSpPr>
-        <p:spPr>
-          <a:xfrm>
-            <a:off x="1737360" y="2304288"/>
-            <a:ext cx="2743200" cy="292500"/>
-          </a:xfrm>
-          <a:prstGeom prst="rect">
-            <a:avLst/>
-          </a:prstGeom>
-          <a:noFill/>
-          <a:ln>
-            <a:noFill/>
-          </a:ln>
-        </p:spPr>
-        <p:txBody>
-          <a:bodyPr anchorCtr="0" anchor="ctr" bIns="0" lIns="0" spcFirstLastPara="1" rIns="0" wrap="square" tIns="0">
-            <a:spAutoFit/>
-          </a:bodyPr>
-          <a:lstStyle/>
-          <a:p>
-            <a:pPr indent="0" lvl="0" marL="0" marR="0" rtl="0" algn="l">
-              <a:lnSpc>
-                <a:spcPct val="100000"/>
-              </a:lnSpc>
-              <a:spcBef>
-                <a:spcPts val="0"/>
-              </a:spcBef>
-              <a:spcAft>
-                <a:spcPts val="0"/>
-              </a:spcAft>
-              <a:buNone/>
-            </a:pPr>
-            <a:r>
-              <a:rPr b="1" i="0" lang="en-US" sz="1900" u="none" cap="none" strike="noStrike">
-                <a:solidFill>
-                  <a:srgbClr val="FFFFFF"/>
-                </a:solidFill>
-                <a:latin typeface="Quattrocento Sans"/>
-                <a:ea typeface="Quattrocento Sans"/>
-                <a:cs typeface="Quattrocento Sans"/>
-                <a:sym typeface="Quattrocento Sans"/>
-              </a:rPr>
-              <a:t>Genie</a:t>
-            </a:r>
-            <a:endParaRPr/>
-          </a:p>
-        </p:txBody>
-      </p:sp>
-      <p:sp>
-        <p:nvSpPr>
-          <p:cNvPr id="475" name="Google Shape;475;p25"/>
-          <p:cNvSpPr txBox="1"/>
-          <p:nvPr/>
-        </p:nvSpPr>
-        <p:spPr>
-          <a:xfrm>
-            <a:off x="4297680" y="2304288"/>
-            <a:ext cx="7132200" cy="215400"/>
-          </a:xfrm>
-          <a:prstGeom prst="rect">
-            <a:avLst/>
-          </a:prstGeom>
-          <a:noFill/>
-          <a:ln>
-            <a:noFill/>
-          </a:ln>
-        </p:spPr>
-        <p:txBody>
-          <a:bodyPr anchorCtr="0" anchor="ctr" bIns="0" lIns="0" spcFirstLastPara="1" rIns="0" wrap="square" tIns="0">
-            <a:spAutoFit/>
-          </a:bodyPr>
-          <a:lstStyle/>
-          <a:p>
-            <a:pPr indent="0" lvl="0" marL="0" marR="0" rtl="0" algn="l">
-              <a:lnSpc>
-                <a:spcPct val="110000"/>
-              </a:lnSpc>
-              <a:spcBef>
-                <a:spcPts val="0"/>
-              </a:spcBef>
-              <a:spcAft>
-                <a:spcPts val="0"/>
-              </a:spcAft>
-              <a:buNone/>
-            </a:pPr>
-            <a:r>
-              <a:rPr b="0" i="0" lang="en-US" sz="1400" u="none" cap="none" strike="noStrike">
-                <a:solidFill>
-                  <a:srgbClr val="C4CEDB"/>
-                </a:solidFill>
-                <a:latin typeface="Quattrocento Sans"/>
-                <a:ea typeface="Quattrocento Sans"/>
-                <a:cs typeface="Quattrocento Sans"/>
-                <a:sym typeface="Quattrocento Sans"/>
-              </a:rPr>
-              <a:t>Ask 2–3 English questions → show governed SQL &amp; instant answers.</a:t>
-            </a:r>
-            <a:endParaRPr/>
-          </a:p>
-        </p:txBody>
-      </p:sp>
-      <p:sp>
-        <p:nvSpPr>
-          <p:cNvPr id="476" name="Google Shape;476;p25"/>
+          <p:cNvPr id="398" name="Google Shape;398;p22"/>
           <p:cNvSpPr/>
           <p:nvPr/>
         </p:nvSpPr>
         <p:spPr>
           <a:xfrm>
-            <a:off x="822960" y="3154680"/>
-            <a:ext cx="685800" cy="685800"/>
-          </a:xfrm>
-          <a:prstGeom prst="ellipse">
-            <a:avLst/>
+            <a:off x="548640" y="1691640"/>
+            <a:ext cx="2697480" cy="109728"/>
+          </a:xfrm>
+          <a:prstGeom prst="roundRect">
+            <a:avLst>
+              <a:gd fmla="val 16667" name="adj"/>
+            </a:avLst>
           </a:prstGeom>
           <a:solidFill>
-            <a:srgbClr val="FF3621"/>
+            <a:srgbClr val="2D5BFF"/>
           </a:solidFill>
           <a:ln>
             <a:noFill/>
@@ -16527,14 +16335,14 @@
       </p:sp>
       <p:sp>
         <p:nvSpPr>
-          <p:cNvPr id="477" name="Google Shape;477;p25"/>
+          <p:cNvPr id="399" name="Google Shape;399;p22"/>
           <p:cNvSpPr txBox="1"/>
           <p:nvPr/>
         </p:nvSpPr>
         <p:spPr>
           <a:xfrm>
-            <a:off x="822960" y="3154680"/>
-            <a:ext cx="685800" cy="261600"/>
+            <a:off x="548640" y="1965960"/>
+            <a:ext cx="2697480" cy="640080"/>
           </a:xfrm>
           <a:prstGeom prst="rect">
             <a:avLst/>
@@ -16545,7 +16353,7 @@
           </a:ln>
         </p:spPr>
         <p:txBody>
-          <a:bodyPr anchorCtr="0" anchor="ctr" bIns="0" lIns="0" spcFirstLastPara="1" rIns="0" wrap="square" tIns="0">
+          <a:bodyPr anchorCtr="0" anchor="t" bIns="0" lIns="0" spcFirstLastPara="1" rIns="0" wrap="square" tIns="0">
             <a:spAutoFit/>
           </a:bodyPr>
           <a:lstStyle/>
@@ -16563,16 +16371,16 @@
               <a:buNone/>
             </a:pPr>
             <a:r>
-              <a:rPr b="1" i="0" lang="en-US" sz="1700" u="none" cap="none" strike="noStrike">
+              <a:rPr b="1" i="0" lang="en-US" sz="3000" u="none" cap="none" strike="noStrike">
                 <a:solidFill>
-                  <a:srgbClr val="FFFFFF"/>
+                  <a:srgbClr val="2D5BFF"/>
                 </a:solidFill>
                 <a:latin typeface="Quattrocento Sans"/>
                 <a:ea typeface="Quattrocento Sans"/>
                 <a:cs typeface="Quattrocento Sans"/>
                 <a:sym typeface="Quattrocento Sans"/>
               </a:rPr>
-              <a:t>02</a:t>
+              <a:t>360° KOL view</a:t>
             </a:r>
             <a:endParaRPr/>
           </a:p>
@@ -16580,14 +16388,14 @@
       </p:sp>
       <p:sp>
         <p:nvSpPr>
-          <p:cNvPr id="478" name="Google Shape;478;p25"/>
+          <p:cNvPr id="400" name="Google Shape;400;p22"/>
           <p:cNvSpPr txBox="1"/>
           <p:nvPr/>
         </p:nvSpPr>
         <p:spPr>
           <a:xfrm>
-            <a:off x="1737360" y="3172968"/>
-            <a:ext cx="2743200" cy="292500"/>
+            <a:off x="548640" y="2606040"/>
+            <a:ext cx="2697480" cy="365760"/>
           </a:xfrm>
           <a:prstGeom prst="rect">
             <a:avLst/>
@@ -16598,12 +16406,12 @@
           </a:ln>
         </p:spPr>
         <p:txBody>
-          <a:bodyPr anchorCtr="0" anchor="ctr" bIns="0" lIns="0" spcFirstLastPara="1" rIns="0" wrap="square" tIns="0">
+          <a:bodyPr anchorCtr="0" anchor="t" bIns="0" lIns="0" spcFirstLastPara="1" rIns="0" wrap="square" tIns="0">
             <a:spAutoFit/>
           </a:bodyPr>
           <a:lstStyle/>
           <a:p>
-            <a:pPr indent="0" lvl="0" marL="0" marR="0" rtl="0" algn="l">
+            <a:pPr indent="0" lvl="0" marL="0" marR="0" rtl="0" algn="ctr">
               <a:lnSpc>
                 <a:spcPct val="100000"/>
               </a:lnSpc>
@@ -16616,16 +16424,16 @@
               <a:buNone/>
             </a:pPr>
             <a:r>
-              <a:rPr b="1" i="0" lang="en-US" sz="1900" u="none" cap="none" strike="noStrike">
+              <a:rPr b="1" i="0" lang="en-US" sz="1500" u="none" cap="none" strike="noStrike">
                 <a:solidFill>
-                  <a:srgbClr val="FFFFFF"/>
+                  <a:srgbClr val="0B1733"/>
                 </a:solidFill>
                 <a:latin typeface="Quattrocento Sans"/>
                 <a:ea typeface="Quattrocento Sans"/>
                 <a:cs typeface="Quattrocento Sans"/>
                 <a:sym typeface="Quattrocento Sans"/>
               </a:rPr>
-              <a:t>Dashboard</a:t>
+              <a:t>unified signal</a:t>
             </a:r>
             <a:endParaRPr/>
           </a:p>
@@ -16633,14 +16441,14 @@
       </p:sp>
       <p:sp>
         <p:nvSpPr>
-          <p:cNvPr id="479" name="Google Shape;479;p25"/>
+          <p:cNvPr id="401" name="Google Shape;401;p22"/>
           <p:cNvSpPr txBox="1"/>
           <p:nvPr/>
         </p:nvSpPr>
         <p:spPr>
           <a:xfrm>
-            <a:off x="4297680" y="3172968"/>
-            <a:ext cx="7132200" cy="215400"/>
+            <a:off x="777240" y="3063240"/>
+            <a:ext cx="2240280" cy="868680"/>
           </a:xfrm>
           <a:prstGeom prst="rect">
             <a:avLst/>
@@ -16651,14 +16459,14 @@
           </a:ln>
         </p:spPr>
         <p:txBody>
-          <a:bodyPr anchorCtr="0" anchor="ctr" bIns="0" lIns="0" spcFirstLastPara="1" rIns="0" wrap="square" tIns="0">
+          <a:bodyPr anchorCtr="0" anchor="t" bIns="0" lIns="0" spcFirstLastPara="1" rIns="0" wrap="square" tIns="0">
             <a:spAutoFit/>
           </a:bodyPr>
           <a:lstStyle/>
           <a:p>
-            <a:pPr indent="0" lvl="0" marL="0" marR="0" rtl="0" algn="l">
+            <a:pPr indent="0" lvl="0" marL="0" marR="0" rtl="0" algn="ctr">
               <a:lnSpc>
-                <a:spcPct val="110000"/>
+                <a:spcPct val="115000"/>
               </a:lnSpc>
               <a:spcBef>
                 <a:spcPts val="0"/>
@@ -16669,16 +16477,16 @@
               <a:buNone/>
             </a:pPr>
             <a:r>
-              <a:rPr b="0" i="0" lang="en-US" sz="1400" u="none" cap="none" strike="noStrike">
+              <a:rPr b="0" i="0" lang="en-US" sz="1200" u="none" cap="none" strike="noStrike">
                 <a:solidFill>
-                  <a:srgbClr val="C4CEDB"/>
+                  <a:srgbClr val="5A6472"/>
                 </a:solidFill>
                 <a:latin typeface="Quattrocento Sans"/>
                 <a:ea typeface="Quattrocento Sans"/>
                 <a:cs typeface="Quattrocento Sans"/>
                 <a:sym typeface="Quattrocento Sans"/>
               </a:rPr>
-              <a:t>Open the omnichannel view → engagement, priority, topic interest, SLAs.</a:t>
+              <a:t>MSL notes, inquiries, congress, digital, pubs &amp; trials in one governed profile.</a:t>
             </a:r>
             <a:endParaRPr/>
           </a:p>
@@ -16686,24 +16494,39 @@
       </p:sp>
       <p:sp>
         <p:nvSpPr>
-          <p:cNvPr id="480" name="Google Shape;480;p25"/>
+          <p:cNvPr id="402" name="Google Shape;402;p22"/>
           <p:cNvSpPr/>
           <p:nvPr/>
         </p:nvSpPr>
         <p:spPr>
           <a:xfrm>
-            <a:off x="822960" y="4023360"/>
-            <a:ext cx="685800" cy="685800"/>
-          </a:xfrm>
-          <a:prstGeom prst="ellipse">
-            <a:avLst/>
+            <a:off x="3355848" y="1691640"/>
+            <a:ext cx="2697480" cy="2286000"/>
+          </a:xfrm>
+          <a:prstGeom prst="roundRect">
+            <a:avLst>
+              <a:gd fmla="val 16667" name="adj"/>
+            </a:avLst>
           </a:prstGeom>
           <a:solidFill>
-            <a:srgbClr val="FF3621"/>
+            <a:srgbClr val="FFFFFF"/>
           </a:solidFill>
-          <a:ln>
-            <a:noFill/>
-          </a:ln>
+          <a:ln cap="flat" cmpd="sng" w="12700">
+            <a:solidFill>
+              <a:srgbClr val="DDE3ED"/>
+            </a:solidFill>
+            <a:prstDash val="solid"/>
+            <a:round/>
+            <a:headEnd len="sm" w="sm" type="none"/>
+            <a:tailEnd len="sm" w="sm" type="none"/>
+          </a:ln>
+          <a:effectLst>
+            <a:outerShdw blurRad="90000" rotWithShape="0" dir="5400000" dist="40000">
+              <a:srgbClr val="9AA5B5">
+                <a:alpha val="40000"/>
+              </a:srgbClr>
+            </a:outerShdw>
+          </a:effectLst>
         </p:spPr>
         <p:txBody>
           <a:bodyPr anchorCtr="0" anchor="ctr" bIns="45700" lIns="91425" spcFirstLastPara="1" rIns="91425" wrap="square" tIns="45700">
@@ -16737,179 +16560,22 @@
       </p:sp>
       <p:sp>
         <p:nvSpPr>
-          <p:cNvPr id="481" name="Google Shape;481;p25"/>
-          <p:cNvSpPr txBox="1"/>
-          <p:nvPr/>
-        </p:nvSpPr>
-        <p:spPr>
-          <a:xfrm>
-            <a:off x="822960" y="4023360"/>
-            <a:ext cx="685800" cy="261600"/>
-          </a:xfrm>
-          <a:prstGeom prst="rect">
-            <a:avLst/>
-          </a:prstGeom>
-          <a:noFill/>
-          <a:ln>
-            <a:noFill/>
-          </a:ln>
-        </p:spPr>
-        <p:txBody>
-          <a:bodyPr anchorCtr="0" anchor="ctr" bIns="0" lIns="0" spcFirstLastPara="1" rIns="0" wrap="square" tIns="0">
-            <a:spAutoFit/>
-          </a:bodyPr>
-          <a:lstStyle/>
-          <a:p>
-            <a:pPr indent="0" lvl="0" marL="0" marR="0" rtl="0" algn="ctr">
-              <a:lnSpc>
-                <a:spcPct val="100000"/>
-              </a:lnSpc>
-              <a:spcBef>
-                <a:spcPts val="0"/>
-              </a:spcBef>
-              <a:spcAft>
-                <a:spcPts val="0"/>
-              </a:spcAft>
-              <a:buNone/>
-            </a:pPr>
-            <a:r>
-              <a:rPr b="1" i="0" lang="en-US" sz="1700" u="none" cap="none" strike="noStrike">
-                <a:solidFill>
-                  <a:srgbClr val="FFFFFF"/>
-                </a:solidFill>
-                <a:latin typeface="Quattrocento Sans"/>
-                <a:ea typeface="Quattrocento Sans"/>
-                <a:cs typeface="Quattrocento Sans"/>
-                <a:sym typeface="Quattrocento Sans"/>
-              </a:rPr>
-              <a:t>03</a:t>
-            </a:r>
-            <a:endParaRPr/>
-          </a:p>
-        </p:txBody>
-      </p:sp>
-      <p:sp>
-        <p:nvSpPr>
-          <p:cNvPr id="482" name="Google Shape;482;p25"/>
-          <p:cNvSpPr txBox="1"/>
-          <p:nvPr/>
-        </p:nvSpPr>
-        <p:spPr>
-          <a:xfrm>
-            <a:off x="1737360" y="4041648"/>
-            <a:ext cx="2743200" cy="292500"/>
-          </a:xfrm>
-          <a:prstGeom prst="rect">
-            <a:avLst/>
-          </a:prstGeom>
-          <a:noFill/>
-          <a:ln>
-            <a:noFill/>
-          </a:ln>
-        </p:spPr>
-        <p:txBody>
-          <a:bodyPr anchorCtr="0" anchor="ctr" bIns="0" lIns="0" spcFirstLastPara="1" rIns="0" wrap="square" tIns="0">
-            <a:spAutoFit/>
-          </a:bodyPr>
-          <a:lstStyle/>
-          <a:p>
-            <a:pPr indent="0" lvl="0" marL="0" marR="0" rtl="0" algn="l">
-              <a:lnSpc>
-                <a:spcPct val="100000"/>
-              </a:lnSpc>
-              <a:spcBef>
-                <a:spcPts val="0"/>
-              </a:spcBef>
-              <a:spcAft>
-                <a:spcPts val="0"/>
-              </a:spcAft>
-              <a:buNone/>
-            </a:pPr>
-            <a:r>
-              <a:rPr b="1" i="0" lang="en-US" sz="1900" u="none" cap="none" strike="noStrike">
-                <a:solidFill>
-                  <a:srgbClr val="FFFFFF"/>
-                </a:solidFill>
-                <a:latin typeface="Quattrocento Sans"/>
-                <a:ea typeface="Quattrocento Sans"/>
-                <a:cs typeface="Quattrocento Sans"/>
-                <a:sym typeface="Quattrocento Sans"/>
-              </a:rPr>
-              <a:t>Copilot app</a:t>
-            </a:r>
-            <a:endParaRPr/>
-          </a:p>
-        </p:txBody>
-      </p:sp>
-      <p:sp>
-        <p:nvSpPr>
-          <p:cNvPr id="483" name="Google Shape;483;p25"/>
-          <p:cNvSpPr txBox="1"/>
-          <p:nvPr/>
-        </p:nvSpPr>
-        <p:spPr>
-          <a:xfrm>
-            <a:off x="4297680" y="4041648"/>
-            <a:ext cx="7132200" cy="215400"/>
-          </a:xfrm>
-          <a:prstGeom prst="rect">
-            <a:avLst/>
-          </a:prstGeom>
-          <a:noFill/>
-          <a:ln>
-            <a:noFill/>
-          </a:ln>
-        </p:spPr>
-        <p:txBody>
-          <a:bodyPr anchorCtr="0" anchor="ctr" bIns="0" lIns="0" spcFirstLastPara="1" rIns="0" wrap="square" tIns="0">
-            <a:spAutoFit/>
-          </a:bodyPr>
-          <a:lstStyle/>
-          <a:p>
-            <a:pPr indent="0" lvl="0" marL="0" marR="0" rtl="0" algn="l">
-              <a:lnSpc>
-                <a:spcPct val="110000"/>
-              </a:lnSpc>
-              <a:spcBef>
-                <a:spcPts val="0"/>
-              </a:spcBef>
-              <a:spcAft>
-                <a:spcPts val="0"/>
-              </a:spcAft>
-              <a:buNone/>
-            </a:pPr>
-            <a:r>
-              <a:rPr b="0" i="0" lang="en-US" sz="1400" u="none" cap="none" strike="noStrike">
-                <a:solidFill>
-                  <a:srgbClr val="C4CEDB"/>
-                </a:solidFill>
-                <a:latin typeface="Quattrocento Sans"/>
-                <a:ea typeface="Quattrocento Sans"/>
-                <a:cs typeface="Quattrocento Sans"/>
-                <a:sym typeface="Quattrocento Sans"/>
-              </a:rPr>
-              <a:t>Pick a high-priority KOL → 360 → AI briefing → plan + approved content → log decision to Lakebase.</a:t>
-            </a:r>
-            <a:endParaRPr/>
-          </a:p>
-        </p:txBody>
-      </p:sp>
-      <p:sp>
-        <p:nvSpPr>
-          <p:cNvPr id="484" name="Google Shape;484;p25"/>
+          <p:cNvPr id="403" name="Google Shape;403;p22"/>
           <p:cNvSpPr/>
           <p:nvPr/>
         </p:nvSpPr>
         <p:spPr>
           <a:xfrm>
-            <a:off x="822960" y="4892040"/>
-            <a:ext cx="685800" cy="685800"/>
-          </a:xfrm>
-          <a:prstGeom prst="ellipse">
-            <a:avLst/>
+            <a:off x="3355848" y="1691640"/>
+            <a:ext cx="2697480" cy="109728"/>
+          </a:xfrm>
+          <a:prstGeom prst="roundRect">
+            <a:avLst>
+              <a:gd fmla="val 16667" name="adj"/>
+            </a:avLst>
           </a:prstGeom>
           <a:solidFill>
-            <a:srgbClr val="FF3621"/>
+            <a:srgbClr val="5B2D8E"/>
           </a:solidFill>
           <a:ln>
             <a:noFill/>
@@ -16947,14 +16613,14 @@
       </p:sp>
       <p:sp>
         <p:nvSpPr>
-          <p:cNvPr id="485" name="Google Shape;485;p25"/>
+          <p:cNvPr id="404" name="Google Shape;404;p22"/>
           <p:cNvSpPr txBox="1"/>
           <p:nvPr/>
         </p:nvSpPr>
         <p:spPr>
           <a:xfrm>
-            <a:off x="822960" y="4892040"/>
-            <a:ext cx="685800" cy="261600"/>
+            <a:off x="3355848" y="1965960"/>
+            <a:ext cx="2697480" cy="640080"/>
           </a:xfrm>
           <a:prstGeom prst="rect">
             <a:avLst/>
@@ -16965,7 +16631,7 @@
           </a:ln>
         </p:spPr>
         <p:txBody>
-          <a:bodyPr anchorCtr="0" anchor="ctr" bIns="0" lIns="0" spcFirstLastPara="1" rIns="0" wrap="square" tIns="0">
+          <a:bodyPr anchorCtr="0" anchor="t" bIns="0" lIns="0" spcFirstLastPara="1" rIns="0" wrap="square" tIns="0">
             <a:spAutoFit/>
           </a:bodyPr>
           <a:lstStyle/>
@@ -16983,16 +16649,16 @@
               <a:buNone/>
             </a:pPr>
             <a:r>
-              <a:rPr b="1" i="0" lang="en-US" sz="1700" u="none" cap="none" strike="noStrike">
+              <a:rPr b="1" i="0" lang="en-US" sz="3000" u="none" cap="none" strike="noStrike">
                 <a:solidFill>
-                  <a:srgbClr val="FFFFFF"/>
+                  <a:srgbClr val="5B2D8E"/>
                 </a:solidFill>
                 <a:latin typeface="Quattrocento Sans"/>
                 <a:ea typeface="Quattrocento Sans"/>
                 <a:cs typeface="Quattrocento Sans"/>
                 <a:sym typeface="Quattrocento Sans"/>
               </a:rPr>
-              <a:t>04</a:t>
+              <a:t>Prepared MSLs</a:t>
             </a:r>
             <a:endParaRPr/>
           </a:p>
@@ -17000,14 +16666,14 @@
       </p:sp>
       <p:sp>
         <p:nvSpPr>
-          <p:cNvPr id="486" name="Google Shape;486;p25"/>
+          <p:cNvPr id="405" name="Google Shape;405;p22"/>
           <p:cNvSpPr txBox="1"/>
           <p:nvPr/>
         </p:nvSpPr>
         <p:spPr>
           <a:xfrm>
-            <a:off x="1737360" y="4910328"/>
-            <a:ext cx="2743200" cy="292500"/>
+            <a:off x="3355848" y="2606040"/>
+            <a:ext cx="2697480" cy="365760"/>
           </a:xfrm>
           <a:prstGeom prst="rect">
             <a:avLst/>
@@ -17018,12 +16684,12 @@
           </a:ln>
         </p:spPr>
         <p:txBody>
-          <a:bodyPr anchorCtr="0" anchor="ctr" bIns="0" lIns="0" spcFirstLastPara="1" rIns="0" wrap="square" tIns="0">
+          <a:bodyPr anchorCtr="0" anchor="t" bIns="0" lIns="0" spcFirstLastPara="1" rIns="0" wrap="square" tIns="0">
             <a:spAutoFit/>
           </a:bodyPr>
           <a:lstStyle/>
           <a:p>
-            <a:pPr indent="0" lvl="0" marL="0" marR="0" rtl="0" algn="l">
+            <a:pPr indent="0" lvl="0" marL="0" marR="0" rtl="0" algn="ctr">
               <a:lnSpc>
                 <a:spcPct val="100000"/>
               </a:lnSpc>
@@ -17036,16 +16702,16 @@
               <a:buNone/>
             </a:pPr>
             <a:r>
-              <a:rPr b="1" i="0" lang="en-US" sz="1900" u="none" cap="none" strike="noStrike">
+              <a:rPr b="1" i="0" lang="en-US" sz="1500" u="none" cap="none" strike="noStrike">
                 <a:solidFill>
-                  <a:srgbClr val="FFFFFF"/>
+                  <a:srgbClr val="0B1733"/>
                 </a:solidFill>
                 <a:latin typeface="Quattrocento Sans"/>
                 <a:ea typeface="Quattrocento Sans"/>
                 <a:cs typeface="Quattrocento Sans"/>
                 <a:sym typeface="Quattrocento Sans"/>
               </a:rPr>
-              <a:t>Governance</a:t>
+              <a:t>minutes, not hours</a:t>
             </a:r>
             <a:endParaRPr/>
           </a:p>
@@ -17053,14 +16719,14 @@
       </p:sp>
       <p:sp>
         <p:nvSpPr>
-          <p:cNvPr id="487" name="Google Shape;487;p25"/>
+          <p:cNvPr id="406" name="Google Shape;406;p22"/>
           <p:cNvSpPr txBox="1"/>
           <p:nvPr/>
         </p:nvSpPr>
         <p:spPr>
           <a:xfrm>
-            <a:off x="4297680" y="4910328"/>
-            <a:ext cx="7132200" cy="215400"/>
+            <a:off x="3584448" y="3063240"/>
+            <a:ext cx="2240280" cy="868680"/>
           </a:xfrm>
           <a:prstGeom prst="rect">
             <a:avLst/>
@@ -17071,14 +16737,14 @@
           </a:ln>
         </p:spPr>
         <p:txBody>
-          <a:bodyPr anchorCtr="0" anchor="ctr" bIns="0" lIns="0" spcFirstLastPara="1" rIns="0" wrap="square" tIns="0">
+          <a:bodyPr anchorCtr="0" anchor="t" bIns="0" lIns="0" spcFirstLastPara="1" rIns="0" wrap="square" tIns="0">
             <a:spAutoFit/>
           </a:bodyPr>
           <a:lstStyle/>
           <a:p>
-            <a:pPr indent="0" lvl="0" marL="0" marR="0" rtl="0" algn="l">
+            <a:pPr indent="0" lvl="0" marL="0" marR="0" rtl="0" algn="ctr">
               <a:lnSpc>
-                <a:spcPct val="110000"/>
+                <a:spcPct val="115000"/>
               </a:lnSpc>
               <a:spcBef>
                 <a:spcPts val="0"/>
@@ -17089,16 +16755,16 @@
               <a:buNone/>
             </a:pPr>
             <a:r>
-              <a:rPr b="0" i="0" lang="en-US" sz="1400" u="none" cap="none" strike="noStrike">
+              <a:rPr b="0" i="0" lang="en-US" sz="1200" u="none" cap="none" strike="noStrike">
                 <a:solidFill>
-                  <a:srgbClr val="C4CEDB"/>
+                  <a:srgbClr val="5A6472"/>
                 </a:solidFill>
                 <a:latin typeface="Quattrocento Sans"/>
                 <a:ea typeface="Quattrocento Sans"/>
                 <a:cs typeface="Quattrocento Sans"/>
                 <a:sym typeface="Quattrocento Sans"/>
               </a:rPr>
-              <a:t>Point back to Unity Catalog lineage &amp; the 'requires MSL review' guardrail.</a:t>
+              <a:t>AI pre-engagement briefing + next-best action for every KOL visit.</a:t>
             </a:r>
             <a:endParaRPr/>
           </a:p>
@@ -17106,24 +16772,39 @@
       </p:sp>
       <p:sp>
         <p:nvSpPr>
-          <p:cNvPr id="488" name="Google Shape;488;p25"/>
+          <p:cNvPr id="407" name="Google Shape;407;p22"/>
           <p:cNvSpPr/>
           <p:nvPr/>
         </p:nvSpPr>
         <p:spPr>
           <a:xfrm>
-            <a:off x="822960" y="5989320"/>
-            <a:ext cx="10515600" cy="17700"/>
-          </a:xfrm>
-          <a:prstGeom prst="rect">
-            <a:avLst/>
+            <a:off x="6163056" y="1691640"/>
+            <a:ext cx="2697480" cy="2286000"/>
+          </a:xfrm>
+          <a:prstGeom prst="roundRect">
+            <a:avLst>
+              <a:gd fmla="val 16667" name="adj"/>
+            </a:avLst>
           </a:prstGeom>
           <a:solidFill>
-            <a:srgbClr val="2A3A5E"/>
+            <a:srgbClr val="FFFFFF"/>
           </a:solidFill>
-          <a:ln>
-            <a:noFill/>
-          </a:ln>
+          <a:ln cap="flat" cmpd="sng" w="12700">
+            <a:solidFill>
+              <a:srgbClr val="DDE3ED"/>
+            </a:solidFill>
+            <a:prstDash val="solid"/>
+            <a:round/>
+            <a:headEnd len="sm" w="sm" type="none"/>
+            <a:tailEnd len="sm" w="sm" type="none"/>
+          </a:ln>
+          <a:effectLst>
+            <a:outerShdw blurRad="90000" rotWithShape="0" dir="5400000" dist="40000">
+              <a:srgbClr val="9AA5B5">
+                <a:alpha val="40000"/>
+              </a:srgbClr>
+            </a:outerShdw>
+          </a:effectLst>
         </p:spPr>
         <p:txBody>
           <a:bodyPr anchorCtr="0" anchor="ctr" bIns="45700" lIns="91425" spcFirstLastPara="1" rIns="91425" wrap="square" tIns="45700">
@@ -17157,14 +16838,67 @@
       </p:sp>
       <p:sp>
         <p:nvSpPr>
-          <p:cNvPr id="489" name="Google Shape;489;p25"/>
+          <p:cNvPr id="408" name="Google Shape;408;p22"/>
+          <p:cNvSpPr/>
+          <p:nvPr/>
+        </p:nvSpPr>
+        <p:spPr>
+          <a:xfrm>
+            <a:off x="6163056" y="1691640"/>
+            <a:ext cx="2697480" cy="109728"/>
+          </a:xfrm>
+          <a:prstGeom prst="roundRect">
+            <a:avLst>
+              <a:gd fmla="val 16667" name="adj"/>
+            </a:avLst>
+          </a:prstGeom>
+          <a:solidFill>
+            <a:srgbClr val="00878A"/>
+          </a:solidFill>
+          <a:ln>
+            <a:noFill/>
+          </a:ln>
+        </p:spPr>
+        <p:txBody>
+          <a:bodyPr anchorCtr="0" anchor="ctr" bIns="45700" lIns="91425" spcFirstLastPara="1" rIns="91425" wrap="square" tIns="45700">
+            <a:noAutofit/>
+          </a:bodyPr>
+          <a:lstStyle/>
+          <a:p>
+            <a:pPr indent="0" lvl="0" marL="0" marR="0" rtl="0" algn="ctr">
+              <a:spcBef>
+                <a:spcPts val="0"/>
+              </a:spcBef>
+              <a:spcAft>
+                <a:spcPts val="0"/>
+              </a:spcAft>
+              <a:buNone/>
+            </a:pPr>
+            <a:r>
+              <a:t/>
+            </a:r>
+            <a:endParaRPr b="0" i="0" sz="1800" u="none" cap="none" strike="noStrike">
+              <a:solidFill>
+                <a:schemeClr val="dk1"/>
+              </a:solidFill>
+              <a:latin typeface="Calibri"/>
+              <a:ea typeface="Calibri"/>
+              <a:cs typeface="Calibri"/>
+              <a:sym typeface="Calibri"/>
+            </a:endParaRPr>
+          </a:p>
+        </p:txBody>
+      </p:sp>
+      <p:sp>
+        <p:nvSpPr>
+          <p:cNvPr id="409" name="Google Shape;409;p22"/>
           <p:cNvSpPr txBox="1"/>
           <p:nvPr/>
         </p:nvSpPr>
         <p:spPr>
           <a:xfrm>
-            <a:off x="822960" y="6172200"/>
-            <a:ext cx="10607100" cy="177000"/>
+            <a:off x="6163056" y="1965960"/>
+            <a:ext cx="2697480" cy="640080"/>
           </a:xfrm>
           <a:prstGeom prst="rect">
             <a:avLst/>
@@ -17180,7 +16914,7 @@
           </a:bodyPr>
           <a:lstStyle/>
           <a:p>
-            <a:pPr indent="0" lvl="0" marL="0" marR="0" rtl="0" algn="l">
+            <a:pPr indent="0" lvl="0" marL="0" marR="0" rtl="0" algn="ctr">
               <a:lnSpc>
                 <a:spcPct val="100000"/>
               </a:lnSpc>
@@ -17193,16 +16927,3989 @@
               <a:buNone/>
             </a:pPr>
             <a:r>
-              <a:rPr b="0" i="0" lang="en-US" sz="1150" u="none" cap="none" strike="noStrike">
+              <a:rPr b="1" i="0" lang="en-US" sz="3000" u="none" cap="none" strike="noStrike">
                 <a:solidFill>
-                  <a:srgbClr val="8E9AAE"/>
+                  <a:srgbClr val="00878A"/>
                 </a:solidFill>
                 <a:latin typeface="Quattrocento Sans"/>
                 <a:ea typeface="Quattrocento Sans"/>
                 <a:cs typeface="Quattrocento Sans"/>
                 <a:sym typeface="Quattrocento Sans"/>
               </a:rPr>
-              <a:t>Medical Omnichannel Intelligence  ·  Daiichi Sankyo  ·  Databricks Data Intelligence Platform  ·  adb-984752964297111 (Azure) · _sa701.moa  ·  synthetic demo data</a:t>
+              <a:t>Governed &amp; safe</a:t>
+            </a:r>
+            <a:endParaRPr/>
+          </a:p>
+        </p:txBody>
+      </p:sp>
+      <p:sp>
+        <p:nvSpPr>
+          <p:cNvPr id="410" name="Google Shape;410;p22"/>
+          <p:cNvSpPr txBox="1"/>
+          <p:nvPr/>
+        </p:nvSpPr>
+        <p:spPr>
+          <a:xfrm>
+            <a:off x="6163056" y="2606040"/>
+            <a:ext cx="2697480" cy="365760"/>
+          </a:xfrm>
+          <a:prstGeom prst="rect">
+            <a:avLst/>
+          </a:prstGeom>
+          <a:noFill/>
+          <a:ln>
+            <a:noFill/>
+          </a:ln>
+        </p:spPr>
+        <p:txBody>
+          <a:bodyPr anchorCtr="0" anchor="t" bIns="0" lIns="0" spcFirstLastPara="1" rIns="0" wrap="square" tIns="0">
+            <a:spAutoFit/>
+          </a:bodyPr>
+          <a:lstStyle/>
+          <a:p>
+            <a:pPr indent="0" lvl="0" marL="0" marR="0" rtl="0" algn="ctr">
+              <a:lnSpc>
+                <a:spcPct val="100000"/>
+              </a:lnSpc>
+              <a:spcBef>
+                <a:spcPts val="0"/>
+              </a:spcBef>
+              <a:spcAft>
+                <a:spcPts val="0"/>
+              </a:spcAft>
+              <a:buNone/>
+            </a:pPr>
+            <a:r>
+              <a:rPr b="1" i="0" lang="en-US" sz="1500" u="none" cap="none" strike="noStrike">
+                <a:solidFill>
+                  <a:srgbClr val="0B1733"/>
+                </a:solidFill>
+                <a:latin typeface="Quattrocento Sans"/>
+                <a:ea typeface="Quattrocento Sans"/>
+                <a:cs typeface="Quattrocento Sans"/>
+                <a:sym typeface="Quattrocento Sans"/>
+              </a:rPr>
+              <a:t>audit-ready</a:t>
+            </a:r>
+            <a:endParaRPr/>
+          </a:p>
+        </p:txBody>
+      </p:sp>
+      <p:sp>
+        <p:nvSpPr>
+          <p:cNvPr id="411" name="Google Shape;411;p22"/>
+          <p:cNvSpPr txBox="1"/>
+          <p:nvPr/>
+        </p:nvSpPr>
+        <p:spPr>
+          <a:xfrm>
+            <a:off x="6391656" y="3063240"/>
+            <a:ext cx="2240280" cy="868680"/>
+          </a:xfrm>
+          <a:prstGeom prst="rect">
+            <a:avLst/>
+          </a:prstGeom>
+          <a:noFill/>
+          <a:ln>
+            <a:noFill/>
+          </a:ln>
+        </p:spPr>
+        <p:txBody>
+          <a:bodyPr anchorCtr="0" anchor="t" bIns="0" lIns="0" spcFirstLastPara="1" rIns="0" wrap="square" tIns="0">
+            <a:spAutoFit/>
+          </a:bodyPr>
+          <a:lstStyle/>
+          <a:p>
+            <a:pPr indent="0" lvl="0" marL="0" marR="0" rtl="0" algn="ctr">
+              <a:lnSpc>
+                <a:spcPct val="115000"/>
+              </a:lnSpc>
+              <a:spcBef>
+                <a:spcPts val="0"/>
+              </a:spcBef>
+              <a:spcAft>
+                <a:spcPts val="0"/>
+              </a:spcAft>
+              <a:buNone/>
+            </a:pPr>
+            <a:r>
+              <a:rPr b="0" i="0" lang="en-US" sz="1200" u="none" cap="none" strike="noStrike">
+                <a:solidFill>
+                  <a:srgbClr val="5A6472"/>
+                </a:solidFill>
+                <a:latin typeface="Quattrocento Sans"/>
+                <a:ea typeface="Quattrocento Sans"/>
+                <a:cs typeface="Quattrocento Sans"/>
+                <a:sym typeface="Quattrocento Sans"/>
+              </a:rPr>
+              <a:t>Non-promotional, human-in-the-loop, one Unity Catalog security model.</a:t>
+            </a:r>
+            <a:endParaRPr/>
+          </a:p>
+        </p:txBody>
+      </p:sp>
+      <p:sp>
+        <p:nvSpPr>
+          <p:cNvPr id="412" name="Google Shape;412;p22"/>
+          <p:cNvSpPr/>
+          <p:nvPr/>
+        </p:nvSpPr>
+        <p:spPr>
+          <a:xfrm>
+            <a:off x="8970264" y="1691640"/>
+            <a:ext cx="2697480" cy="2286000"/>
+          </a:xfrm>
+          <a:prstGeom prst="roundRect">
+            <a:avLst>
+              <a:gd fmla="val 16667" name="adj"/>
+            </a:avLst>
+          </a:prstGeom>
+          <a:solidFill>
+            <a:srgbClr val="FFFFFF"/>
+          </a:solidFill>
+          <a:ln cap="flat" cmpd="sng" w="12700">
+            <a:solidFill>
+              <a:srgbClr val="DDE3ED"/>
+            </a:solidFill>
+            <a:prstDash val="solid"/>
+            <a:round/>
+            <a:headEnd len="sm" w="sm" type="none"/>
+            <a:tailEnd len="sm" w="sm" type="none"/>
+          </a:ln>
+          <a:effectLst>
+            <a:outerShdw blurRad="90000" rotWithShape="0" dir="5400000" dist="40000">
+              <a:srgbClr val="9AA5B5">
+                <a:alpha val="40000"/>
+              </a:srgbClr>
+            </a:outerShdw>
+          </a:effectLst>
+        </p:spPr>
+        <p:txBody>
+          <a:bodyPr anchorCtr="0" anchor="ctr" bIns="45700" lIns="91425" spcFirstLastPara="1" rIns="91425" wrap="square" tIns="45700">
+            <a:noAutofit/>
+          </a:bodyPr>
+          <a:lstStyle/>
+          <a:p>
+            <a:pPr indent="0" lvl="0" marL="0" marR="0" rtl="0" algn="ctr">
+              <a:spcBef>
+                <a:spcPts val="0"/>
+              </a:spcBef>
+              <a:spcAft>
+                <a:spcPts val="0"/>
+              </a:spcAft>
+              <a:buNone/>
+            </a:pPr>
+            <a:r>
+              <a:t/>
+            </a:r>
+            <a:endParaRPr b="0" i="0" sz="1800" u="none" cap="none" strike="noStrike">
+              <a:solidFill>
+                <a:schemeClr val="dk1"/>
+              </a:solidFill>
+              <a:latin typeface="Calibri"/>
+              <a:ea typeface="Calibri"/>
+              <a:cs typeface="Calibri"/>
+              <a:sym typeface="Calibri"/>
+            </a:endParaRPr>
+          </a:p>
+        </p:txBody>
+      </p:sp>
+      <p:sp>
+        <p:nvSpPr>
+          <p:cNvPr id="413" name="Google Shape;413;p22"/>
+          <p:cNvSpPr/>
+          <p:nvPr/>
+        </p:nvSpPr>
+        <p:spPr>
+          <a:xfrm>
+            <a:off x="8970264" y="1691640"/>
+            <a:ext cx="2697480" cy="109728"/>
+          </a:xfrm>
+          <a:prstGeom prst="roundRect">
+            <a:avLst>
+              <a:gd fmla="val 16667" name="adj"/>
+            </a:avLst>
+          </a:prstGeom>
+          <a:solidFill>
+            <a:srgbClr val="1F9D55"/>
+          </a:solidFill>
+          <a:ln>
+            <a:noFill/>
+          </a:ln>
+        </p:spPr>
+        <p:txBody>
+          <a:bodyPr anchorCtr="0" anchor="ctr" bIns="45700" lIns="91425" spcFirstLastPara="1" rIns="91425" wrap="square" tIns="45700">
+            <a:noAutofit/>
+          </a:bodyPr>
+          <a:lstStyle/>
+          <a:p>
+            <a:pPr indent="0" lvl="0" marL="0" marR="0" rtl="0" algn="ctr">
+              <a:spcBef>
+                <a:spcPts val="0"/>
+              </a:spcBef>
+              <a:spcAft>
+                <a:spcPts val="0"/>
+              </a:spcAft>
+              <a:buNone/>
+            </a:pPr>
+            <a:r>
+              <a:t/>
+            </a:r>
+            <a:endParaRPr b="0" i="0" sz="1800" u="none" cap="none" strike="noStrike">
+              <a:solidFill>
+                <a:schemeClr val="dk1"/>
+              </a:solidFill>
+              <a:latin typeface="Calibri"/>
+              <a:ea typeface="Calibri"/>
+              <a:cs typeface="Calibri"/>
+              <a:sym typeface="Calibri"/>
+            </a:endParaRPr>
+          </a:p>
+        </p:txBody>
+      </p:sp>
+      <p:sp>
+        <p:nvSpPr>
+          <p:cNvPr id="414" name="Google Shape;414;p22"/>
+          <p:cNvSpPr txBox="1"/>
+          <p:nvPr/>
+        </p:nvSpPr>
+        <p:spPr>
+          <a:xfrm>
+            <a:off x="8970264" y="1965960"/>
+            <a:ext cx="2697480" cy="640080"/>
+          </a:xfrm>
+          <a:prstGeom prst="rect">
+            <a:avLst/>
+          </a:prstGeom>
+          <a:noFill/>
+          <a:ln>
+            <a:noFill/>
+          </a:ln>
+        </p:spPr>
+        <p:txBody>
+          <a:bodyPr anchorCtr="0" anchor="t" bIns="0" lIns="0" spcFirstLastPara="1" rIns="0" wrap="square" tIns="0">
+            <a:spAutoFit/>
+          </a:bodyPr>
+          <a:lstStyle/>
+          <a:p>
+            <a:pPr indent="0" lvl="0" marL="0" marR="0" rtl="0" algn="ctr">
+              <a:lnSpc>
+                <a:spcPct val="100000"/>
+              </a:lnSpc>
+              <a:spcBef>
+                <a:spcPts val="0"/>
+              </a:spcBef>
+              <a:spcAft>
+                <a:spcPts val="0"/>
+              </a:spcAft>
+              <a:buNone/>
+            </a:pPr>
+            <a:r>
+              <a:rPr b="1" i="0" lang="en-US" sz="3000" u="none" cap="none" strike="noStrike">
+                <a:solidFill>
+                  <a:srgbClr val="1F9D55"/>
+                </a:solidFill>
+                <a:latin typeface="Quattrocento Sans"/>
+                <a:ea typeface="Quattrocento Sans"/>
+                <a:cs typeface="Quattrocento Sans"/>
+                <a:sym typeface="Quattrocento Sans"/>
+              </a:rPr>
+              <a:t>~$3.4M / yr</a:t>
+            </a:r>
+            <a:endParaRPr/>
+          </a:p>
+        </p:txBody>
+      </p:sp>
+      <p:sp>
+        <p:nvSpPr>
+          <p:cNvPr id="415" name="Google Shape;415;p22"/>
+          <p:cNvSpPr txBox="1"/>
+          <p:nvPr/>
+        </p:nvSpPr>
+        <p:spPr>
+          <a:xfrm>
+            <a:off x="8970264" y="2606040"/>
+            <a:ext cx="2697480" cy="365760"/>
+          </a:xfrm>
+          <a:prstGeom prst="rect">
+            <a:avLst/>
+          </a:prstGeom>
+          <a:noFill/>
+          <a:ln>
+            <a:noFill/>
+          </a:ln>
+        </p:spPr>
+        <p:txBody>
+          <a:bodyPr anchorCtr="0" anchor="t" bIns="0" lIns="0" spcFirstLastPara="1" rIns="0" wrap="square" tIns="0">
+            <a:spAutoFit/>
+          </a:bodyPr>
+          <a:lstStyle/>
+          <a:p>
+            <a:pPr indent="0" lvl="0" marL="0" marR="0" rtl="0" algn="ctr">
+              <a:lnSpc>
+                <a:spcPct val="100000"/>
+              </a:lnSpc>
+              <a:spcBef>
+                <a:spcPts val="0"/>
+              </a:spcBef>
+              <a:spcAft>
+                <a:spcPts val="0"/>
+              </a:spcAft>
+              <a:buNone/>
+            </a:pPr>
+            <a:r>
+              <a:rPr b="1" i="0" lang="en-US" sz="1500" u="none" cap="none" strike="noStrike">
+                <a:solidFill>
+                  <a:srgbClr val="0B1733"/>
+                </a:solidFill>
+                <a:latin typeface="Quattrocento Sans"/>
+                <a:ea typeface="Quattrocento Sans"/>
+                <a:cs typeface="Quattrocento Sans"/>
+                <a:sym typeface="Quattrocento Sans"/>
+              </a:rPr>
+              <a:t>estimated value</a:t>
+            </a:r>
+            <a:endParaRPr/>
+          </a:p>
+        </p:txBody>
+      </p:sp>
+      <p:sp>
+        <p:nvSpPr>
+          <p:cNvPr id="416" name="Google Shape;416;p22"/>
+          <p:cNvSpPr txBox="1"/>
+          <p:nvPr/>
+        </p:nvSpPr>
+        <p:spPr>
+          <a:xfrm>
+            <a:off x="9198864" y="3063240"/>
+            <a:ext cx="2240280" cy="868680"/>
+          </a:xfrm>
+          <a:prstGeom prst="rect">
+            <a:avLst/>
+          </a:prstGeom>
+          <a:noFill/>
+          <a:ln>
+            <a:noFill/>
+          </a:ln>
+        </p:spPr>
+        <p:txBody>
+          <a:bodyPr anchorCtr="0" anchor="t" bIns="0" lIns="0" spcFirstLastPara="1" rIns="0" wrap="square" tIns="0">
+            <a:spAutoFit/>
+          </a:bodyPr>
+          <a:lstStyle/>
+          <a:p>
+            <a:pPr indent="0" lvl="0" marL="0" marR="0" rtl="0" algn="ctr">
+              <a:lnSpc>
+                <a:spcPct val="115000"/>
+              </a:lnSpc>
+              <a:spcBef>
+                <a:spcPts val="0"/>
+              </a:spcBef>
+              <a:spcAft>
+                <a:spcPts val="0"/>
+              </a:spcAft>
+              <a:buNone/>
+            </a:pPr>
+            <a:r>
+              <a:rPr b="0" i="0" lang="en-US" sz="1200" u="none" cap="none" strike="noStrike">
+                <a:solidFill>
+                  <a:srgbClr val="5A6472"/>
+                </a:solidFill>
+                <a:latin typeface="Quattrocento Sans"/>
+                <a:ea typeface="Quattrocento Sans"/>
+                <a:cs typeface="Quattrocento Sans"/>
+                <a:sym typeface="Quattrocento Sans"/>
+              </a:rPr>
+              <a:t>For a 120-MSL field-medical org — KPI detail on the following slides.</a:t>
+            </a:r>
+            <a:endParaRPr/>
+          </a:p>
+        </p:txBody>
+      </p:sp>
+      <p:sp>
+        <p:nvSpPr>
+          <p:cNvPr id="417" name="Google Shape;417;p22"/>
+          <p:cNvSpPr/>
+          <p:nvPr/>
+        </p:nvSpPr>
+        <p:spPr>
+          <a:xfrm>
+            <a:off x="548640" y="4251960"/>
+            <a:ext cx="11091672" cy="1737360"/>
+          </a:xfrm>
+          <a:prstGeom prst="roundRect">
+            <a:avLst>
+              <a:gd fmla="val 16667" name="adj"/>
+            </a:avLst>
+          </a:prstGeom>
+          <a:solidFill>
+            <a:srgbClr val="0B1733"/>
+          </a:solidFill>
+          <a:ln cap="flat" cmpd="sng" w="12700">
+            <a:solidFill>
+              <a:srgbClr val="0B1733"/>
+            </a:solidFill>
+            <a:prstDash val="solid"/>
+            <a:round/>
+            <a:headEnd len="sm" w="sm" type="none"/>
+            <a:tailEnd len="sm" w="sm" type="none"/>
+          </a:ln>
+          <a:effectLst>
+            <a:outerShdw blurRad="90000" rotWithShape="0" dir="5400000" dist="40000">
+              <a:srgbClr val="9AA5B5">
+                <a:alpha val="40000"/>
+              </a:srgbClr>
+            </a:outerShdw>
+          </a:effectLst>
+        </p:spPr>
+        <p:txBody>
+          <a:bodyPr anchorCtr="0" anchor="ctr" bIns="45700" lIns="91425" spcFirstLastPara="1" rIns="91425" wrap="square" tIns="45700">
+            <a:noAutofit/>
+          </a:bodyPr>
+          <a:lstStyle/>
+          <a:p>
+            <a:pPr indent="0" lvl="0" marL="0" marR="0" rtl="0" algn="ctr">
+              <a:spcBef>
+                <a:spcPts val="0"/>
+              </a:spcBef>
+              <a:spcAft>
+                <a:spcPts val="0"/>
+              </a:spcAft>
+              <a:buNone/>
+            </a:pPr>
+            <a:r>
+              <a:t/>
+            </a:r>
+            <a:endParaRPr b="0" i="0" sz="1800" u="none" cap="none" strike="noStrike">
+              <a:solidFill>
+                <a:schemeClr val="dk1"/>
+              </a:solidFill>
+              <a:latin typeface="Calibri"/>
+              <a:ea typeface="Calibri"/>
+              <a:cs typeface="Calibri"/>
+              <a:sym typeface="Calibri"/>
+            </a:endParaRPr>
+          </a:p>
+        </p:txBody>
+      </p:sp>
+      <p:sp>
+        <p:nvSpPr>
+          <p:cNvPr id="418" name="Google Shape;418;p22"/>
+          <p:cNvSpPr txBox="1"/>
+          <p:nvPr/>
+        </p:nvSpPr>
+        <p:spPr>
+          <a:xfrm>
+            <a:off x="914400" y="4480560"/>
+            <a:ext cx="10058400" cy="365760"/>
+          </a:xfrm>
+          <a:prstGeom prst="rect">
+            <a:avLst/>
+          </a:prstGeom>
+          <a:noFill/>
+          <a:ln>
+            <a:noFill/>
+          </a:ln>
+        </p:spPr>
+        <p:txBody>
+          <a:bodyPr anchorCtr="0" anchor="t" bIns="0" lIns="0" spcFirstLastPara="1" rIns="0" wrap="square" tIns="0">
+            <a:spAutoFit/>
+          </a:bodyPr>
+          <a:lstStyle/>
+          <a:p>
+            <a:pPr indent="0" lvl="0" marL="0" marR="0" rtl="0" algn="l">
+              <a:lnSpc>
+                <a:spcPct val="100000"/>
+              </a:lnSpc>
+              <a:spcBef>
+                <a:spcPts val="0"/>
+              </a:spcBef>
+              <a:spcAft>
+                <a:spcPts val="0"/>
+              </a:spcAft>
+              <a:buNone/>
+            </a:pPr>
+            <a:r>
+              <a:rPr b="1" i="0" lang="en-US" sz="1500" u="none" cap="none" strike="noStrike">
+                <a:solidFill>
+                  <a:srgbClr val="7EC8E3"/>
+                </a:solidFill>
+                <a:latin typeface="Quattrocento Sans"/>
+                <a:ea typeface="Quattrocento Sans"/>
+                <a:cs typeface="Quattrocento Sans"/>
+                <a:sym typeface="Quattrocento Sans"/>
+              </a:rPr>
+              <a:t>For the sponsor and the field</a:t>
+            </a:r>
+            <a:endParaRPr/>
+          </a:p>
+        </p:txBody>
+      </p:sp>
+      <p:sp>
+        <p:nvSpPr>
+          <p:cNvPr id="419" name="Google Shape;419;p22"/>
+          <p:cNvSpPr txBox="1"/>
+          <p:nvPr/>
+        </p:nvSpPr>
+        <p:spPr>
+          <a:xfrm>
+            <a:off x="914400" y="4892040"/>
+            <a:ext cx="10332600" cy="831300"/>
+          </a:xfrm>
+          <a:prstGeom prst="rect">
+            <a:avLst/>
+          </a:prstGeom>
+          <a:noFill/>
+          <a:ln>
+            <a:noFill/>
+          </a:ln>
+        </p:spPr>
+        <p:txBody>
+          <a:bodyPr anchorCtr="0" anchor="t" bIns="0" lIns="0" spcFirstLastPara="1" rIns="0" wrap="square" tIns="0">
+            <a:spAutoFit/>
+          </a:bodyPr>
+          <a:lstStyle/>
+          <a:p>
+            <a:pPr indent="0" lvl="0" marL="0" marR="0" rtl="0" algn="l">
+              <a:lnSpc>
+                <a:spcPct val="130000"/>
+              </a:lnSpc>
+              <a:spcBef>
+                <a:spcPts val="0"/>
+              </a:spcBef>
+              <a:spcAft>
+                <a:spcPts val="0"/>
+              </a:spcAft>
+              <a:buNone/>
+            </a:pPr>
+            <a:r>
+              <a:rPr b="0" i="0" lang="en-US" sz="1500" u="none" cap="none" strike="noStrike">
+                <a:solidFill>
+                  <a:srgbClr val="FFFFFF"/>
+                </a:solidFill>
+                <a:latin typeface="Quattrocento Sans"/>
+                <a:ea typeface="Quattrocento Sans"/>
+                <a:cs typeface="Quattrocento Sans"/>
+                <a:sym typeface="Quattrocento Sans"/>
+              </a:rPr>
+              <a:t>Executive sponsor (VP Medical Affairs): quantified ROI, faster inquiry SLAs, and audit-ready Unity Catalog governance for a regulated, non-promotional function.   Domain owner (field-medical lead): every MSL arrives prepared, prioritized, and armed with approved content.</a:t>
+            </a:r>
+            <a:endParaRPr/>
+          </a:p>
+        </p:txBody>
+      </p:sp>
+      <p:sp>
+        <p:nvSpPr>
+          <p:cNvPr id="420" name="Google Shape;420;p22"/>
+          <p:cNvSpPr txBox="1"/>
+          <p:nvPr/>
+        </p:nvSpPr>
+        <p:spPr>
+          <a:xfrm>
+            <a:off x="548640" y="6510528"/>
+            <a:ext cx="11064240" cy="274320"/>
+          </a:xfrm>
+          <a:prstGeom prst="rect">
+            <a:avLst/>
+          </a:prstGeom>
+          <a:noFill/>
+          <a:ln>
+            <a:noFill/>
+          </a:ln>
+        </p:spPr>
+        <p:txBody>
+          <a:bodyPr anchorCtr="0" anchor="t" bIns="0" lIns="0" spcFirstLastPara="1" rIns="0" wrap="square" tIns="0">
+            <a:spAutoFit/>
+          </a:bodyPr>
+          <a:lstStyle/>
+          <a:p>
+            <a:pPr indent="0" lvl="0" marL="0" marR="0" rtl="0" algn="l">
+              <a:lnSpc>
+                <a:spcPct val="100000"/>
+              </a:lnSpc>
+              <a:spcBef>
+                <a:spcPts val="0"/>
+              </a:spcBef>
+              <a:spcAft>
+                <a:spcPts val="0"/>
+              </a:spcAft>
+              <a:buNone/>
+            </a:pPr>
+            <a:r>
+              <a:rPr b="0" i="0" lang="en-US" sz="850" u="none" cap="none" strike="noStrike">
+                <a:solidFill>
+                  <a:srgbClr val="909AAA"/>
+                </a:solidFill>
+                <a:latin typeface="Quattrocento Sans"/>
+                <a:ea typeface="Quattrocento Sans"/>
+                <a:cs typeface="Quattrocento Sans"/>
+                <a:sym typeface="Quattrocento Sans"/>
+              </a:rPr>
+              <a:t>Medical Omnichannel Intelligence  ·  Daiichi Sankyo (synthetic)  ·  Databricks  ·  _sa701.moa</a:t>
+            </a:r>
+            <a:endParaRPr/>
+          </a:p>
+        </p:txBody>
+      </p:sp>
+    </p:spTree>
+  </p:cSld>
+  <p:clrMapOvr>
+    <a:masterClrMapping/>
+  </p:clrMapOvr>
+</p:sld>
+</file>
+
+<file path=ppt/slides/slide14.xml><?xml version="1.0" encoding="utf-8"?>
+<p:sld xmlns:a="http://schemas.openxmlformats.org/drawingml/2006/main" xmlns:p="http://schemas.openxmlformats.org/presentationml/2006/main" xmlns:r="http://schemas.openxmlformats.org/officeDocument/2006/relationships">
+  <p:cSld>
+    <p:spTree>
+      <p:nvGrpSpPr>
+        <p:cNvPr id="1" name=""/>
+        <p:cNvGrpSpPr/>
+        <p:nvPr/>
+      </p:nvGrpSpPr>
+      <p:grpSpPr/>
+      <p:sp>
+        <p:nvSpPr>
+          <p:cNvPr id="434" name="Google Shape;434;p24"/>
+          <p:cNvSpPr/>
+          <p:nvPr/>
+        </p:nvSpPr>
+        <p:spPr>
+          <a:xfrm>
+            <a:off x="0" y="0"/>
+            <a:ext cx="12191695" cy="128016"/>
+          </a:xfrm>
+          <a:prstGeom prst="rect">
+            <a:avLst/>
+          </a:prstGeom>
+          <a:solidFill>
+            <a:srgbClr val="FF3621"/>
+          </a:solidFill>
+          <a:ln>
+            <a:noFill/>
+          </a:ln>
+        </p:spPr>
+        <p:txBody>
+          <a:bodyPr anchorCtr="0" anchor="ctr" bIns="45700" lIns="91425" spcFirstLastPara="1" rIns="91425" wrap="square" tIns="45700">
+            <a:noAutofit/>
+          </a:bodyPr>
+          <a:lstStyle/>
+          <a:p>
+            <a:pPr indent="0" lvl="0" marL="0" marR="0" rtl="0" algn="ctr">
+              <a:spcBef>
+                <a:spcPts val="0"/>
+              </a:spcBef>
+              <a:spcAft>
+                <a:spcPts val="0"/>
+              </a:spcAft>
+              <a:buNone/>
+            </a:pPr>
+            <a:r>
+              <a:t/>
+            </a:r>
+            <a:endParaRPr b="0" i="0" sz="1800" u="none" cap="none" strike="noStrike">
+              <a:solidFill>
+                <a:schemeClr val="dk1"/>
+              </a:solidFill>
+              <a:latin typeface="Calibri"/>
+              <a:ea typeface="Calibri"/>
+              <a:cs typeface="Calibri"/>
+              <a:sym typeface="Calibri"/>
+            </a:endParaRPr>
+          </a:p>
+        </p:txBody>
+      </p:sp>
+      <p:sp>
+        <p:nvSpPr>
+          <p:cNvPr id="435" name="Google Shape;435;p24"/>
+          <p:cNvSpPr txBox="1"/>
+          <p:nvPr/>
+        </p:nvSpPr>
+        <p:spPr>
+          <a:xfrm>
+            <a:off x="548640" y="384048"/>
+            <a:ext cx="10058400" cy="274320"/>
+          </a:xfrm>
+          <a:prstGeom prst="rect">
+            <a:avLst/>
+          </a:prstGeom>
+          <a:noFill/>
+          <a:ln>
+            <a:noFill/>
+          </a:ln>
+        </p:spPr>
+        <p:txBody>
+          <a:bodyPr anchorCtr="0" anchor="t" bIns="0" lIns="0" spcFirstLastPara="1" rIns="0" wrap="square" tIns="0">
+            <a:spAutoFit/>
+          </a:bodyPr>
+          <a:lstStyle/>
+          <a:p>
+            <a:pPr indent="0" lvl="0" marL="0" marR="0" rtl="0" algn="l">
+              <a:lnSpc>
+                <a:spcPct val="100000"/>
+              </a:lnSpc>
+              <a:spcBef>
+                <a:spcPts val="0"/>
+              </a:spcBef>
+              <a:spcAft>
+                <a:spcPts val="0"/>
+              </a:spcAft>
+              <a:buNone/>
+            </a:pPr>
+            <a:r>
+              <a:rPr b="1" i="0" lang="en-US" sz="1200" u="none" cap="none" strike="noStrike">
+                <a:solidFill>
+                  <a:srgbClr val="FF3621"/>
+                </a:solidFill>
+                <a:latin typeface="Quattrocento Sans"/>
+                <a:ea typeface="Quattrocento Sans"/>
+                <a:cs typeface="Quattrocento Sans"/>
+                <a:sym typeface="Quattrocento Sans"/>
+              </a:rPr>
+              <a:t>DECISIONS &amp; TRADE-OFFS</a:t>
+            </a:r>
+            <a:endParaRPr/>
+          </a:p>
+        </p:txBody>
+      </p:sp>
+      <p:sp>
+        <p:nvSpPr>
+          <p:cNvPr id="436" name="Google Shape;436;p24"/>
+          <p:cNvSpPr txBox="1"/>
+          <p:nvPr/>
+        </p:nvSpPr>
+        <p:spPr>
+          <a:xfrm>
+            <a:off x="548640" y="658368"/>
+            <a:ext cx="11064240" cy="640080"/>
+          </a:xfrm>
+          <a:prstGeom prst="rect">
+            <a:avLst/>
+          </a:prstGeom>
+          <a:noFill/>
+          <a:ln>
+            <a:noFill/>
+          </a:ln>
+        </p:spPr>
+        <p:txBody>
+          <a:bodyPr anchorCtr="0" anchor="t" bIns="0" lIns="0" spcFirstLastPara="1" rIns="0" wrap="square" tIns="0">
+            <a:spAutoFit/>
+          </a:bodyPr>
+          <a:lstStyle/>
+          <a:p>
+            <a:pPr indent="0" lvl="0" marL="0" marR="0" rtl="0" algn="l">
+              <a:lnSpc>
+                <a:spcPct val="100000"/>
+              </a:lnSpc>
+              <a:spcBef>
+                <a:spcPts val="0"/>
+              </a:spcBef>
+              <a:spcAft>
+                <a:spcPts val="0"/>
+              </a:spcAft>
+              <a:buNone/>
+            </a:pPr>
+            <a:r>
+              <a:rPr b="1" i="0" lang="en-US" sz="2700" u="none" cap="none" strike="noStrike">
+                <a:solidFill>
+                  <a:srgbClr val="0B1733"/>
+                </a:solidFill>
+                <a:latin typeface="Quattrocento Sans"/>
+                <a:ea typeface="Quattrocento Sans"/>
+                <a:cs typeface="Quattrocento Sans"/>
+                <a:sym typeface="Quattrocento Sans"/>
+              </a:rPr>
+              <a:t>Why this approach — and what we consciously traded</a:t>
+            </a:r>
+            <a:endParaRPr/>
+          </a:p>
+        </p:txBody>
+      </p:sp>
+      <p:sp>
+        <p:nvSpPr>
+          <p:cNvPr id="437" name="Google Shape;437;p24"/>
+          <p:cNvSpPr txBox="1"/>
+          <p:nvPr/>
+        </p:nvSpPr>
+        <p:spPr>
+          <a:xfrm>
+            <a:off x="11430000" y="384048"/>
+            <a:ext cx="548640" cy="274320"/>
+          </a:xfrm>
+          <a:prstGeom prst="rect">
+            <a:avLst/>
+          </a:prstGeom>
+          <a:noFill/>
+          <a:ln>
+            <a:noFill/>
+          </a:ln>
+        </p:spPr>
+        <p:txBody>
+          <a:bodyPr anchorCtr="0" anchor="t" bIns="0" lIns="0" spcFirstLastPara="1" rIns="0" wrap="square" tIns="0">
+            <a:spAutoFit/>
+          </a:bodyPr>
+          <a:lstStyle/>
+          <a:p>
+            <a:pPr indent="0" lvl="0" marL="0" marR="0" rtl="0" algn="r">
+              <a:lnSpc>
+                <a:spcPct val="100000"/>
+              </a:lnSpc>
+              <a:spcBef>
+                <a:spcPts val="0"/>
+              </a:spcBef>
+              <a:spcAft>
+                <a:spcPts val="0"/>
+              </a:spcAft>
+              <a:buNone/>
+            </a:pPr>
+            <a:r>
+              <a:rPr b="1" i="0" lang="en-US" sz="1100" u="none" cap="none" strike="noStrike">
+                <a:solidFill>
+                  <a:srgbClr val="909AAA"/>
+                </a:solidFill>
+                <a:latin typeface="Quattrocento Sans"/>
+                <a:ea typeface="Quattrocento Sans"/>
+                <a:cs typeface="Quattrocento Sans"/>
+                <a:sym typeface="Quattrocento Sans"/>
+              </a:rPr>
+              <a:t>12</a:t>
+            </a:r>
+            <a:endParaRPr/>
+          </a:p>
+        </p:txBody>
+      </p:sp>
+      <p:sp>
+        <p:nvSpPr>
+          <p:cNvPr id="438" name="Google Shape;438;p24"/>
+          <p:cNvSpPr/>
+          <p:nvPr/>
+        </p:nvSpPr>
+        <p:spPr>
+          <a:xfrm>
+            <a:off x="548640" y="1371600"/>
+            <a:ext cx="11091672" cy="17780"/>
+          </a:xfrm>
+          <a:prstGeom prst="rect">
+            <a:avLst/>
+          </a:prstGeom>
+          <a:solidFill>
+            <a:srgbClr val="DDE3ED"/>
+          </a:solidFill>
+          <a:ln>
+            <a:noFill/>
+          </a:ln>
+        </p:spPr>
+        <p:txBody>
+          <a:bodyPr anchorCtr="0" anchor="ctr" bIns="45700" lIns="91425" spcFirstLastPara="1" rIns="91425" wrap="square" tIns="45700">
+            <a:noAutofit/>
+          </a:bodyPr>
+          <a:lstStyle/>
+          <a:p>
+            <a:pPr indent="0" lvl="0" marL="0" marR="0" rtl="0" algn="ctr">
+              <a:spcBef>
+                <a:spcPts val="0"/>
+              </a:spcBef>
+              <a:spcAft>
+                <a:spcPts val="0"/>
+              </a:spcAft>
+              <a:buNone/>
+            </a:pPr>
+            <a:r>
+              <a:t/>
+            </a:r>
+            <a:endParaRPr b="0" i="0" sz="1800" u="none" cap="none" strike="noStrike">
+              <a:solidFill>
+                <a:schemeClr val="dk1"/>
+              </a:solidFill>
+              <a:latin typeface="Calibri"/>
+              <a:ea typeface="Calibri"/>
+              <a:cs typeface="Calibri"/>
+              <a:sym typeface="Calibri"/>
+            </a:endParaRPr>
+          </a:p>
+        </p:txBody>
+      </p:sp>
+      <p:sp>
+        <p:nvSpPr>
+          <p:cNvPr id="439" name="Google Shape;439;p24"/>
+          <p:cNvSpPr/>
+          <p:nvPr/>
+        </p:nvSpPr>
+        <p:spPr>
+          <a:xfrm>
+            <a:off x="548640" y="1645920"/>
+            <a:ext cx="3611880" cy="1874519"/>
+          </a:xfrm>
+          <a:prstGeom prst="roundRect">
+            <a:avLst>
+              <a:gd fmla="val 16667" name="adj"/>
+            </a:avLst>
+          </a:prstGeom>
+          <a:solidFill>
+            <a:srgbClr val="DEF5E7"/>
+          </a:solidFill>
+          <a:ln cap="flat" cmpd="sng" w="12700">
+            <a:solidFill>
+              <a:srgbClr val="DDE3ED"/>
+            </a:solidFill>
+            <a:prstDash val="solid"/>
+            <a:round/>
+            <a:headEnd len="sm" w="sm" type="none"/>
+            <a:tailEnd len="sm" w="sm" type="none"/>
+          </a:ln>
+          <a:effectLst>
+            <a:outerShdw blurRad="90000" rotWithShape="0" dir="5400000" dist="40000">
+              <a:srgbClr val="9AA5B5">
+                <a:alpha val="40000"/>
+              </a:srgbClr>
+            </a:outerShdw>
+          </a:effectLst>
+        </p:spPr>
+        <p:txBody>
+          <a:bodyPr anchorCtr="0" anchor="ctr" bIns="45700" lIns="91425" spcFirstLastPara="1" rIns="91425" wrap="square" tIns="45700">
+            <a:noAutofit/>
+          </a:bodyPr>
+          <a:lstStyle/>
+          <a:p>
+            <a:pPr indent="0" lvl="0" marL="0" marR="0" rtl="0" algn="ctr">
+              <a:spcBef>
+                <a:spcPts val="0"/>
+              </a:spcBef>
+              <a:spcAft>
+                <a:spcPts val="0"/>
+              </a:spcAft>
+              <a:buNone/>
+            </a:pPr>
+            <a:r>
+              <a:t/>
+            </a:r>
+            <a:endParaRPr b="0" i="0" sz="1800" u="none" cap="none" strike="noStrike">
+              <a:solidFill>
+                <a:schemeClr val="dk1"/>
+              </a:solidFill>
+              <a:latin typeface="Calibri"/>
+              <a:ea typeface="Calibri"/>
+              <a:cs typeface="Calibri"/>
+              <a:sym typeface="Calibri"/>
+            </a:endParaRPr>
+          </a:p>
+        </p:txBody>
+      </p:sp>
+      <p:sp>
+        <p:nvSpPr>
+          <p:cNvPr id="440" name="Google Shape;440;p24"/>
+          <p:cNvSpPr txBox="1"/>
+          <p:nvPr/>
+        </p:nvSpPr>
+        <p:spPr>
+          <a:xfrm>
+            <a:off x="777240" y="1828800"/>
+            <a:ext cx="640080" cy="548640"/>
+          </a:xfrm>
+          <a:prstGeom prst="rect">
+            <a:avLst/>
+          </a:prstGeom>
+          <a:noFill/>
+          <a:ln>
+            <a:noFill/>
+          </a:ln>
+        </p:spPr>
+        <p:txBody>
+          <a:bodyPr anchorCtr="0" anchor="t" bIns="0" lIns="0" spcFirstLastPara="1" rIns="0" wrap="square" tIns="0">
+            <a:spAutoFit/>
+          </a:bodyPr>
+          <a:lstStyle/>
+          <a:p>
+            <a:pPr indent="0" lvl="0" marL="0" marR="0" rtl="0" algn="l">
+              <a:lnSpc>
+                <a:spcPct val="100000"/>
+              </a:lnSpc>
+              <a:spcBef>
+                <a:spcPts val="0"/>
+              </a:spcBef>
+              <a:spcAft>
+                <a:spcPts val="0"/>
+              </a:spcAft>
+              <a:buNone/>
+            </a:pPr>
+            <a:r>
+              <a:rPr b="0" i="0" lang="en-US" sz="2400" u="none" cap="none" strike="noStrike">
+                <a:solidFill>
+                  <a:srgbClr val="1A1A2E"/>
+                </a:solidFill>
+                <a:latin typeface="Quattrocento Sans"/>
+                <a:ea typeface="Quattrocento Sans"/>
+                <a:cs typeface="Quattrocento Sans"/>
+                <a:sym typeface="Quattrocento Sans"/>
+              </a:rPr>
+              <a:t>🗄️</a:t>
+            </a:r>
+            <a:endParaRPr/>
+          </a:p>
+        </p:txBody>
+      </p:sp>
+      <p:sp>
+        <p:nvSpPr>
+          <p:cNvPr id="441" name="Google Shape;441;p24"/>
+          <p:cNvSpPr txBox="1"/>
+          <p:nvPr/>
+        </p:nvSpPr>
+        <p:spPr>
+          <a:xfrm>
+            <a:off x="1463040" y="1874520"/>
+            <a:ext cx="2606040" cy="548640"/>
+          </a:xfrm>
+          <a:prstGeom prst="rect">
+            <a:avLst/>
+          </a:prstGeom>
+          <a:noFill/>
+          <a:ln>
+            <a:noFill/>
+          </a:ln>
+        </p:spPr>
+        <p:txBody>
+          <a:bodyPr anchorCtr="0" anchor="ctr" bIns="0" lIns="0" spcFirstLastPara="1" rIns="0" wrap="square" tIns="0">
+            <a:spAutoFit/>
+          </a:bodyPr>
+          <a:lstStyle/>
+          <a:p>
+            <a:pPr indent="0" lvl="0" marL="0" marR="0" rtl="0" algn="l">
+              <a:lnSpc>
+                <a:spcPct val="100000"/>
+              </a:lnSpc>
+              <a:spcBef>
+                <a:spcPts val="0"/>
+              </a:spcBef>
+              <a:spcAft>
+                <a:spcPts val="0"/>
+              </a:spcAft>
+              <a:buNone/>
+            </a:pPr>
+            <a:r>
+              <a:rPr b="1" i="0" lang="en-US" sz="1500" u="none" cap="none" strike="noStrike">
+                <a:solidFill>
+                  <a:srgbClr val="0B1733"/>
+                </a:solidFill>
+                <a:latin typeface="Quattrocento Sans"/>
+                <a:ea typeface="Quattrocento Sans"/>
+                <a:cs typeface="Quattrocento Sans"/>
+                <a:sym typeface="Quattrocento Sans"/>
+              </a:rPr>
+              <a:t>Lakebase for serving</a:t>
+            </a:r>
+            <a:endParaRPr/>
+          </a:p>
+        </p:txBody>
+      </p:sp>
+      <p:sp>
+        <p:nvSpPr>
+          <p:cNvPr id="442" name="Google Shape;442;p24"/>
+          <p:cNvSpPr txBox="1"/>
+          <p:nvPr/>
+        </p:nvSpPr>
+        <p:spPr>
+          <a:xfrm>
+            <a:off x="804672" y="2514600"/>
+            <a:ext cx="3108960" cy="914400"/>
+          </a:xfrm>
+          <a:prstGeom prst="rect">
+            <a:avLst/>
+          </a:prstGeom>
+          <a:noFill/>
+          <a:ln>
+            <a:noFill/>
+          </a:ln>
+        </p:spPr>
+        <p:txBody>
+          <a:bodyPr anchorCtr="0" anchor="t" bIns="0" lIns="0" spcFirstLastPara="1" rIns="0" wrap="square" tIns="0">
+            <a:spAutoFit/>
+          </a:bodyPr>
+          <a:lstStyle/>
+          <a:p>
+            <a:pPr indent="0" lvl="0" marL="0" marR="0" rtl="0" algn="l">
+              <a:lnSpc>
+                <a:spcPct val="115000"/>
+              </a:lnSpc>
+              <a:spcBef>
+                <a:spcPts val="0"/>
+              </a:spcBef>
+              <a:spcAft>
+                <a:spcPts val="0"/>
+              </a:spcAft>
+              <a:buNone/>
+            </a:pPr>
+            <a:r>
+              <a:rPr b="0" i="0" lang="en-US" sz="1200" u="none" cap="none" strike="noStrike">
+                <a:solidFill>
+                  <a:srgbClr val="1A1A2E"/>
+                </a:solidFill>
+                <a:latin typeface="Quattrocento Sans"/>
+                <a:ea typeface="Quattrocento Sans"/>
+                <a:cs typeface="Quattrocento Sans"/>
+                <a:sym typeface="Quattrocento Sans"/>
+              </a:rPr>
+              <a:t>The app needs single-row reads + transactional write-back — Delta Gold can't hit that latency. Trade-off: a small Postgres surface, synced from UC.</a:t>
+            </a:r>
+            <a:endParaRPr/>
+          </a:p>
+        </p:txBody>
+      </p:sp>
+      <p:sp>
+        <p:nvSpPr>
+          <p:cNvPr id="443" name="Google Shape;443;p24"/>
+          <p:cNvSpPr/>
+          <p:nvPr/>
+        </p:nvSpPr>
+        <p:spPr>
+          <a:xfrm>
+            <a:off x="4288536" y="1645920"/>
+            <a:ext cx="3611880" cy="1874519"/>
+          </a:xfrm>
+          <a:prstGeom prst="roundRect">
+            <a:avLst>
+              <a:gd fmla="val 16667" name="adj"/>
+            </a:avLst>
+          </a:prstGeom>
+          <a:solidFill>
+            <a:srgbClr val="E4ECFF"/>
+          </a:solidFill>
+          <a:ln cap="flat" cmpd="sng" w="12700">
+            <a:solidFill>
+              <a:srgbClr val="DDE3ED"/>
+            </a:solidFill>
+            <a:prstDash val="solid"/>
+            <a:round/>
+            <a:headEnd len="sm" w="sm" type="none"/>
+            <a:tailEnd len="sm" w="sm" type="none"/>
+          </a:ln>
+          <a:effectLst>
+            <a:outerShdw blurRad="90000" rotWithShape="0" dir="5400000" dist="40000">
+              <a:srgbClr val="9AA5B5">
+                <a:alpha val="40000"/>
+              </a:srgbClr>
+            </a:outerShdw>
+          </a:effectLst>
+        </p:spPr>
+        <p:txBody>
+          <a:bodyPr anchorCtr="0" anchor="ctr" bIns="45700" lIns="91425" spcFirstLastPara="1" rIns="91425" wrap="square" tIns="45700">
+            <a:noAutofit/>
+          </a:bodyPr>
+          <a:lstStyle/>
+          <a:p>
+            <a:pPr indent="0" lvl="0" marL="0" marR="0" rtl="0" algn="ctr">
+              <a:spcBef>
+                <a:spcPts val="0"/>
+              </a:spcBef>
+              <a:spcAft>
+                <a:spcPts val="0"/>
+              </a:spcAft>
+              <a:buNone/>
+            </a:pPr>
+            <a:r>
+              <a:t/>
+            </a:r>
+            <a:endParaRPr b="0" i="0" sz="1800" u="none" cap="none" strike="noStrike">
+              <a:solidFill>
+                <a:schemeClr val="dk1"/>
+              </a:solidFill>
+              <a:latin typeface="Calibri"/>
+              <a:ea typeface="Calibri"/>
+              <a:cs typeface="Calibri"/>
+              <a:sym typeface="Calibri"/>
+            </a:endParaRPr>
+          </a:p>
+        </p:txBody>
+      </p:sp>
+      <p:sp>
+        <p:nvSpPr>
+          <p:cNvPr id="444" name="Google Shape;444;p24"/>
+          <p:cNvSpPr txBox="1"/>
+          <p:nvPr/>
+        </p:nvSpPr>
+        <p:spPr>
+          <a:xfrm>
+            <a:off x="4517136" y="1828800"/>
+            <a:ext cx="640080" cy="548640"/>
+          </a:xfrm>
+          <a:prstGeom prst="rect">
+            <a:avLst/>
+          </a:prstGeom>
+          <a:noFill/>
+          <a:ln>
+            <a:noFill/>
+          </a:ln>
+        </p:spPr>
+        <p:txBody>
+          <a:bodyPr anchorCtr="0" anchor="t" bIns="0" lIns="0" spcFirstLastPara="1" rIns="0" wrap="square" tIns="0">
+            <a:spAutoFit/>
+          </a:bodyPr>
+          <a:lstStyle/>
+          <a:p>
+            <a:pPr indent="0" lvl="0" marL="0" marR="0" rtl="0" algn="l">
+              <a:lnSpc>
+                <a:spcPct val="100000"/>
+              </a:lnSpc>
+              <a:spcBef>
+                <a:spcPts val="0"/>
+              </a:spcBef>
+              <a:spcAft>
+                <a:spcPts val="0"/>
+              </a:spcAft>
+              <a:buNone/>
+            </a:pPr>
+            <a:r>
+              <a:rPr b="0" i="0" lang="en-US" sz="2400" u="none" cap="none" strike="noStrike">
+                <a:solidFill>
+                  <a:srgbClr val="1A1A2E"/>
+                </a:solidFill>
+                <a:latin typeface="Quattrocento Sans"/>
+                <a:ea typeface="Quattrocento Sans"/>
+                <a:cs typeface="Quattrocento Sans"/>
+                <a:sym typeface="Quattrocento Sans"/>
+              </a:rPr>
+              <a:t>🧠</a:t>
+            </a:r>
+            <a:endParaRPr/>
+          </a:p>
+        </p:txBody>
+      </p:sp>
+      <p:sp>
+        <p:nvSpPr>
+          <p:cNvPr id="445" name="Google Shape;445;p24"/>
+          <p:cNvSpPr txBox="1"/>
+          <p:nvPr/>
+        </p:nvSpPr>
+        <p:spPr>
+          <a:xfrm>
+            <a:off x="5202936" y="1874520"/>
+            <a:ext cx="2606040" cy="548640"/>
+          </a:xfrm>
+          <a:prstGeom prst="rect">
+            <a:avLst/>
+          </a:prstGeom>
+          <a:noFill/>
+          <a:ln>
+            <a:noFill/>
+          </a:ln>
+        </p:spPr>
+        <p:txBody>
+          <a:bodyPr anchorCtr="0" anchor="ctr" bIns="0" lIns="0" spcFirstLastPara="1" rIns="0" wrap="square" tIns="0">
+            <a:spAutoFit/>
+          </a:bodyPr>
+          <a:lstStyle/>
+          <a:p>
+            <a:pPr indent="0" lvl="0" marL="0" marR="0" rtl="0" algn="l">
+              <a:lnSpc>
+                <a:spcPct val="100000"/>
+              </a:lnSpc>
+              <a:spcBef>
+                <a:spcPts val="0"/>
+              </a:spcBef>
+              <a:spcAft>
+                <a:spcPts val="0"/>
+              </a:spcAft>
+              <a:buNone/>
+            </a:pPr>
+            <a:r>
+              <a:rPr b="1" i="0" lang="en-US" sz="1500" u="none" cap="none" strike="noStrike">
+                <a:solidFill>
+                  <a:srgbClr val="0B1733"/>
+                </a:solidFill>
+                <a:latin typeface="Quattrocento Sans"/>
+                <a:ea typeface="Quattrocento Sans"/>
+                <a:cs typeface="Quattrocento Sans"/>
+                <a:sym typeface="Quattrocento Sans"/>
+              </a:rPr>
+              <a:t>ai_query() in-pipeline</a:t>
+            </a:r>
+            <a:endParaRPr/>
+          </a:p>
+        </p:txBody>
+      </p:sp>
+      <p:sp>
+        <p:nvSpPr>
+          <p:cNvPr id="446" name="Google Shape;446;p24"/>
+          <p:cNvSpPr txBox="1"/>
+          <p:nvPr/>
+        </p:nvSpPr>
+        <p:spPr>
+          <a:xfrm>
+            <a:off x="4544568" y="2514600"/>
+            <a:ext cx="3108960" cy="914400"/>
+          </a:xfrm>
+          <a:prstGeom prst="rect">
+            <a:avLst/>
+          </a:prstGeom>
+          <a:noFill/>
+          <a:ln>
+            <a:noFill/>
+          </a:ln>
+        </p:spPr>
+        <p:txBody>
+          <a:bodyPr anchorCtr="0" anchor="t" bIns="0" lIns="0" spcFirstLastPara="1" rIns="0" wrap="square" tIns="0">
+            <a:spAutoFit/>
+          </a:bodyPr>
+          <a:lstStyle/>
+          <a:p>
+            <a:pPr indent="0" lvl="0" marL="0" marR="0" rtl="0" algn="l">
+              <a:lnSpc>
+                <a:spcPct val="115000"/>
+              </a:lnSpc>
+              <a:spcBef>
+                <a:spcPts val="0"/>
+              </a:spcBef>
+              <a:spcAft>
+                <a:spcPts val="0"/>
+              </a:spcAft>
+              <a:buNone/>
+            </a:pPr>
+            <a:r>
+              <a:rPr b="0" i="0" lang="en-US" sz="1200" u="none" cap="none" strike="noStrike">
+                <a:solidFill>
+                  <a:srgbClr val="1A1A2E"/>
+                </a:solidFill>
+                <a:latin typeface="Quattrocento Sans"/>
+                <a:ea typeface="Quattrocento Sans"/>
+                <a:cs typeface="Quattrocento Sans"/>
+                <a:sym typeface="Quattrocento Sans"/>
+              </a:rPr>
+              <a:t>Extraction stays in governed SQL, no data egress. An external LLM API adds movement, cost &amp; compliance risk. Trade-off: hosted models only.</a:t>
+            </a:r>
+            <a:endParaRPr/>
+          </a:p>
+        </p:txBody>
+      </p:sp>
+      <p:sp>
+        <p:nvSpPr>
+          <p:cNvPr id="447" name="Google Shape;447;p24"/>
+          <p:cNvSpPr/>
+          <p:nvPr/>
+        </p:nvSpPr>
+        <p:spPr>
+          <a:xfrm>
+            <a:off x="8028432" y="1645920"/>
+            <a:ext cx="3611880" cy="1874519"/>
+          </a:xfrm>
+          <a:prstGeom prst="roundRect">
+            <a:avLst>
+              <a:gd fmla="val 16667" name="adj"/>
+            </a:avLst>
+          </a:prstGeom>
+          <a:solidFill>
+            <a:srgbClr val="EEE5F8"/>
+          </a:solidFill>
+          <a:ln cap="flat" cmpd="sng" w="12700">
+            <a:solidFill>
+              <a:srgbClr val="DDE3ED"/>
+            </a:solidFill>
+            <a:prstDash val="solid"/>
+            <a:round/>
+            <a:headEnd len="sm" w="sm" type="none"/>
+            <a:tailEnd len="sm" w="sm" type="none"/>
+          </a:ln>
+          <a:effectLst>
+            <a:outerShdw blurRad="90000" rotWithShape="0" dir="5400000" dist="40000">
+              <a:srgbClr val="9AA5B5">
+                <a:alpha val="40000"/>
+              </a:srgbClr>
+            </a:outerShdw>
+          </a:effectLst>
+        </p:spPr>
+        <p:txBody>
+          <a:bodyPr anchorCtr="0" anchor="ctr" bIns="45700" lIns="91425" spcFirstLastPara="1" rIns="91425" wrap="square" tIns="45700">
+            <a:noAutofit/>
+          </a:bodyPr>
+          <a:lstStyle/>
+          <a:p>
+            <a:pPr indent="0" lvl="0" marL="0" marR="0" rtl="0" algn="ctr">
+              <a:spcBef>
+                <a:spcPts val="0"/>
+              </a:spcBef>
+              <a:spcAft>
+                <a:spcPts val="0"/>
+              </a:spcAft>
+              <a:buNone/>
+            </a:pPr>
+            <a:r>
+              <a:t/>
+            </a:r>
+            <a:endParaRPr b="0" i="0" sz="1800" u="none" cap="none" strike="noStrike">
+              <a:solidFill>
+                <a:schemeClr val="dk1"/>
+              </a:solidFill>
+              <a:latin typeface="Calibri"/>
+              <a:ea typeface="Calibri"/>
+              <a:cs typeface="Calibri"/>
+              <a:sym typeface="Calibri"/>
+            </a:endParaRPr>
+          </a:p>
+        </p:txBody>
+      </p:sp>
+      <p:sp>
+        <p:nvSpPr>
+          <p:cNvPr id="448" name="Google Shape;448;p24"/>
+          <p:cNvSpPr txBox="1"/>
+          <p:nvPr/>
+        </p:nvSpPr>
+        <p:spPr>
+          <a:xfrm>
+            <a:off x="8257032" y="1828800"/>
+            <a:ext cx="640080" cy="548640"/>
+          </a:xfrm>
+          <a:prstGeom prst="rect">
+            <a:avLst/>
+          </a:prstGeom>
+          <a:noFill/>
+          <a:ln>
+            <a:noFill/>
+          </a:ln>
+        </p:spPr>
+        <p:txBody>
+          <a:bodyPr anchorCtr="0" anchor="t" bIns="0" lIns="0" spcFirstLastPara="1" rIns="0" wrap="square" tIns="0">
+            <a:spAutoFit/>
+          </a:bodyPr>
+          <a:lstStyle/>
+          <a:p>
+            <a:pPr indent="0" lvl="0" marL="0" marR="0" rtl="0" algn="l">
+              <a:lnSpc>
+                <a:spcPct val="100000"/>
+              </a:lnSpc>
+              <a:spcBef>
+                <a:spcPts val="0"/>
+              </a:spcBef>
+              <a:spcAft>
+                <a:spcPts val="0"/>
+              </a:spcAft>
+              <a:buNone/>
+            </a:pPr>
+            <a:r>
+              <a:rPr b="0" i="0" lang="en-US" sz="2400" u="none" cap="none" strike="noStrike">
+                <a:solidFill>
+                  <a:srgbClr val="1A1A2E"/>
+                </a:solidFill>
+                <a:latin typeface="Quattrocento Sans"/>
+                <a:ea typeface="Quattrocento Sans"/>
+                <a:cs typeface="Quattrocento Sans"/>
+                <a:sym typeface="Quattrocento Sans"/>
+              </a:rPr>
+              <a:t>💬</a:t>
+            </a:r>
+            <a:endParaRPr/>
+          </a:p>
+        </p:txBody>
+      </p:sp>
+      <p:sp>
+        <p:nvSpPr>
+          <p:cNvPr id="449" name="Google Shape;449;p24"/>
+          <p:cNvSpPr txBox="1"/>
+          <p:nvPr/>
+        </p:nvSpPr>
+        <p:spPr>
+          <a:xfrm>
+            <a:off x="8942832" y="1874520"/>
+            <a:ext cx="2606040" cy="548640"/>
+          </a:xfrm>
+          <a:prstGeom prst="rect">
+            <a:avLst/>
+          </a:prstGeom>
+          <a:noFill/>
+          <a:ln>
+            <a:noFill/>
+          </a:ln>
+        </p:spPr>
+        <p:txBody>
+          <a:bodyPr anchorCtr="0" anchor="ctr" bIns="0" lIns="0" spcFirstLastPara="1" rIns="0" wrap="square" tIns="0">
+            <a:spAutoFit/>
+          </a:bodyPr>
+          <a:lstStyle/>
+          <a:p>
+            <a:pPr indent="0" lvl="0" marL="0" marR="0" rtl="0" algn="l">
+              <a:lnSpc>
+                <a:spcPct val="100000"/>
+              </a:lnSpc>
+              <a:spcBef>
+                <a:spcPts val="0"/>
+              </a:spcBef>
+              <a:spcAft>
+                <a:spcPts val="0"/>
+              </a:spcAft>
+              <a:buNone/>
+            </a:pPr>
+            <a:r>
+              <a:rPr b="1" i="0" lang="en-US" sz="1500" u="none" cap="none" strike="noStrike">
+                <a:solidFill>
+                  <a:srgbClr val="0B1733"/>
+                </a:solidFill>
+                <a:latin typeface="Quattrocento Sans"/>
+                <a:ea typeface="Quattrocento Sans"/>
+                <a:cs typeface="Quattrocento Sans"/>
+                <a:sym typeface="Quattrocento Sans"/>
+              </a:rPr>
+              <a:t>Genie AND a dashboard</a:t>
+            </a:r>
+            <a:endParaRPr/>
+          </a:p>
+        </p:txBody>
+      </p:sp>
+      <p:sp>
+        <p:nvSpPr>
+          <p:cNvPr id="450" name="Google Shape;450;p24"/>
+          <p:cNvSpPr txBox="1"/>
+          <p:nvPr/>
+        </p:nvSpPr>
+        <p:spPr>
+          <a:xfrm>
+            <a:off x="8284464" y="2514600"/>
+            <a:ext cx="3108960" cy="914400"/>
+          </a:xfrm>
+          <a:prstGeom prst="rect">
+            <a:avLst/>
+          </a:prstGeom>
+          <a:noFill/>
+          <a:ln>
+            <a:noFill/>
+          </a:ln>
+        </p:spPr>
+        <p:txBody>
+          <a:bodyPr anchorCtr="0" anchor="t" bIns="0" lIns="0" spcFirstLastPara="1" rIns="0" wrap="square" tIns="0">
+            <a:spAutoFit/>
+          </a:bodyPr>
+          <a:lstStyle/>
+          <a:p>
+            <a:pPr indent="0" lvl="0" marL="0" marR="0" rtl="0" algn="l">
+              <a:lnSpc>
+                <a:spcPct val="115000"/>
+              </a:lnSpc>
+              <a:spcBef>
+                <a:spcPts val="0"/>
+              </a:spcBef>
+              <a:spcAft>
+                <a:spcPts val="0"/>
+              </a:spcAft>
+              <a:buNone/>
+            </a:pPr>
+            <a:r>
+              <a:rPr b="0" i="0" lang="en-US" sz="1200" u="none" cap="none" strike="noStrike">
+                <a:solidFill>
+                  <a:srgbClr val="1A1A2E"/>
+                </a:solidFill>
+                <a:latin typeface="Quattrocento Sans"/>
+                <a:ea typeface="Quattrocento Sans"/>
+                <a:cs typeface="Quattrocento Sans"/>
+                <a:sym typeface="Quattrocento Sans"/>
+              </a:rPr>
+              <a:t>Genie for open-ended questions, AI/BI for always-on KPIs — same governed metrics. One alone under-serves either explorers or operators.</a:t>
+            </a:r>
+            <a:endParaRPr/>
+          </a:p>
+        </p:txBody>
+      </p:sp>
+      <p:sp>
+        <p:nvSpPr>
+          <p:cNvPr id="451" name="Google Shape;451;p24"/>
+          <p:cNvSpPr/>
+          <p:nvPr/>
+        </p:nvSpPr>
+        <p:spPr>
+          <a:xfrm>
+            <a:off x="548640" y="3703319"/>
+            <a:ext cx="3611880" cy="1874519"/>
+          </a:xfrm>
+          <a:prstGeom prst="roundRect">
+            <a:avLst>
+              <a:gd fmla="val 16667" name="adj"/>
+            </a:avLst>
+          </a:prstGeom>
+          <a:solidFill>
+            <a:srgbClr val="FFF3DF"/>
+          </a:solidFill>
+          <a:ln cap="flat" cmpd="sng" w="12700">
+            <a:solidFill>
+              <a:srgbClr val="DDE3ED"/>
+            </a:solidFill>
+            <a:prstDash val="solid"/>
+            <a:round/>
+            <a:headEnd len="sm" w="sm" type="none"/>
+            <a:tailEnd len="sm" w="sm" type="none"/>
+          </a:ln>
+          <a:effectLst>
+            <a:outerShdw blurRad="90000" rotWithShape="0" dir="5400000" dist="40000">
+              <a:srgbClr val="9AA5B5">
+                <a:alpha val="40000"/>
+              </a:srgbClr>
+            </a:outerShdw>
+          </a:effectLst>
+        </p:spPr>
+        <p:txBody>
+          <a:bodyPr anchorCtr="0" anchor="ctr" bIns="45700" lIns="91425" spcFirstLastPara="1" rIns="91425" wrap="square" tIns="45700">
+            <a:noAutofit/>
+          </a:bodyPr>
+          <a:lstStyle/>
+          <a:p>
+            <a:pPr indent="0" lvl="0" marL="0" marR="0" rtl="0" algn="ctr">
+              <a:spcBef>
+                <a:spcPts val="0"/>
+              </a:spcBef>
+              <a:spcAft>
+                <a:spcPts val="0"/>
+              </a:spcAft>
+              <a:buNone/>
+            </a:pPr>
+            <a:r>
+              <a:t/>
+            </a:r>
+            <a:endParaRPr b="0" i="0" sz="1800" u="none" cap="none" strike="noStrike">
+              <a:solidFill>
+                <a:schemeClr val="dk1"/>
+              </a:solidFill>
+              <a:latin typeface="Calibri"/>
+              <a:ea typeface="Calibri"/>
+              <a:cs typeface="Calibri"/>
+              <a:sym typeface="Calibri"/>
+            </a:endParaRPr>
+          </a:p>
+        </p:txBody>
+      </p:sp>
+      <p:sp>
+        <p:nvSpPr>
+          <p:cNvPr id="452" name="Google Shape;452;p24"/>
+          <p:cNvSpPr txBox="1"/>
+          <p:nvPr/>
+        </p:nvSpPr>
+        <p:spPr>
+          <a:xfrm>
+            <a:off x="777240" y="3886199"/>
+            <a:ext cx="640080" cy="548640"/>
+          </a:xfrm>
+          <a:prstGeom prst="rect">
+            <a:avLst/>
+          </a:prstGeom>
+          <a:noFill/>
+          <a:ln>
+            <a:noFill/>
+          </a:ln>
+        </p:spPr>
+        <p:txBody>
+          <a:bodyPr anchorCtr="0" anchor="t" bIns="0" lIns="0" spcFirstLastPara="1" rIns="0" wrap="square" tIns="0">
+            <a:spAutoFit/>
+          </a:bodyPr>
+          <a:lstStyle/>
+          <a:p>
+            <a:pPr indent="0" lvl="0" marL="0" marR="0" rtl="0" algn="l">
+              <a:lnSpc>
+                <a:spcPct val="100000"/>
+              </a:lnSpc>
+              <a:spcBef>
+                <a:spcPts val="0"/>
+              </a:spcBef>
+              <a:spcAft>
+                <a:spcPts val="0"/>
+              </a:spcAft>
+              <a:buNone/>
+            </a:pPr>
+            <a:r>
+              <a:rPr b="0" i="0" lang="en-US" sz="2400" u="none" cap="none" strike="noStrike">
+                <a:solidFill>
+                  <a:srgbClr val="1A1A2E"/>
+                </a:solidFill>
+                <a:latin typeface="Quattrocento Sans"/>
+                <a:ea typeface="Quattrocento Sans"/>
+                <a:cs typeface="Quattrocento Sans"/>
+                <a:sym typeface="Quattrocento Sans"/>
+              </a:rPr>
+              <a:t>🧬</a:t>
+            </a:r>
+            <a:endParaRPr/>
+          </a:p>
+        </p:txBody>
+      </p:sp>
+      <p:sp>
+        <p:nvSpPr>
+          <p:cNvPr id="453" name="Google Shape;453;p24"/>
+          <p:cNvSpPr txBox="1"/>
+          <p:nvPr/>
+        </p:nvSpPr>
+        <p:spPr>
+          <a:xfrm>
+            <a:off x="1463040" y="3931919"/>
+            <a:ext cx="2606040" cy="548640"/>
+          </a:xfrm>
+          <a:prstGeom prst="rect">
+            <a:avLst/>
+          </a:prstGeom>
+          <a:noFill/>
+          <a:ln>
+            <a:noFill/>
+          </a:ln>
+        </p:spPr>
+        <p:txBody>
+          <a:bodyPr anchorCtr="0" anchor="ctr" bIns="0" lIns="0" spcFirstLastPara="1" rIns="0" wrap="square" tIns="0">
+            <a:spAutoFit/>
+          </a:bodyPr>
+          <a:lstStyle/>
+          <a:p>
+            <a:pPr indent="0" lvl="0" marL="0" marR="0" rtl="0" algn="l">
+              <a:lnSpc>
+                <a:spcPct val="100000"/>
+              </a:lnSpc>
+              <a:spcBef>
+                <a:spcPts val="0"/>
+              </a:spcBef>
+              <a:spcAft>
+                <a:spcPts val="0"/>
+              </a:spcAft>
+              <a:buNone/>
+            </a:pPr>
+            <a:r>
+              <a:rPr b="1" i="0" lang="en-US" sz="1500" u="none" cap="none" strike="noStrike">
+                <a:solidFill>
+                  <a:srgbClr val="0B1733"/>
+                </a:solidFill>
+                <a:latin typeface="Quattrocento Sans"/>
+                <a:ea typeface="Quattrocento Sans"/>
+                <a:cs typeface="Quattrocento Sans"/>
+                <a:sym typeface="Quattrocento Sans"/>
+              </a:rPr>
+              <a:t>Llama 3.3 70B, hosted</a:t>
+            </a:r>
+            <a:endParaRPr/>
+          </a:p>
+        </p:txBody>
+      </p:sp>
+      <p:sp>
+        <p:nvSpPr>
+          <p:cNvPr id="454" name="Google Shape;454;p24"/>
+          <p:cNvSpPr txBox="1"/>
+          <p:nvPr/>
+        </p:nvSpPr>
+        <p:spPr>
+          <a:xfrm>
+            <a:off x="804672" y="4571999"/>
+            <a:ext cx="3108960" cy="914400"/>
+          </a:xfrm>
+          <a:prstGeom prst="rect">
+            <a:avLst/>
+          </a:prstGeom>
+          <a:noFill/>
+          <a:ln>
+            <a:noFill/>
+          </a:ln>
+        </p:spPr>
+        <p:txBody>
+          <a:bodyPr anchorCtr="0" anchor="t" bIns="0" lIns="0" spcFirstLastPara="1" rIns="0" wrap="square" tIns="0">
+            <a:spAutoFit/>
+          </a:bodyPr>
+          <a:lstStyle/>
+          <a:p>
+            <a:pPr indent="0" lvl="0" marL="0" marR="0" rtl="0" algn="l">
+              <a:lnSpc>
+                <a:spcPct val="115000"/>
+              </a:lnSpc>
+              <a:spcBef>
+                <a:spcPts val="0"/>
+              </a:spcBef>
+              <a:spcAft>
+                <a:spcPts val="0"/>
+              </a:spcAft>
+              <a:buNone/>
+            </a:pPr>
+            <a:r>
+              <a:rPr b="0" i="0" lang="en-US" sz="1200" u="none" cap="none" strike="noStrike">
+                <a:solidFill>
+                  <a:srgbClr val="1A1A2E"/>
+                </a:solidFill>
+                <a:latin typeface="Quattrocento Sans"/>
+                <a:ea typeface="Quattrocento Sans"/>
+                <a:cs typeface="Quattrocento Sans"/>
+                <a:sym typeface="Quattrocento Sans"/>
+              </a:rPr>
+              <a:t>In-workspace, no third-party data sharing, strong extraction. Trade-off: not the frontier model — ample for structured extraction.</a:t>
+            </a:r>
+            <a:endParaRPr/>
+          </a:p>
+        </p:txBody>
+      </p:sp>
+      <p:sp>
+        <p:nvSpPr>
+          <p:cNvPr id="455" name="Google Shape;455;p24"/>
+          <p:cNvSpPr/>
+          <p:nvPr/>
+        </p:nvSpPr>
+        <p:spPr>
+          <a:xfrm>
+            <a:off x="4288536" y="3703319"/>
+            <a:ext cx="3611880" cy="1874519"/>
+          </a:xfrm>
+          <a:prstGeom prst="roundRect">
+            <a:avLst>
+              <a:gd fmla="val 16667" name="adj"/>
+            </a:avLst>
+          </a:prstGeom>
+          <a:solidFill>
+            <a:srgbClr val="D6F0F0"/>
+          </a:solidFill>
+          <a:ln cap="flat" cmpd="sng" w="12700">
+            <a:solidFill>
+              <a:srgbClr val="DDE3ED"/>
+            </a:solidFill>
+            <a:prstDash val="solid"/>
+            <a:round/>
+            <a:headEnd len="sm" w="sm" type="none"/>
+            <a:tailEnd len="sm" w="sm" type="none"/>
+          </a:ln>
+          <a:effectLst>
+            <a:outerShdw blurRad="90000" rotWithShape="0" dir="5400000" dist="40000">
+              <a:srgbClr val="9AA5B5">
+                <a:alpha val="40000"/>
+              </a:srgbClr>
+            </a:outerShdw>
+          </a:effectLst>
+        </p:spPr>
+        <p:txBody>
+          <a:bodyPr anchorCtr="0" anchor="ctr" bIns="45700" lIns="91425" spcFirstLastPara="1" rIns="91425" wrap="square" tIns="45700">
+            <a:noAutofit/>
+          </a:bodyPr>
+          <a:lstStyle/>
+          <a:p>
+            <a:pPr indent="0" lvl="0" marL="0" marR="0" rtl="0" algn="ctr">
+              <a:spcBef>
+                <a:spcPts val="0"/>
+              </a:spcBef>
+              <a:spcAft>
+                <a:spcPts val="0"/>
+              </a:spcAft>
+              <a:buNone/>
+            </a:pPr>
+            <a:r>
+              <a:t/>
+            </a:r>
+            <a:endParaRPr b="0" i="0" sz="1800" u="none" cap="none" strike="noStrike">
+              <a:solidFill>
+                <a:schemeClr val="dk1"/>
+              </a:solidFill>
+              <a:latin typeface="Calibri"/>
+              <a:ea typeface="Calibri"/>
+              <a:cs typeface="Calibri"/>
+              <a:sym typeface="Calibri"/>
+            </a:endParaRPr>
+          </a:p>
+        </p:txBody>
+      </p:sp>
+      <p:sp>
+        <p:nvSpPr>
+          <p:cNvPr id="456" name="Google Shape;456;p24"/>
+          <p:cNvSpPr txBox="1"/>
+          <p:nvPr/>
+        </p:nvSpPr>
+        <p:spPr>
+          <a:xfrm>
+            <a:off x="4517136" y="3886199"/>
+            <a:ext cx="640080" cy="548640"/>
+          </a:xfrm>
+          <a:prstGeom prst="rect">
+            <a:avLst/>
+          </a:prstGeom>
+          <a:noFill/>
+          <a:ln>
+            <a:noFill/>
+          </a:ln>
+        </p:spPr>
+        <p:txBody>
+          <a:bodyPr anchorCtr="0" anchor="t" bIns="0" lIns="0" spcFirstLastPara="1" rIns="0" wrap="square" tIns="0">
+            <a:spAutoFit/>
+          </a:bodyPr>
+          <a:lstStyle/>
+          <a:p>
+            <a:pPr indent="0" lvl="0" marL="0" marR="0" rtl="0" algn="l">
+              <a:lnSpc>
+                <a:spcPct val="100000"/>
+              </a:lnSpc>
+              <a:spcBef>
+                <a:spcPts val="0"/>
+              </a:spcBef>
+              <a:spcAft>
+                <a:spcPts val="0"/>
+              </a:spcAft>
+              <a:buNone/>
+            </a:pPr>
+            <a:r>
+              <a:rPr b="0" i="0" lang="en-US" sz="2400" u="none" cap="none" strike="noStrike">
+                <a:solidFill>
+                  <a:srgbClr val="1A1A2E"/>
+                </a:solidFill>
+                <a:latin typeface="Quattrocento Sans"/>
+                <a:ea typeface="Quattrocento Sans"/>
+                <a:cs typeface="Quattrocento Sans"/>
+                <a:sym typeface="Quattrocento Sans"/>
+              </a:rPr>
+              <a:t>🔒</a:t>
+            </a:r>
+            <a:endParaRPr/>
+          </a:p>
+        </p:txBody>
+      </p:sp>
+      <p:sp>
+        <p:nvSpPr>
+          <p:cNvPr id="457" name="Google Shape;457;p24"/>
+          <p:cNvSpPr txBox="1"/>
+          <p:nvPr/>
+        </p:nvSpPr>
+        <p:spPr>
+          <a:xfrm>
+            <a:off x="5202936" y="3931919"/>
+            <a:ext cx="2606040" cy="548640"/>
+          </a:xfrm>
+          <a:prstGeom prst="rect">
+            <a:avLst/>
+          </a:prstGeom>
+          <a:noFill/>
+          <a:ln>
+            <a:noFill/>
+          </a:ln>
+        </p:spPr>
+        <p:txBody>
+          <a:bodyPr anchorCtr="0" anchor="ctr" bIns="0" lIns="0" spcFirstLastPara="1" rIns="0" wrap="square" tIns="0">
+            <a:spAutoFit/>
+          </a:bodyPr>
+          <a:lstStyle/>
+          <a:p>
+            <a:pPr indent="0" lvl="0" marL="0" marR="0" rtl="0" algn="l">
+              <a:lnSpc>
+                <a:spcPct val="100000"/>
+              </a:lnSpc>
+              <a:spcBef>
+                <a:spcPts val="0"/>
+              </a:spcBef>
+              <a:spcAft>
+                <a:spcPts val="0"/>
+              </a:spcAft>
+              <a:buNone/>
+            </a:pPr>
+            <a:r>
+              <a:rPr b="1" i="0" lang="en-US" sz="1500" u="none" cap="none" strike="noStrike">
+                <a:solidFill>
+                  <a:srgbClr val="0B1733"/>
+                </a:solidFill>
+                <a:latin typeface="Quattrocento Sans"/>
+                <a:ea typeface="Quattrocento Sans"/>
+                <a:cs typeface="Quattrocento Sans"/>
+                <a:sym typeface="Quattrocento Sans"/>
+              </a:rPr>
+              <a:t>One UC schema</a:t>
+            </a:r>
+            <a:endParaRPr/>
+          </a:p>
+        </p:txBody>
+      </p:sp>
+      <p:sp>
+        <p:nvSpPr>
+          <p:cNvPr id="458" name="Google Shape;458;p24"/>
+          <p:cNvSpPr txBox="1"/>
+          <p:nvPr/>
+        </p:nvSpPr>
+        <p:spPr>
+          <a:xfrm>
+            <a:off x="4544568" y="4571999"/>
+            <a:ext cx="3108960" cy="914400"/>
+          </a:xfrm>
+          <a:prstGeom prst="rect">
+            <a:avLst/>
+          </a:prstGeom>
+          <a:noFill/>
+          <a:ln>
+            <a:noFill/>
+          </a:ln>
+        </p:spPr>
+        <p:txBody>
+          <a:bodyPr anchorCtr="0" anchor="t" bIns="0" lIns="0" spcFirstLastPara="1" rIns="0" wrap="square" tIns="0">
+            <a:spAutoFit/>
+          </a:bodyPr>
+          <a:lstStyle/>
+          <a:p>
+            <a:pPr indent="0" lvl="0" marL="0" marR="0" rtl="0" algn="l">
+              <a:lnSpc>
+                <a:spcPct val="115000"/>
+              </a:lnSpc>
+              <a:spcBef>
+                <a:spcPts val="0"/>
+              </a:spcBef>
+              <a:spcAft>
+                <a:spcPts val="0"/>
+              </a:spcAft>
+              <a:buNone/>
+            </a:pPr>
+            <a:r>
+              <a:rPr b="0" i="0" lang="en-US" sz="1200" u="none" cap="none" strike="noStrike">
+                <a:solidFill>
+                  <a:srgbClr val="1A1A2E"/>
+                </a:solidFill>
+                <a:latin typeface="Quattrocento Sans"/>
+                <a:ea typeface="Quattrocento Sans"/>
+                <a:cs typeface="Quattrocento Sans"/>
+                <a:sym typeface="Quattrocento Sans"/>
+              </a:rPr>
+              <a:t>A single medallion, one lineage graph &amp; security model — vs. fragmented marts. Trade-off: tighter coordination on a shared schema.</a:t>
+            </a:r>
+            <a:endParaRPr/>
+          </a:p>
+        </p:txBody>
+      </p:sp>
+      <p:sp>
+        <p:nvSpPr>
+          <p:cNvPr id="459" name="Google Shape;459;p24"/>
+          <p:cNvSpPr/>
+          <p:nvPr/>
+        </p:nvSpPr>
+        <p:spPr>
+          <a:xfrm>
+            <a:off x="8028432" y="3703319"/>
+            <a:ext cx="3611880" cy="1874519"/>
+          </a:xfrm>
+          <a:prstGeom prst="roundRect">
+            <a:avLst>
+              <a:gd fmla="val 16667" name="adj"/>
+            </a:avLst>
+          </a:prstGeom>
+          <a:solidFill>
+            <a:srgbClr val="F4F6F9"/>
+          </a:solidFill>
+          <a:ln cap="flat" cmpd="sng" w="12700">
+            <a:solidFill>
+              <a:srgbClr val="DDE3ED"/>
+            </a:solidFill>
+            <a:prstDash val="solid"/>
+            <a:round/>
+            <a:headEnd len="sm" w="sm" type="none"/>
+            <a:tailEnd len="sm" w="sm" type="none"/>
+          </a:ln>
+          <a:effectLst>
+            <a:outerShdw blurRad="90000" rotWithShape="0" dir="5400000" dist="40000">
+              <a:srgbClr val="9AA5B5">
+                <a:alpha val="40000"/>
+              </a:srgbClr>
+            </a:outerShdw>
+          </a:effectLst>
+        </p:spPr>
+        <p:txBody>
+          <a:bodyPr anchorCtr="0" anchor="ctr" bIns="45700" lIns="91425" spcFirstLastPara="1" rIns="91425" wrap="square" tIns="45700">
+            <a:noAutofit/>
+          </a:bodyPr>
+          <a:lstStyle/>
+          <a:p>
+            <a:pPr indent="0" lvl="0" marL="0" marR="0" rtl="0" algn="ctr">
+              <a:spcBef>
+                <a:spcPts val="0"/>
+              </a:spcBef>
+              <a:spcAft>
+                <a:spcPts val="0"/>
+              </a:spcAft>
+              <a:buNone/>
+            </a:pPr>
+            <a:r>
+              <a:t/>
+            </a:r>
+            <a:endParaRPr b="0" i="0" sz="1800" u="none" cap="none" strike="noStrike">
+              <a:solidFill>
+                <a:schemeClr val="dk1"/>
+              </a:solidFill>
+              <a:latin typeface="Calibri"/>
+              <a:ea typeface="Calibri"/>
+              <a:cs typeface="Calibri"/>
+              <a:sym typeface="Calibri"/>
+            </a:endParaRPr>
+          </a:p>
+        </p:txBody>
+      </p:sp>
+      <p:sp>
+        <p:nvSpPr>
+          <p:cNvPr id="460" name="Google Shape;460;p24"/>
+          <p:cNvSpPr txBox="1"/>
+          <p:nvPr/>
+        </p:nvSpPr>
+        <p:spPr>
+          <a:xfrm>
+            <a:off x="8257032" y="3886199"/>
+            <a:ext cx="640080" cy="548640"/>
+          </a:xfrm>
+          <a:prstGeom prst="rect">
+            <a:avLst/>
+          </a:prstGeom>
+          <a:noFill/>
+          <a:ln>
+            <a:noFill/>
+          </a:ln>
+        </p:spPr>
+        <p:txBody>
+          <a:bodyPr anchorCtr="0" anchor="t" bIns="0" lIns="0" spcFirstLastPara="1" rIns="0" wrap="square" tIns="0">
+            <a:spAutoFit/>
+          </a:bodyPr>
+          <a:lstStyle/>
+          <a:p>
+            <a:pPr indent="0" lvl="0" marL="0" marR="0" rtl="0" algn="l">
+              <a:lnSpc>
+                <a:spcPct val="100000"/>
+              </a:lnSpc>
+              <a:spcBef>
+                <a:spcPts val="0"/>
+              </a:spcBef>
+              <a:spcAft>
+                <a:spcPts val="0"/>
+              </a:spcAft>
+              <a:buNone/>
+            </a:pPr>
+            <a:r>
+              <a:rPr b="0" i="0" lang="en-US" sz="2400" u="none" cap="none" strike="noStrike">
+                <a:solidFill>
+                  <a:srgbClr val="1A1A2E"/>
+                </a:solidFill>
+                <a:latin typeface="Quattrocento Sans"/>
+                <a:ea typeface="Quattrocento Sans"/>
+                <a:cs typeface="Quattrocento Sans"/>
+                <a:sym typeface="Quattrocento Sans"/>
+              </a:rPr>
+              <a:t>🧪</a:t>
+            </a:r>
+            <a:endParaRPr/>
+          </a:p>
+        </p:txBody>
+      </p:sp>
+      <p:sp>
+        <p:nvSpPr>
+          <p:cNvPr id="461" name="Google Shape;461;p24"/>
+          <p:cNvSpPr txBox="1"/>
+          <p:nvPr/>
+        </p:nvSpPr>
+        <p:spPr>
+          <a:xfrm>
+            <a:off x="8942832" y="3931919"/>
+            <a:ext cx="2606040" cy="548640"/>
+          </a:xfrm>
+          <a:prstGeom prst="rect">
+            <a:avLst/>
+          </a:prstGeom>
+          <a:noFill/>
+          <a:ln>
+            <a:noFill/>
+          </a:ln>
+        </p:spPr>
+        <p:txBody>
+          <a:bodyPr anchorCtr="0" anchor="ctr" bIns="0" lIns="0" spcFirstLastPara="1" rIns="0" wrap="square" tIns="0">
+            <a:spAutoFit/>
+          </a:bodyPr>
+          <a:lstStyle/>
+          <a:p>
+            <a:pPr indent="0" lvl="0" marL="0" marR="0" rtl="0" algn="l">
+              <a:lnSpc>
+                <a:spcPct val="100000"/>
+              </a:lnSpc>
+              <a:spcBef>
+                <a:spcPts val="0"/>
+              </a:spcBef>
+              <a:spcAft>
+                <a:spcPts val="0"/>
+              </a:spcAft>
+              <a:buNone/>
+            </a:pPr>
+            <a:r>
+              <a:rPr b="1" i="0" lang="en-US" sz="1500" u="none" cap="none" strike="noStrike">
+                <a:solidFill>
+                  <a:srgbClr val="0B1733"/>
+                </a:solidFill>
+                <a:latin typeface="Quattrocento Sans"/>
+                <a:ea typeface="Quattrocento Sans"/>
+                <a:cs typeface="Quattrocento Sans"/>
+                <a:sym typeface="Quattrocento Sans"/>
+              </a:rPr>
+              <a:t>Synthetic data</a:t>
+            </a:r>
+            <a:endParaRPr/>
+          </a:p>
+        </p:txBody>
+      </p:sp>
+      <p:sp>
+        <p:nvSpPr>
+          <p:cNvPr id="462" name="Google Shape;462;p24"/>
+          <p:cNvSpPr txBox="1"/>
+          <p:nvPr/>
+        </p:nvSpPr>
+        <p:spPr>
+          <a:xfrm>
+            <a:off x="8284464" y="4571999"/>
+            <a:ext cx="3108960" cy="914400"/>
+          </a:xfrm>
+          <a:prstGeom prst="rect">
+            <a:avLst/>
+          </a:prstGeom>
+          <a:noFill/>
+          <a:ln>
+            <a:noFill/>
+          </a:ln>
+        </p:spPr>
+        <p:txBody>
+          <a:bodyPr anchorCtr="0" anchor="t" bIns="0" lIns="0" spcFirstLastPara="1" rIns="0" wrap="square" tIns="0">
+            <a:spAutoFit/>
+          </a:bodyPr>
+          <a:lstStyle/>
+          <a:p>
+            <a:pPr indent="0" lvl="0" marL="0" marR="0" rtl="0" algn="l">
+              <a:lnSpc>
+                <a:spcPct val="115000"/>
+              </a:lnSpc>
+              <a:spcBef>
+                <a:spcPts val="0"/>
+              </a:spcBef>
+              <a:spcAft>
+                <a:spcPts val="0"/>
+              </a:spcAft>
+              <a:buNone/>
+            </a:pPr>
+            <a:r>
+              <a:rPr b="0" i="0" lang="en-US" sz="1200" u="none" cap="none" strike="noStrike">
+                <a:solidFill>
+                  <a:srgbClr val="1A1A2E"/>
+                </a:solidFill>
+                <a:latin typeface="Quattrocento Sans"/>
+                <a:ea typeface="Quattrocento Sans"/>
+                <a:cs typeface="Quattrocento Sans"/>
+                <a:sym typeface="Quattrocento Sans"/>
+              </a:rPr>
+              <a:t>Safe, reproducible, no PHI/PII — vs. real data that blocks sharing. Trade-off: value figures are modeled estimates, not measured.</a:t>
+            </a:r>
+            <a:endParaRPr/>
+          </a:p>
+        </p:txBody>
+      </p:sp>
+      <p:sp>
+        <p:nvSpPr>
+          <p:cNvPr id="463" name="Google Shape;463;p24"/>
+          <p:cNvSpPr txBox="1"/>
+          <p:nvPr/>
+        </p:nvSpPr>
+        <p:spPr>
+          <a:xfrm>
+            <a:off x="548640" y="6510528"/>
+            <a:ext cx="11064240" cy="274320"/>
+          </a:xfrm>
+          <a:prstGeom prst="rect">
+            <a:avLst/>
+          </a:prstGeom>
+          <a:noFill/>
+          <a:ln>
+            <a:noFill/>
+          </a:ln>
+        </p:spPr>
+        <p:txBody>
+          <a:bodyPr anchorCtr="0" anchor="t" bIns="0" lIns="0" spcFirstLastPara="1" rIns="0" wrap="square" tIns="0">
+            <a:spAutoFit/>
+          </a:bodyPr>
+          <a:lstStyle/>
+          <a:p>
+            <a:pPr indent="0" lvl="0" marL="0" marR="0" rtl="0" algn="l">
+              <a:lnSpc>
+                <a:spcPct val="100000"/>
+              </a:lnSpc>
+              <a:spcBef>
+                <a:spcPts val="0"/>
+              </a:spcBef>
+              <a:spcAft>
+                <a:spcPts val="0"/>
+              </a:spcAft>
+              <a:buNone/>
+            </a:pPr>
+            <a:r>
+              <a:rPr b="0" i="0" lang="en-US" sz="850" u="none" cap="none" strike="noStrike">
+                <a:solidFill>
+                  <a:srgbClr val="909AAA"/>
+                </a:solidFill>
+                <a:latin typeface="Quattrocento Sans"/>
+                <a:ea typeface="Quattrocento Sans"/>
+                <a:cs typeface="Quattrocento Sans"/>
+                <a:sym typeface="Quattrocento Sans"/>
+              </a:rPr>
+              <a:t>Medical Omnichannel Intelligence  ·  Daiichi Sankyo (synthetic)  ·  Databricks  ·  _sa701.moa</a:t>
+            </a:r>
+            <a:endParaRPr/>
+          </a:p>
+        </p:txBody>
+      </p:sp>
+    </p:spTree>
+  </p:cSld>
+  <p:clrMapOvr>
+    <a:masterClrMapping/>
+  </p:clrMapOvr>
+</p:sld>
+</file>
+
+<file path=ppt/slides/slide15.xml><?xml version="1.0" encoding="utf-8"?>
+<p:sld xmlns:a="http://schemas.openxmlformats.org/drawingml/2006/main" xmlns:p="http://schemas.openxmlformats.org/presentationml/2006/main" xmlns:r="http://schemas.openxmlformats.org/officeDocument/2006/relationships">
+  <p:cSld>
+    <p:spTree>
+      <p:nvGrpSpPr>
+        <p:cNvPr id="1" name=""/>
+        <p:cNvGrpSpPr/>
+        <p:nvPr/>
+      </p:nvGrpSpPr>
+      <p:grpSpPr/>
+      <p:sp>
+        <p:nvSpPr>
+          <p:cNvPr id="434" name="Google Shape;434;p24"/>
+          <p:cNvSpPr/>
+          <p:nvPr/>
+        </p:nvSpPr>
+        <p:spPr>
+          <a:xfrm>
+            <a:off x="0" y="0"/>
+            <a:ext cx="12191695" cy="128016"/>
+          </a:xfrm>
+          <a:prstGeom prst="rect">
+            <a:avLst/>
+          </a:prstGeom>
+          <a:solidFill>
+            <a:srgbClr val="FF3621"/>
+          </a:solidFill>
+          <a:ln>
+            <a:noFill/>
+          </a:ln>
+        </p:spPr>
+        <p:txBody>
+          <a:bodyPr anchorCtr="0" anchor="ctr" bIns="45700" lIns="91425" spcFirstLastPara="1" rIns="91425" wrap="square" tIns="45700">
+            <a:noAutofit/>
+          </a:bodyPr>
+          <a:lstStyle/>
+          <a:p>
+            <a:pPr indent="0" lvl="0" marL="0" marR="0" rtl="0" algn="ctr">
+              <a:spcBef>
+                <a:spcPts val="0"/>
+              </a:spcBef>
+              <a:spcAft>
+                <a:spcPts val="0"/>
+              </a:spcAft>
+              <a:buNone/>
+            </a:pPr>
+            <a:r>
+              <a:t/>
+            </a:r>
+            <a:endParaRPr b="0" i="0" sz="1800" u="none" cap="none" strike="noStrike">
+              <a:solidFill>
+                <a:schemeClr val="dk1"/>
+              </a:solidFill>
+              <a:latin typeface="Calibri"/>
+              <a:ea typeface="Calibri"/>
+              <a:cs typeface="Calibri"/>
+              <a:sym typeface="Calibri"/>
+            </a:endParaRPr>
+          </a:p>
+        </p:txBody>
+      </p:sp>
+      <p:sp>
+        <p:nvSpPr>
+          <p:cNvPr id="435" name="Google Shape;435;p24"/>
+          <p:cNvSpPr txBox="1"/>
+          <p:nvPr/>
+        </p:nvSpPr>
+        <p:spPr>
+          <a:xfrm>
+            <a:off x="548640" y="384048"/>
+            <a:ext cx="10058400" cy="274320"/>
+          </a:xfrm>
+          <a:prstGeom prst="rect">
+            <a:avLst/>
+          </a:prstGeom>
+          <a:noFill/>
+          <a:ln>
+            <a:noFill/>
+          </a:ln>
+        </p:spPr>
+        <p:txBody>
+          <a:bodyPr anchorCtr="0" anchor="t" bIns="0" lIns="0" spcFirstLastPara="1" rIns="0" wrap="square" tIns="0">
+            <a:spAutoFit/>
+          </a:bodyPr>
+          <a:lstStyle/>
+          <a:p>
+            <a:pPr indent="0" lvl="0" marL="0" marR="0" rtl="0" algn="l">
+              <a:lnSpc>
+                <a:spcPct val="100000"/>
+              </a:lnSpc>
+              <a:spcBef>
+                <a:spcPts val="0"/>
+              </a:spcBef>
+              <a:spcAft>
+                <a:spcPts val="0"/>
+              </a:spcAft>
+              <a:buNone/>
+            </a:pPr>
+            <a:r>
+              <a:rPr b="1" i="0" lang="en-US" sz="1200" u="none" cap="none" strike="noStrike">
+                <a:solidFill>
+                  <a:srgbClr val="FF3621"/>
+                </a:solidFill>
+                <a:latin typeface="Quattrocento Sans"/>
+                <a:ea typeface="Quattrocento Sans"/>
+                <a:cs typeface="Quattrocento Sans"/>
+                <a:sym typeface="Quattrocento Sans"/>
+              </a:rPr>
+              <a:t>BUILT WITH AI</a:t>
+            </a:r>
+            <a:endParaRPr/>
+          </a:p>
+        </p:txBody>
+      </p:sp>
+      <p:sp>
+        <p:nvSpPr>
+          <p:cNvPr id="436" name="Google Shape;436;p24"/>
+          <p:cNvSpPr txBox="1"/>
+          <p:nvPr/>
+        </p:nvSpPr>
+        <p:spPr>
+          <a:xfrm>
+            <a:off x="548640" y="658368"/>
+            <a:ext cx="11064240" cy="640080"/>
+          </a:xfrm>
+          <a:prstGeom prst="rect">
+            <a:avLst/>
+          </a:prstGeom>
+          <a:noFill/>
+          <a:ln>
+            <a:noFill/>
+          </a:ln>
+        </p:spPr>
+        <p:txBody>
+          <a:bodyPr anchorCtr="0" anchor="t" bIns="0" lIns="0" spcFirstLastPara="1" rIns="0" wrap="square" tIns="0">
+            <a:spAutoFit/>
+          </a:bodyPr>
+          <a:lstStyle/>
+          <a:p>
+            <a:pPr indent="0" lvl="0" marL="0" marR="0" rtl="0" algn="l">
+              <a:lnSpc>
+                <a:spcPct val="100000"/>
+              </a:lnSpc>
+              <a:spcBef>
+                <a:spcPts val="0"/>
+              </a:spcBef>
+              <a:spcAft>
+                <a:spcPts val="0"/>
+              </a:spcAft>
+              <a:buNone/>
+            </a:pPr>
+            <a:r>
+              <a:rPr b="1" i="0" lang="en-US" sz="2700" u="none" cap="none" strike="noStrike">
+                <a:solidFill>
+                  <a:srgbClr val="0B1733"/>
+                </a:solidFill>
+                <a:latin typeface="Quattrocento Sans"/>
+                <a:ea typeface="Quattrocento Sans"/>
+                <a:cs typeface="Quattrocento Sans"/>
+                <a:sym typeface="Quattrocento Sans"/>
+              </a:rPr>
+              <a:t>AI as a force multiplier — tools, prompts &amp; patterns</a:t>
+            </a:r>
+            <a:endParaRPr/>
+          </a:p>
+        </p:txBody>
+      </p:sp>
+      <p:sp>
+        <p:nvSpPr>
+          <p:cNvPr id="437" name="Google Shape;437;p24"/>
+          <p:cNvSpPr txBox="1"/>
+          <p:nvPr/>
+        </p:nvSpPr>
+        <p:spPr>
+          <a:xfrm>
+            <a:off x="11430000" y="384048"/>
+            <a:ext cx="548640" cy="274320"/>
+          </a:xfrm>
+          <a:prstGeom prst="rect">
+            <a:avLst/>
+          </a:prstGeom>
+          <a:noFill/>
+          <a:ln>
+            <a:noFill/>
+          </a:ln>
+        </p:spPr>
+        <p:txBody>
+          <a:bodyPr anchorCtr="0" anchor="t" bIns="0" lIns="0" spcFirstLastPara="1" rIns="0" wrap="square" tIns="0">
+            <a:spAutoFit/>
+          </a:bodyPr>
+          <a:lstStyle/>
+          <a:p>
+            <a:pPr indent="0" lvl="0" marL="0" marR="0" rtl="0" algn="r">
+              <a:lnSpc>
+                <a:spcPct val="100000"/>
+              </a:lnSpc>
+              <a:spcBef>
+                <a:spcPts val="0"/>
+              </a:spcBef>
+              <a:spcAft>
+                <a:spcPts val="0"/>
+              </a:spcAft>
+              <a:buNone/>
+            </a:pPr>
+            <a:r>
+              <a:rPr b="1" i="0" lang="en-US" sz="1100" u="none" cap="none" strike="noStrike">
+                <a:solidFill>
+                  <a:srgbClr val="909AAA"/>
+                </a:solidFill>
+                <a:latin typeface="Quattrocento Sans"/>
+                <a:ea typeface="Quattrocento Sans"/>
+                <a:cs typeface="Quattrocento Sans"/>
+                <a:sym typeface="Quattrocento Sans"/>
+              </a:rPr>
+              <a:t>13</a:t>
+            </a:r>
+            <a:endParaRPr/>
+          </a:p>
+        </p:txBody>
+      </p:sp>
+      <p:sp>
+        <p:nvSpPr>
+          <p:cNvPr id="438" name="Google Shape;438;p24"/>
+          <p:cNvSpPr/>
+          <p:nvPr/>
+        </p:nvSpPr>
+        <p:spPr>
+          <a:xfrm>
+            <a:off x="548640" y="1371600"/>
+            <a:ext cx="11091672" cy="17780"/>
+          </a:xfrm>
+          <a:prstGeom prst="rect">
+            <a:avLst/>
+          </a:prstGeom>
+          <a:solidFill>
+            <a:srgbClr val="DDE3ED"/>
+          </a:solidFill>
+          <a:ln>
+            <a:noFill/>
+          </a:ln>
+        </p:spPr>
+        <p:txBody>
+          <a:bodyPr anchorCtr="0" anchor="ctr" bIns="45700" lIns="91425" spcFirstLastPara="1" rIns="91425" wrap="square" tIns="45700">
+            <a:noAutofit/>
+          </a:bodyPr>
+          <a:lstStyle/>
+          <a:p>
+            <a:pPr indent="0" lvl="0" marL="0" marR="0" rtl="0" algn="ctr">
+              <a:spcBef>
+                <a:spcPts val="0"/>
+              </a:spcBef>
+              <a:spcAft>
+                <a:spcPts val="0"/>
+              </a:spcAft>
+              <a:buNone/>
+            </a:pPr>
+            <a:r>
+              <a:t/>
+            </a:r>
+            <a:endParaRPr b="0" i="0" sz="1800" u="none" cap="none" strike="noStrike">
+              <a:solidFill>
+                <a:schemeClr val="dk1"/>
+              </a:solidFill>
+              <a:latin typeface="Calibri"/>
+              <a:ea typeface="Calibri"/>
+              <a:cs typeface="Calibri"/>
+              <a:sym typeface="Calibri"/>
+            </a:endParaRPr>
+          </a:p>
+        </p:txBody>
+      </p:sp>
+      <p:sp>
+        <p:nvSpPr>
+          <p:cNvPr id="439" name="Google Shape;439;p24"/>
+          <p:cNvSpPr/>
+          <p:nvPr/>
+        </p:nvSpPr>
+        <p:spPr>
+          <a:xfrm>
+            <a:off x="548640" y="1645920"/>
+            <a:ext cx="3611880" cy="1874519"/>
+          </a:xfrm>
+          <a:prstGeom prst="roundRect">
+            <a:avLst>
+              <a:gd fmla="val 16667" name="adj"/>
+            </a:avLst>
+          </a:prstGeom>
+          <a:solidFill>
+            <a:srgbClr val="DEF5E7"/>
+          </a:solidFill>
+          <a:ln cap="flat" cmpd="sng" w="12700">
+            <a:solidFill>
+              <a:srgbClr val="DDE3ED"/>
+            </a:solidFill>
+            <a:prstDash val="solid"/>
+            <a:round/>
+            <a:headEnd len="sm" w="sm" type="none"/>
+            <a:tailEnd len="sm" w="sm" type="none"/>
+          </a:ln>
+          <a:effectLst>
+            <a:outerShdw blurRad="90000" rotWithShape="0" dir="5400000" dist="40000">
+              <a:srgbClr val="9AA5B5">
+                <a:alpha val="40000"/>
+              </a:srgbClr>
+            </a:outerShdw>
+          </a:effectLst>
+        </p:spPr>
+        <p:txBody>
+          <a:bodyPr anchorCtr="0" anchor="ctr" bIns="45700" lIns="91425" spcFirstLastPara="1" rIns="91425" wrap="square" tIns="45700">
+            <a:noAutofit/>
+          </a:bodyPr>
+          <a:lstStyle/>
+          <a:p>
+            <a:pPr indent="0" lvl="0" marL="0" marR="0" rtl="0" algn="ctr">
+              <a:spcBef>
+                <a:spcPts val="0"/>
+              </a:spcBef>
+              <a:spcAft>
+                <a:spcPts val="0"/>
+              </a:spcAft>
+              <a:buNone/>
+            </a:pPr>
+            <a:r>
+              <a:t/>
+            </a:r>
+            <a:endParaRPr b="0" i="0" sz="1800" u="none" cap="none" strike="noStrike">
+              <a:solidFill>
+                <a:schemeClr val="dk1"/>
+              </a:solidFill>
+              <a:latin typeface="Calibri"/>
+              <a:ea typeface="Calibri"/>
+              <a:cs typeface="Calibri"/>
+              <a:sym typeface="Calibri"/>
+            </a:endParaRPr>
+          </a:p>
+        </p:txBody>
+      </p:sp>
+      <p:sp>
+        <p:nvSpPr>
+          <p:cNvPr id="440" name="Google Shape;440;p24"/>
+          <p:cNvSpPr txBox="1"/>
+          <p:nvPr/>
+        </p:nvSpPr>
+        <p:spPr>
+          <a:xfrm>
+            <a:off x="777240" y="1828800"/>
+            <a:ext cx="640080" cy="548640"/>
+          </a:xfrm>
+          <a:prstGeom prst="rect">
+            <a:avLst/>
+          </a:prstGeom>
+          <a:noFill/>
+          <a:ln>
+            <a:noFill/>
+          </a:ln>
+        </p:spPr>
+        <p:txBody>
+          <a:bodyPr anchorCtr="0" anchor="t" bIns="0" lIns="0" spcFirstLastPara="1" rIns="0" wrap="square" tIns="0">
+            <a:spAutoFit/>
+          </a:bodyPr>
+          <a:lstStyle/>
+          <a:p>
+            <a:pPr indent="0" lvl="0" marL="0" marR="0" rtl="0" algn="l">
+              <a:lnSpc>
+                <a:spcPct val="100000"/>
+              </a:lnSpc>
+              <a:spcBef>
+                <a:spcPts val="0"/>
+              </a:spcBef>
+              <a:spcAft>
+                <a:spcPts val="0"/>
+              </a:spcAft>
+              <a:buNone/>
+            </a:pPr>
+            <a:r>
+              <a:rPr b="0" i="0" lang="en-US" sz="2400" u="none" cap="none" strike="noStrike">
+                <a:solidFill>
+                  <a:srgbClr val="1A1A2E"/>
+                </a:solidFill>
+                <a:latin typeface="Quattrocento Sans"/>
+                <a:ea typeface="Quattrocento Sans"/>
+                <a:cs typeface="Quattrocento Sans"/>
+                <a:sym typeface="Quattrocento Sans"/>
+              </a:rPr>
+              <a:t>🤖</a:t>
+            </a:r>
+            <a:endParaRPr/>
+          </a:p>
+        </p:txBody>
+      </p:sp>
+      <p:sp>
+        <p:nvSpPr>
+          <p:cNvPr id="441" name="Google Shape;441;p24"/>
+          <p:cNvSpPr txBox="1"/>
+          <p:nvPr/>
+        </p:nvSpPr>
+        <p:spPr>
+          <a:xfrm>
+            <a:off x="1463040" y="1874520"/>
+            <a:ext cx="2606040" cy="548640"/>
+          </a:xfrm>
+          <a:prstGeom prst="rect">
+            <a:avLst/>
+          </a:prstGeom>
+          <a:noFill/>
+          <a:ln>
+            <a:noFill/>
+          </a:ln>
+        </p:spPr>
+        <p:txBody>
+          <a:bodyPr anchorCtr="0" anchor="ctr" bIns="0" lIns="0" spcFirstLastPara="1" rIns="0" wrap="square" tIns="0">
+            <a:spAutoFit/>
+          </a:bodyPr>
+          <a:lstStyle/>
+          <a:p>
+            <a:pPr indent="0" lvl="0" marL="0" marR="0" rtl="0" algn="l">
+              <a:lnSpc>
+                <a:spcPct val="100000"/>
+              </a:lnSpc>
+              <a:spcBef>
+                <a:spcPts val="0"/>
+              </a:spcBef>
+              <a:spcAft>
+                <a:spcPts val="0"/>
+              </a:spcAft>
+              <a:buNone/>
+            </a:pPr>
+            <a:r>
+              <a:rPr b="1" i="0" lang="en-US" sz="1500" u="none" cap="none" strike="noStrike">
+                <a:solidFill>
+                  <a:srgbClr val="0B1733"/>
+                </a:solidFill>
+                <a:latin typeface="Quattrocento Sans"/>
+                <a:ea typeface="Quattrocento Sans"/>
+                <a:cs typeface="Quattrocento Sans"/>
+                <a:sym typeface="Quattrocento Sans"/>
+              </a:rPr>
+              <a:t>Claude Code / Isaac</a:t>
+            </a:r>
+            <a:endParaRPr/>
+          </a:p>
+        </p:txBody>
+      </p:sp>
+      <p:sp>
+        <p:nvSpPr>
+          <p:cNvPr id="442" name="Google Shape;442;p24"/>
+          <p:cNvSpPr txBox="1"/>
+          <p:nvPr/>
+        </p:nvSpPr>
+        <p:spPr>
+          <a:xfrm>
+            <a:off x="804672" y="2514600"/>
+            <a:ext cx="3108960" cy="914400"/>
+          </a:xfrm>
+          <a:prstGeom prst="rect">
+            <a:avLst/>
+          </a:prstGeom>
+          <a:noFill/>
+          <a:ln>
+            <a:noFill/>
+          </a:ln>
+        </p:spPr>
+        <p:txBody>
+          <a:bodyPr anchorCtr="0" anchor="t" bIns="0" lIns="0" spcFirstLastPara="1" rIns="0" wrap="square" tIns="0">
+            <a:spAutoFit/>
+          </a:bodyPr>
+          <a:lstStyle/>
+          <a:p>
+            <a:pPr indent="0" lvl="0" marL="0" marR="0" rtl="0" algn="l">
+              <a:lnSpc>
+                <a:spcPct val="115000"/>
+              </a:lnSpc>
+              <a:spcBef>
+                <a:spcPts val="0"/>
+              </a:spcBef>
+              <a:spcAft>
+                <a:spcPts val="0"/>
+              </a:spcAft>
+              <a:buNone/>
+            </a:pPr>
+            <a:r>
+              <a:rPr b="0" i="0" lang="en-US" sz="1200" u="none" cap="none" strike="noStrike">
+                <a:solidFill>
+                  <a:srgbClr val="1A1A2E"/>
+                </a:solidFill>
+                <a:latin typeface="Quattrocento Sans"/>
+                <a:ea typeface="Quattrocento Sans"/>
+                <a:cs typeface="Quattrocento Sans"/>
+                <a:sym typeface="Quattrocento Sans"/>
+              </a:rPr>
+              <a:t>An agentic AI teammate drove the build end to end — provisioning, code and this deck — not just autocomplete.</a:t>
+            </a:r>
+            <a:endParaRPr/>
+          </a:p>
+        </p:txBody>
+      </p:sp>
+      <p:sp>
+        <p:nvSpPr>
+          <p:cNvPr id="443" name="Google Shape;443;p24"/>
+          <p:cNvSpPr/>
+          <p:nvPr/>
+        </p:nvSpPr>
+        <p:spPr>
+          <a:xfrm>
+            <a:off x="4288536" y="1645920"/>
+            <a:ext cx="3611880" cy="1874519"/>
+          </a:xfrm>
+          <a:prstGeom prst="roundRect">
+            <a:avLst>
+              <a:gd fmla="val 16667" name="adj"/>
+            </a:avLst>
+          </a:prstGeom>
+          <a:solidFill>
+            <a:srgbClr val="E4ECFF"/>
+          </a:solidFill>
+          <a:ln cap="flat" cmpd="sng" w="12700">
+            <a:solidFill>
+              <a:srgbClr val="DDE3ED"/>
+            </a:solidFill>
+            <a:prstDash val="solid"/>
+            <a:round/>
+            <a:headEnd len="sm" w="sm" type="none"/>
+            <a:tailEnd len="sm" w="sm" type="none"/>
+          </a:ln>
+          <a:effectLst>
+            <a:outerShdw blurRad="90000" rotWithShape="0" dir="5400000" dist="40000">
+              <a:srgbClr val="9AA5B5">
+                <a:alpha val="40000"/>
+              </a:srgbClr>
+            </a:outerShdw>
+          </a:effectLst>
+        </p:spPr>
+        <p:txBody>
+          <a:bodyPr anchorCtr="0" anchor="ctr" bIns="45700" lIns="91425" spcFirstLastPara="1" rIns="91425" wrap="square" tIns="45700">
+            <a:noAutofit/>
+          </a:bodyPr>
+          <a:lstStyle/>
+          <a:p>
+            <a:pPr indent="0" lvl="0" marL="0" marR="0" rtl="0" algn="ctr">
+              <a:spcBef>
+                <a:spcPts val="0"/>
+              </a:spcBef>
+              <a:spcAft>
+                <a:spcPts val="0"/>
+              </a:spcAft>
+              <a:buNone/>
+            </a:pPr>
+            <a:r>
+              <a:t/>
+            </a:r>
+            <a:endParaRPr b="0" i="0" sz="1800" u="none" cap="none" strike="noStrike">
+              <a:solidFill>
+                <a:schemeClr val="dk1"/>
+              </a:solidFill>
+              <a:latin typeface="Calibri"/>
+              <a:ea typeface="Calibri"/>
+              <a:cs typeface="Calibri"/>
+              <a:sym typeface="Calibri"/>
+            </a:endParaRPr>
+          </a:p>
+        </p:txBody>
+      </p:sp>
+      <p:sp>
+        <p:nvSpPr>
+          <p:cNvPr id="444" name="Google Shape;444;p24"/>
+          <p:cNvSpPr txBox="1"/>
+          <p:nvPr/>
+        </p:nvSpPr>
+        <p:spPr>
+          <a:xfrm>
+            <a:off x="4517136" y="1828800"/>
+            <a:ext cx="640080" cy="548640"/>
+          </a:xfrm>
+          <a:prstGeom prst="rect">
+            <a:avLst/>
+          </a:prstGeom>
+          <a:noFill/>
+          <a:ln>
+            <a:noFill/>
+          </a:ln>
+        </p:spPr>
+        <p:txBody>
+          <a:bodyPr anchorCtr="0" anchor="t" bIns="0" lIns="0" spcFirstLastPara="1" rIns="0" wrap="square" tIns="0">
+            <a:spAutoFit/>
+          </a:bodyPr>
+          <a:lstStyle/>
+          <a:p>
+            <a:pPr indent="0" lvl="0" marL="0" marR="0" rtl="0" algn="l">
+              <a:lnSpc>
+                <a:spcPct val="100000"/>
+              </a:lnSpc>
+              <a:spcBef>
+                <a:spcPts val="0"/>
+              </a:spcBef>
+              <a:spcAft>
+                <a:spcPts val="0"/>
+              </a:spcAft>
+              <a:buNone/>
+            </a:pPr>
+            <a:r>
+              <a:rPr b="0" i="0" lang="en-US" sz="2400" u="none" cap="none" strike="noStrike">
+                <a:solidFill>
+                  <a:srgbClr val="1A1A2E"/>
+                </a:solidFill>
+                <a:latin typeface="Quattrocento Sans"/>
+                <a:ea typeface="Quattrocento Sans"/>
+                <a:cs typeface="Quattrocento Sans"/>
+                <a:sym typeface="Quattrocento Sans"/>
+              </a:rPr>
+              <a:t>🗄️</a:t>
+            </a:r>
+            <a:endParaRPr/>
+          </a:p>
+        </p:txBody>
+      </p:sp>
+      <p:sp>
+        <p:nvSpPr>
+          <p:cNvPr id="445" name="Google Shape;445;p24"/>
+          <p:cNvSpPr txBox="1"/>
+          <p:nvPr/>
+        </p:nvSpPr>
+        <p:spPr>
+          <a:xfrm>
+            <a:off x="5202936" y="1874520"/>
+            <a:ext cx="2606040" cy="548640"/>
+          </a:xfrm>
+          <a:prstGeom prst="rect">
+            <a:avLst/>
+          </a:prstGeom>
+          <a:noFill/>
+          <a:ln>
+            <a:noFill/>
+          </a:ln>
+        </p:spPr>
+        <p:txBody>
+          <a:bodyPr anchorCtr="0" anchor="ctr" bIns="0" lIns="0" spcFirstLastPara="1" rIns="0" wrap="square" tIns="0">
+            <a:spAutoFit/>
+          </a:bodyPr>
+          <a:lstStyle/>
+          <a:p>
+            <a:pPr indent="0" lvl="0" marL="0" marR="0" rtl="0" algn="l">
+              <a:lnSpc>
+                <a:spcPct val="100000"/>
+              </a:lnSpc>
+              <a:spcBef>
+                <a:spcPts val="0"/>
+              </a:spcBef>
+              <a:spcAft>
+                <a:spcPts val="0"/>
+              </a:spcAft>
+              <a:buNone/>
+            </a:pPr>
+            <a:r>
+              <a:rPr b="1" i="0" lang="en-US" sz="1500" u="none" cap="none" strike="noStrike">
+                <a:solidFill>
+                  <a:srgbClr val="0B1733"/>
+                </a:solidFill>
+                <a:latin typeface="Quattrocento Sans"/>
+                <a:ea typeface="Quattrocento Sans"/>
+                <a:cs typeface="Quattrocento Sans"/>
+                <a:sym typeface="Quattrocento Sans"/>
+              </a:rPr>
+              <a:t>Databricks MCP tools</a:t>
+            </a:r>
+            <a:endParaRPr/>
+          </a:p>
+        </p:txBody>
+      </p:sp>
+      <p:sp>
+        <p:nvSpPr>
+          <p:cNvPr id="446" name="Google Shape;446;p24"/>
+          <p:cNvSpPr txBox="1"/>
+          <p:nvPr/>
+        </p:nvSpPr>
+        <p:spPr>
+          <a:xfrm>
+            <a:off x="4544568" y="2514600"/>
+            <a:ext cx="3108960" cy="914400"/>
+          </a:xfrm>
+          <a:prstGeom prst="rect">
+            <a:avLst/>
+          </a:prstGeom>
+          <a:noFill/>
+          <a:ln>
+            <a:noFill/>
+          </a:ln>
+        </p:spPr>
+        <p:txBody>
+          <a:bodyPr anchorCtr="0" anchor="t" bIns="0" lIns="0" spcFirstLastPara="1" rIns="0" wrap="square" tIns="0">
+            <a:spAutoFit/>
+          </a:bodyPr>
+          <a:lstStyle/>
+          <a:p>
+            <a:pPr indent="0" lvl="0" marL="0" marR="0" rtl="0" algn="l">
+              <a:lnSpc>
+                <a:spcPct val="115000"/>
+              </a:lnSpc>
+              <a:spcBef>
+                <a:spcPts val="0"/>
+              </a:spcBef>
+              <a:spcAft>
+                <a:spcPts val="0"/>
+              </a:spcAft>
+              <a:buNone/>
+            </a:pPr>
+            <a:r>
+              <a:rPr b="0" i="0" lang="en-US" sz="1200" u="none" cap="none" strike="noStrike">
+                <a:solidFill>
+                  <a:srgbClr val="1A1A2E"/>
+                </a:solidFill>
+                <a:latin typeface="Quattrocento Sans"/>
+                <a:ea typeface="Quattrocento Sans"/>
+                <a:cs typeface="Quattrocento Sans"/>
+                <a:sym typeface="Quattrocento Sans"/>
+              </a:rPr>
+              <a:t>UC, Lakeflow, Genie, Lakebase and Apps provisioned from natural-language intent — infrastructure as conversation.</a:t>
+            </a:r>
+            <a:endParaRPr/>
+          </a:p>
+        </p:txBody>
+      </p:sp>
+      <p:sp>
+        <p:nvSpPr>
+          <p:cNvPr id="447" name="Google Shape;447;p24"/>
+          <p:cNvSpPr/>
+          <p:nvPr/>
+        </p:nvSpPr>
+        <p:spPr>
+          <a:xfrm>
+            <a:off x="8028432" y="1645920"/>
+            <a:ext cx="3611880" cy="1874519"/>
+          </a:xfrm>
+          <a:prstGeom prst="roundRect">
+            <a:avLst>
+              <a:gd fmla="val 16667" name="adj"/>
+            </a:avLst>
+          </a:prstGeom>
+          <a:solidFill>
+            <a:srgbClr val="EEE5F8"/>
+          </a:solidFill>
+          <a:ln cap="flat" cmpd="sng" w="12700">
+            <a:solidFill>
+              <a:srgbClr val="DDE3ED"/>
+            </a:solidFill>
+            <a:prstDash val="solid"/>
+            <a:round/>
+            <a:headEnd len="sm" w="sm" type="none"/>
+            <a:tailEnd len="sm" w="sm" type="none"/>
+          </a:ln>
+          <a:effectLst>
+            <a:outerShdw blurRad="90000" rotWithShape="0" dir="5400000" dist="40000">
+              <a:srgbClr val="9AA5B5">
+                <a:alpha val="40000"/>
+              </a:srgbClr>
+            </a:outerShdw>
+          </a:effectLst>
+        </p:spPr>
+        <p:txBody>
+          <a:bodyPr anchorCtr="0" anchor="ctr" bIns="45700" lIns="91425" spcFirstLastPara="1" rIns="91425" wrap="square" tIns="45700">
+            <a:noAutofit/>
+          </a:bodyPr>
+          <a:lstStyle/>
+          <a:p>
+            <a:pPr indent="0" lvl="0" marL="0" marR="0" rtl="0" algn="ctr">
+              <a:spcBef>
+                <a:spcPts val="0"/>
+              </a:spcBef>
+              <a:spcAft>
+                <a:spcPts val="0"/>
+              </a:spcAft>
+              <a:buNone/>
+            </a:pPr>
+            <a:r>
+              <a:t/>
+            </a:r>
+            <a:endParaRPr b="0" i="0" sz="1800" u="none" cap="none" strike="noStrike">
+              <a:solidFill>
+                <a:schemeClr val="dk1"/>
+              </a:solidFill>
+              <a:latin typeface="Calibri"/>
+              <a:ea typeface="Calibri"/>
+              <a:cs typeface="Calibri"/>
+              <a:sym typeface="Calibri"/>
+            </a:endParaRPr>
+          </a:p>
+        </p:txBody>
+      </p:sp>
+      <p:sp>
+        <p:nvSpPr>
+          <p:cNvPr id="448" name="Google Shape;448;p24"/>
+          <p:cNvSpPr txBox="1"/>
+          <p:nvPr/>
+        </p:nvSpPr>
+        <p:spPr>
+          <a:xfrm>
+            <a:off x="8257032" y="1828800"/>
+            <a:ext cx="640080" cy="548640"/>
+          </a:xfrm>
+          <a:prstGeom prst="rect">
+            <a:avLst/>
+          </a:prstGeom>
+          <a:noFill/>
+          <a:ln>
+            <a:noFill/>
+          </a:ln>
+        </p:spPr>
+        <p:txBody>
+          <a:bodyPr anchorCtr="0" anchor="t" bIns="0" lIns="0" spcFirstLastPara="1" rIns="0" wrap="square" tIns="0">
+            <a:spAutoFit/>
+          </a:bodyPr>
+          <a:lstStyle/>
+          <a:p>
+            <a:pPr indent="0" lvl="0" marL="0" marR="0" rtl="0" algn="l">
+              <a:lnSpc>
+                <a:spcPct val="100000"/>
+              </a:lnSpc>
+              <a:spcBef>
+                <a:spcPts val="0"/>
+              </a:spcBef>
+              <a:spcAft>
+                <a:spcPts val="0"/>
+              </a:spcAft>
+              <a:buNone/>
+            </a:pPr>
+            <a:r>
+              <a:rPr b="0" i="0" lang="en-US" sz="2400" u="none" cap="none" strike="noStrike">
+                <a:solidFill>
+                  <a:srgbClr val="1A1A2E"/>
+                </a:solidFill>
+                <a:latin typeface="Quattrocento Sans"/>
+                <a:ea typeface="Quattrocento Sans"/>
+                <a:cs typeface="Quattrocento Sans"/>
+                <a:sym typeface="Quattrocento Sans"/>
+              </a:rPr>
+              <a:t>🧠</a:t>
+            </a:r>
+            <a:endParaRPr/>
+          </a:p>
+        </p:txBody>
+      </p:sp>
+      <p:sp>
+        <p:nvSpPr>
+          <p:cNvPr id="449" name="Google Shape;449;p24"/>
+          <p:cNvSpPr txBox="1"/>
+          <p:nvPr/>
+        </p:nvSpPr>
+        <p:spPr>
+          <a:xfrm>
+            <a:off x="8942832" y="1874520"/>
+            <a:ext cx="2606040" cy="548640"/>
+          </a:xfrm>
+          <a:prstGeom prst="rect">
+            <a:avLst/>
+          </a:prstGeom>
+          <a:noFill/>
+          <a:ln>
+            <a:noFill/>
+          </a:ln>
+        </p:spPr>
+        <p:txBody>
+          <a:bodyPr anchorCtr="0" anchor="ctr" bIns="0" lIns="0" spcFirstLastPara="1" rIns="0" wrap="square" tIns="0">
+            <a:spAutoFit/>
+          </a:bodyPr>
+          <a:lstStyle/>
+          <a:p>
+            <a:pPr indent="0" lvl="0" marL="0" marR="0" rtl="0" algn="l">
+              <a:lnSpc>
+                <a:spcPct val="100000"/>
+              </a:lnSpc>
+              <a:spcBef>
+                <a:spcPts val="0"/>
+              </a:spcBef>
+              <a:spcAft>
+                <a:spcPts val="0"/>
+              </a:spcAft>
+              <a:buNone/>
+            </a:pPr>
+            <a:r>
+              <a:rPr b="1" i="0" lang="en-US" sz="1500" u="none" cap="none" strike="noStrike">
+                <a:solidFill>
+                  <a:srgbClr val="0B1733"/>
+                </a:solidFill>
+                <a:latin typeface="Quattrocento Sans"/>
+                <a:ea typeface="Quattrocento Sans"/>
+                <a:cs typeface="Quattrocento Sans"/>
+                <a:sym typeface="Quattrocento Sans"/>
+              </a:rPr>
+              <a:t>Extraction prompt pattern</a:t>
+            </a:r>
+            <a:endParaRPr/>
+          </a:p>
+        </p:txBody>
+      </p:sp>
+      <p:sp>
+        <p:nvSpPr>
+          <p:cNvPr id="450" name="Google Shape;450;p24"/>
+          <p:cNvSpPr txBox="1"/>
+          <p:nvPr/>
+        </p:nvSpPr>
+        <p:spPr>
+          <a:xfrm>
+            <a:off x="8284464" y="2514600"/>
+            <a:ext cx="3108960" cy="914400"/>
+          </a:xfrm>
+          <a:prstGeom prst="rect">
+            <a:avLst/>
+          </a:prstGeom>
+          <a:noFill/>
+          <a:ln>
+            <a:noFill/>
+          </a:ln>
+        </p:spPr>
+        <p:txBody>
+          <a:bodyPr anchorCtr="0" anchor="t" bIns="0" lIns="0" spcFirstLastPara="1" rIns="0" wrap="square" tIns="0">
+            <a:spAutoFit/>
+          </a:bodyPr>
+          <a:lstStyle/>
+          <a:p>
+            <a:pPr indent="0" lvl="0" marL="0" marR="0" rtl="0" algn="l">
+              <a:lnSpc>
+                <a:spcPct val="115000"/>
+              </a:lnSpc>
+              <a:spcBef>
+                <a:spcPts val="0"/>
+              </a:spcBef>
+              <a:spcAft>
+                <a:spcPts val="0"/>
+              </a:spcAft>
+              <a:buNone/>
+            </a:pPr>
+            <a:r>
+              <a:rPr b="0" i="0" lang="en-US" sz="1200" u="none" cap="none" strike="noStrike">
+                <a:solidFill>
+                  <a:srgbClr val="1A1A2E"/>
+                </a:solidFill>
+                <a:latin typeface="Quattrocento Sans"/>
+                <a:ea typeface="Quattrocento Sans"/>
+                <a:cs typeface="Quattrocento Sans"/>
+                <a:sym typeface="Quattrocento Sans"/>
+              </a:rPr>
+              <a:t>One reusable ai_query() prompt turns every free-text MSL note into 9 governed columns — the product's core AI move.</a:t>
+            </a:r>
+            <a:endParaRPr/>
+          </a:p>
+        </p:txBody>
+      </p:sp>
+      <p:sp>
+        <p:nvSpPr>
+          <p:cNvPr id="451" name="Google Shape;451;p24"/>
+          <p:cNvSpPr/>
+          <p:nvPr/>
+        </p:nvSpPr>
+        <p:spPr>
+          <a:xfrm>
+            <a:off x="548640" y="3703319"/>
+            <a:ext cx="3611880" cy="1874519"/>
+          </a:xfrm>
+          <a:prstGeom prst="roundRect">
+            <a:avLst>
+              <a:gd fmla="val 16667" name="adj"/>
+            </a:avLst>
+          </a:prstGeom>
+          <a:solidFill>
+            <a:srgbClr val="FFF3DF"/>
+          </a:solidFill>
+          <a:ln cap="flat" cmpd="sng" w="12700">
+            <a:solidFill>
+              <a:srgbClr val="DDE3ED"/>
+            </a:solidFill>
+            <a:prstDash val="solid"/>
+            <a:round/>
+            <a:headEnd len="sm" w="sm" type="none"/>
+            <a:tailEnd len="sm" w="sm" type="none"/>
+          </a:ln>
+          <a:effectLst>
+            <a:outerShdw blurRad="90000" rotWithShape="0" dir="5400000" dist="40000">
+              <a:srgbClr val="9AA5B5">
+                <a:alpha val="40000"/>
+              </a:srgbClr>
+            </a:outerShdw>
+          </a:effectLst>
+        </p:spPr>
+        <p:txBody>
+          <a:bodyPr anchorCtr="0" anchor="ctr" bIns="45700" lIns="91425" spcFirstLastPara="1" rIns="91425" wrap="square" tIns="45700">
+            <a:noAutofit/>
+          </a:bodyPr>
+          <a:lstStyle/>
+          <a:p>
+            <a:pPr indent="0" lvl="0" marL="0" marR="0" rtl="0" algn="ctr">
+              <a:spcBef>
+                <a:spcPts val="0"/>
+              </a:spcBef>
+              <a:spcAft>
+                <a:spcPts val="0"/>
+              </a:spcAft>
+              <a:buNone/>
+            </a:pPr>
+            <a:r>
+              <a:t/>
+            </a:r>
+            <a:endParaRPr b="0" i="0" sz="1800" u="none" cap="none" strike="noStrike">
+              <a:solidFill>
+                <a:schemeClr val="dk1"/>
+              </a:solidFill>
+              <a:latin typeface="Calibri"/>
+              <a:ea typeface="Calibri"/>
+              <a:cs typeface="Calibri"/>
+              <a:sym typeface="Calibri"/>
+            </a:endParaRPr>
+          </a:p>
+        </p:txBody>
+      </p:sp>
+      <p:sp>
+        <p:nvSpPr>
+          <p:cNvPr id="452" name="Google Shape;452;p24"/>
+          <p:cNvSpPr txBox="1"/>
+          <p:nvPr/>
+        </p:nvSpPr>
+        <p:spPr>
+          <a:xfrm>
+            <a:off x="777240" y="3886199"/>
+            <a:ext cx="640080" cy="548640"/>
+          </a:xfrm>
+          <a:prstGeom prst="rect">
+            <a:avLst/>
+          </a:prstGeom>
+          <a:noFill/>
+          <a:ln>
+            <a:noFill/>
+          </a:ln>
+        </p:spPr>
+        <p:txBody>
+          <a:bodyPr anchorCtr="0" anchor="t" bIns="0" lIns="0" spcFirstLastPara="1" rIns="0" wrap="square" tIns="0">
+            <a:spAutoFit/>
+          </a:bodyPr>
+          <a:lstStyle/>
+          <a:p>
+            <a:pPr indent="0" lvl="0" marL="0" marR="0" rtl="0" algn="l">
+              <a:lnSpc>
+                <a:spcPct val="100000"/>
+              </a:lnSpc>
+              <a:spcBef>
+                <a:spcPts val="0"/>
+              </a:spcBef>
+              <a:spcAft>
+                <a:spcPts val="0"/>
+              </a:spcAft>
+              <a:buNone/>
+            </a:pPr>
+            <a:r>
+              <a:rPr b="0" i="0" lang="en-US" sz="2400" u="none" cap="none" strike="noStrike">
+                <a:solidFill>
+                  <a:srgbClr val="1A1A2E"/>
+                </a:solidFill>
+                <a:latin typeface="Quattrocento Sans"/>
+                <a:ea typeface="Quattrocento Sans"/>
+                <a:cs typeface="Quattrocento Sans"/>
+                <a:sym typeface="Quattrocento Sans"/>
+              </a:rPr>
+              <a:t>📎</a:t>
+            </a:r>
+            <a:endParaRPr/>
+          </a:p>
+        </p:txBody>
+      </p:sp>
+      <p:sp>
+        <p:nvSpPr>
+          <p:cNvPr id="453" name="Google Shape;453;p24"/>
+          <p:cNvSpPr txBox="1"/>
+          <p:nvPr/>
+        </p:nvSpPr>
+        <p:spPr>
+          <a:xfrm>
+            <a:off x="1463040" y="3931919"/>
+            <a:ext cx="2606040" cy="548640"/>
+          </a:xfrm>
+          <a:prstGeom prst="rect">
+            <a:avLst/>
+          </a:prstGeom>
+          <a:noFill/>
+          <a:ln>
+            <a:noFill/>
+          </a:ln>
+        </p:spPr>
+        <p:txBody>
+          <a:bodyPr anchorCtr="0" anchor="ctr" bIns="0" lIns="0" spcFirstLastPara="1" rIns="0" wrap="square" tIns="0">
+            <a:spAutoFit/>
+          </a:bodyPr>
+          <a:lstStyle/>
+          <a:p>
+            <a:pPr indent="0" lvl="0" marL="0" marR="0" rtl="0" algn="l">
+              <a:lnSpc>
+                <a:spcPct val="100000"/>
+              </a:lnSpc>
+              <a:spcBef>
+                <a:spcPts val="0"/>
+              </a:spcBef>
+              <a:spcAft>
+                <a:spcPts val="0"/>
+              </a:spcAft>
+              <a:buNone/>
+            </a:pPr>
+            <a:r>
+              <a:rPr b="1" i="0" lang="en-US" sz="1500" u="none" cap="none" strike="noStrike">
+                <a:solidFill>
+                  <a:srgbClr val="0B1733"/>
+                </a:solidFill>
+                <a:latin typeface="Quattrocento Sans"/>
+                <a:ea typeface="Quattrocento Sans"/>
+                <a:cs typeface="Quattrocento Sans"/>
+                <a:sym typeface="Quattrocento Sans"/>
+              </a:rPr>
+              <a:t>Grounded-briefing guardrail</a:t>
+            </a:r>
+            <a:endParaRPr/>
+          </a:p>
+        </p:txBody>
+      </p:sp>
+      <p:sp>
+        <p:nvSpPr>
+          <p:cNvPr id="454" name="Google Shape;454;p24"/>
+          <p:cNvSpPr txBox="1"/>
+          <p:nvPr/>
+        </p:nvSpPr>
+        <p:spPr>
+          <a:xfrm>
+            <a:off x="804672" y="4571999"/>
+            <a:ext cx="3108960" cy="914400"/>
+          </a:xfrm>
+          <a:prstGeom prst="rect">
+            <a:avLst/>
+          </a:prstGeom>
+          <a:noFill/>
+          <a:ln>
+            <a:noFill/>
+          </a:ln>
+        </p:spPr>
+        <p:txBody>
+          <a:bodyPr anchorCtr="0" anchor="t" bIns="0" lIns="0" spcFirstLastPara="1" rIns="0" wrap="square" tIns="0">
+            <a:spAutoFit/>
+          </a:bodyPr>
+          <a:lstStyle/>
+          <a:p>
+            <a:pPr indent="0" lvl="0" marL="0" marR="0" rtl="0" algn="l">
+              <a:lnSpc>
+                <a:spcPct val="115000"/>
+              </a:lnSpc>
+              <a:spcBef>
+                <a:spcPts val="0"/>
+              </a:spcBef>
+              <a:spcAft>
+                <a:spcPts val="0"/>
+              </a:spcAft>
+              <a:buNone/>
+            </a:pPr>
+            <a:r>
+              <a:rPr b="0" i="0" lang="en-US" sz="1200" u="none" cap="none" strike="noStrike">
+                <a:solidFill>
+                  <a:srgbClr val="1A1A2E"/>
+                </a:solidFill>
+                <a:latin typeface="Quattrocento Sans"/>
+                <a:ea typeface="Quattrocento Sans"/>
+                <a:cs typeface="Quattrocento Sans"/>
+                <a:sym typeface="Quattrocento Sans"/>
+              </a:rPr>
+              <a:t>The app's prompt enforces factual, context-only, non-promotional output — a safety pattern for regulated GenAI.</a:t>
+            </a:r>
+            <a:endParaRPr/>
+          </a:p>
+        </p:txBody>
+      </p:sp>
+      <p:sp>
+        <p:nvSpPr>
+          <p:cNvPr id="455" name="Google Shape;455;p24"/>
+          <p:cNvSpPr/>
+          <p:nvPr/>
+        </p:nvSpPr>
+        <p:spPr>
+          <a:xfrm>
+            <a:off x="4288536" y="3703319"/>
+            <a:ext cx="3611880" cy="1874519"/>
+          </a:xfrm>
+          <a:prstGeom prst="roundRect">
+            <a:avLst>
+              <a:gd fmla="val 16667" name="adj"/>
+            </a:avLst>
+          </a:prstGeom>
+          <a:solidFill>
+            <a:srgbClr val="D6F0F0"/>
+          </a:solidFill>
+          <a:ln cap="flat" cmpd="sng" w="12700">
+            <a:solidFill>
+              <a:srgbClr val="DDE3ED"/>
+            </a:solidFill>
+            <a:prstDash val="solid"/>
+            <a:round/>
+            <a:headEnd len="sm" w="sm" type="none"/>
+            <a:tailEnd len="sm" w="sm" type="none"/>
+          </a:ln>
+          <a:effectLst>
+            <a:outerShdw blurRad="90000" rotWithShape="0" dir="5400000" dist="40000">
+              <a:srgbClr val="9AA5B5">
+                <a:alpha val="40000"/>
+              </a:srgbClr>
+            </a:outerShdw>
+          </a:effectLst>
+        </p:spPr>
+        <p:txBody>
+          <a:bodyPr anchorCtr="0" anchor="ctr" bIns="45700" lIns="91425" spcFirstLastPara="1" rIns="91425" wrap="square" tIns="45700">
+            <a:noAutofit/>
+          </a:bodyPr>
+          <a:lstStyle/>
+          <a:p>
+            <a:pPr indent="0" lvl="0" marL="0" marR="0" rtl="0" algn="ctr">
+              <a:spcBef>
+                <a:spcPts val="0"/>
+              </a:spcBef>
+              <a:spcAft>
+                <a:spcPts val="0"/>
+              </a:spcAft>
+              <a:buNone/>
+            </a:pPr>
+            <a:r>
+              <a:t/>
+            </a:r>
+            <a:endParaRPr b="0" i="0" sz="1800" u="none" cap="none" strike="noStrike">
+              <a:solidFill>
+                <a:schemeClr val="dk1"/>
+              </a:solidFill>
+              <a:latin typeface="Calibri"/>
+              <a:ea typeface="Calibri"/>
+              <a:cs typeface="Calibri"/>
+              <a:sym typeface="Calibri"/>
+            </a:endParaRPr>
+          </a:p>
+        </p:txBody>
+      </p:sp>
+      <p:sp>
+        <p:nvSpPr>
+          <p:cNvPr id="456" name="Google Shape;456;p24"/>
+          <p:cNvSpPr txBox="1"/>
+          <p:nvPr/>
+        </p:nvSpPr>
+        <p:spPr>
+          <a:xfrm>
+            <a:off x="4517136" y="3886199"/>
+            <a:ext cx="640080" cy="548640"/>
+          </a:xfrm>
+          <a:prstGeom prst="rect">
+            <a:avLst/>
+          </a:prstGeom>
+          <a:noFill/>
+          <a:ln>
+            <a:noFill/>
+          </a:ln>
+        </p:spPr>
+        <p:txBody>
+          <a:bodyPr anchorCtr="0" anchor="t" bIns="0" lIns="0" spcFirstLastPara="1" rIns="0" wrap="square" tIns="0">
+            <a:spAutoFit/>
+          </a:bodyPr>
+          <a:lstStyle/>
+          <a:p>
+            <a:pPr indent="0" lvl="0" marL="0" marR="0" rtl="0" algn="l">
+              <a:lnSpc>
+                <a:spcPct val="100000"/>
+              </a:lnSpc>
+              <a:spcBef>
+                <a:spcPts val="0"/>
+              </a:spcBef>
+              <a:spcAft>
+                <a:spcPts val="0"/>
+              </a:spcAft>
+              <a:buNone/>
+            </a:pPr>
+            <a:r>
+              <a:rPr b="0" i="0" lang="en-US" sz="2400" u="none" cap="none" strike="noStrike">
+                <a:solidFill>
+                  <a:srgbClr val="1A1A2E"/>
+                </a:solidFill>
+                <a:latin typeface="Quattrocento Sans"/>
+                <a:ea typeface="Quattrocento Sans"/>
+                <a:cs typeface="Quattrocento Sans"/>
+                <a:sym typeface="Quattrocento Sans"/>
+              </a:rPr>
+              <a:t>✅</a:t>
+            </a:r>
+            <a:endParaRPr/>
+          </a:p>
+        </p:txBody>
+      </p:sp>
+      <p:sp>
+        <p:nvSpPr>
+          <p:cNvPr id="457" name="Google Shape;457;p24"/>
+          <p:cNvSpPr txBox="1"/>
+          <p:nvPr/>
+        </p:nvSpPr>
+        <p:spPr>
+          <a:xfrm>
+            <a:off x="5202936" y="3931919"/>
+            <a:ext cx="2606040" cy="548640"/>
+          </a:xfrm>
+          <a:prstGeom prst="rect">
+            <a:avLst/>
+          </a:prstGeom>
+          <a:noFill/>
+          <a:ln>
+            <a:noFill/>
+          </a:ln>
+        </p:spPr>
+        <p:txBody>
+          <a:bodyPr anchorCtr="0" anchor="ctr" bIns="0" lIns="0" spcFirstLastPara="1" rIns="0" wrap="square" tIns="0">
+            <a:spAutoFit/>
+          </a:bodyPr>
+          <a:lstStyle/>
+          <a:p>
+            <a:pPr indent="0" lvl="0" marL="0" marR="0" rtl="0" algn="l">
+              <a:lnSpc>
+                <a:spcPct val="100000"/>
+              </a:lnSpc>
+              <a:spcBef>
+                <a:spcPts val="0"/>
+              </a:spcBef>
+              <a:spcAft>
+                <a:spcPts val="0"/>
+              </a:spcAft>
+              <a:buNone/>
+            </a:pPr>
+            <a:r>
+              <a:rPr b="1" i="0" lang="en-US" sz="1500" u="none" cap="none" strike="noStrike">
+                <a:solidFill>
+                  <a:srgbClr val="0B1733"/>
+                </a:solidFill>
+                <a:latin typeface="Quattrocento Sans"/>
+                <a:ea typeface="Quattrocento Sans"/>
+                <a:cs typeface="Quattrocento Sans"/>
+                <a:sym typeface="Quattrocento Sans"/>
+              </a:rPr>
+              <a:t>Generate → verify loop</a:t>
+            </a:r>
+            <a:endParaRPr/>
+          </a:p>
+        </p:txBody>
+      </p:sp>
+      <p:sp>
+        <p:nvSpPr>
+          <p:cNvPr id="458" name="Google Shape;458;p24"/>
+          <p:cNvSpPr txBox="1"/>
+          <p:nvPr/>
+        </p:nvSpPr>
+        <p:spPr>
+          <a:xfrm>
+            <a:off x="4544568" y="4571999"/>
+            <a:ext cx="3108960" cy="914400"/>
+          </a:xfrm>
+          <a:prstGeom prst="rect">
+            <a:avLst/>
+          </a:prstGeom>
+          <a:noFill/>
+          <a:ln>
+            <a:noFill/>
+          </a:ln>
+        </p:spPr>
+        <p:txBody>
+          <a:bodyPr anchorCtr="0" anchor="t" bIns="0" lIns="0" spcFirstLastPara="1" rIns="0" wrap="square" tIns="0">
+            <a:spAutoFit/>
+          </a:bodyPr>
+          <a:lstStyle/>
+          <a:p>
+            <a:pPr indent="0" lvl="0" marL="0" marR="0" rtl="0" algn="l">
+              <a:lnSpc>
+                <a:spcPct val="115000"/>
+              </a:lnSpc>
+              <a:spcBef>
+                <a:spcPts val="0"/>
+              </a:spcBef>
+              <a:spcAft>
+                <a:spcPts val="0"/>
+              </a:spcAft>
+              <a:buNone/>
+            </a:pPr>
+            <a:r>
+              <a:rPr b="0" i="0" lang="en-US" sz="1200" u="none" cap="none" strike="noStrike">
+                <a:solidFill>
+                  <a:srgbClr val="1A1A2E"/>
+                </a:solidFill>
+                <a:latin typeface="Quattrocento Sans"/>
+                <a:ea typeface="Quattrocento Sans"/>
+                <a:cs typeface="Quattrocento Sans"/>
+                <a:sym typeface="Quattrocento Sans"/>
+              </a:rPr>
+              <a:t>Every resource was validated live (execute_sql, endpoint checks) before moving on — AI proposes, we verify.</a:t>
+            </a:r>
+            <a:endParaRPr/>
+          </a:p>
+        </p:txBody>
+      </p:sp>
+      <p:sp>
+        <p:nvSpPr>
+          <p:cNvPr id="459" name="Google Shape;459;p24"/>
+          <p:cNvSpPr/>
+          <p:nvPr/>
+        </p:nvSpPr>
+        <p:spPr>
+          <a:xfrm>
+            <a:off x="8028432" y="3703319"/>
+            <a:ext cx="3611880" cy="1874519"/>
+          </a:xfrm>
+          <a:prstGeom prst="roundRect">
+            <a:avLst>
+              <a:gd fmla="val 16667" name="adj"/>
+            </a:avLst>
+          </a:prstGeom>
+          <a:solidFill>
+            <a:srgbClr val="F4F6F9"/>
+          </a:solidFill>
+          <a:ln cap="flat" cmpd="sng" w="12700">
+            <a:solidFill>
+              <a:srgbClr val="DDE3ED"/>
+            </a:solidFill>
+            <a:prstDash val="solid"/>
+            <a:round/>
+            <a:headEnd len="sm" w="sm" type="none"/>
+            <a:tailEnd len="sm" w="sm" type="none"/>
+          </a:ln>
+          <a:effectLst>
+            <a:outerShdw blurRad="90000" rotWithShape="0" dir="5400000" dist="40000">
+              <a:srgbClr val="9AA5B5">
+                <a:alpha val="40000"/>
+              </a:srgbClr>
+            </a:outerShdw>
+          </a:effectLst>
+        </p:spPr>
+        <p:txBody>
+          <a:bodyPr anchorCtr="0" anchor="ctr" bIns="45700" lIns="91425" spcFirstLastPara="1" rIns="91425" wrap="square" tIns="45700">
+            <a:noAutofit/>
+          </a:bodyPr>
+          <a:lstStyle/>
+          <a:p>
+            <a:pPr indent="0" lvl="0" marL="0" marR="0" rtl="0" algn="ctr">
+              <a:spcBef>
+                <a:spcPts val="0"/>
+              </a:spcBef>
+              <a:spcAft>
+                <a:spcPts val="0"/>
+              </a:spcAft>
+              <a:buNone/>
+            </a:pPr>
+            <a:r>
+              <a:t/>
+            </a:r>
+            <a:endParaRPr b="0" i="0" sz="1800" u="none" cap="none" strike="noStrike">
+              <a:solidFill>
+                <a:schemeClr val="dk1"/>
+              </a:solidFill>
+              <a:latin typeface="Calibri"/>
+              <a:ea typeface="Calibri"/>
+              <a:cs typeface="Calibri"/>
+              <a:sym typeface="Calibri"/>
+            </a:endParaRPr>
+          </a:p>
+        </p:txBody>
+      </p:sp>
+      <p:sp>
+        <p:nvSpPr>
+          <p:cNvPr id="460" name="Google Shape;460;p24"/>
+          <p:cNvSpPr txBox="1"/>
+          <p:nvPr/>
+        </p:nvSpPr>
+        <p:spPr>
+          <a:xfrm>
+            <a:off x="8257032" y="3886199"/>
+            <a:ext cx="640080" cy="548640"/>
+          </a:xfrm>
+          <a:prstGeom prst="rect">
+            <a:avLst/>
+          </a:prstGeom>
+          <a:noFill/>
+          <a:ln>
+            <a:noFill/>
+          </a:ln>
+        </p:spPr>
+        <p:txBody>
+          <a:bodyPr anchorCtr="0" anchor="t" bIns="0" lIns="0" spcFirstLastPara="1" rIns="0" wrap="square" tIns="0">
+            <a:spAutoFit/>
+          </a:bodyPr>
+          <a:lstStyle/>
+          <a:p>
+            <a:pPr indent="0" lvl="0" marL="0" marR="0" rtl="0" algn="l">
+              <a:lnSpc>
+                <a:spcPct val="100000"/>
+              </a:lnSpc>
+              <a:spcBef>
+                <a:spcPts val="0"/>
+              </a:spcBef>
+              <a:spcAft>
+                <a:spcPts val="0"/>
+              </a:spcAft>
+              <a:buNone/>
+            </a:pPr>
+            <a:r>
+              <a:rPr b="0" i="0" lang="en-US" sz="2400" u="none" cap="none" strike="noStrike">
+                <a:solidFill>
+                  <a:srgbClr val="1A1A2E"/>
+                </a:solidFill>
+                <a:latin typeface="Quattrocento Sans"/>
+                <a:ea typeface="Quattrocento Sans"/>
+                <a:cs typeface="Quattrocento Sans"/>
+                <a:sym typeface="Quattrocento Sans"/>
+              </a:rPr>
+              <a:t>🧪</a:t>
+            </a:r>
+            <a:endParaRPr/>
+          </a:p>
+        </p:txBody>
+      </p:sp>
+      <p:sp>
+        <p:nvSpPr>
+          <p:cNvPr id="461" name="Google Shape;461;p24"/>
+          <p:cNvSpPr txBox="1"/>
+          <p:nvPr/>
+        </p:nvSpPr>
+        <p:spPr>
+          <a:xfrm>
+            <a:off x="8942832" y="3931919"/>
+            <a:ext cx="2606040" cy="548640"/>
+          </a:xfrm>
+          <a:prstGeom prst="rect">
+            <a:avLst/>
+          </a:prstGeom>
+          <a:noFill/>
+          <a:ln>
+            <a:noFill/>
+          </a:ln>
+        </p:spPr>
+        <p:txBody>
+          <a:bodyPr anchorCtr="0" anchor="ctr" bIns="0" lIns="0" spcFirstLastPara="1" rIns="0" wrap="square" tIns="0">
+            <a:spAutoFit/>
+          </a:bodyPr>
+          <a:lstStyle/>
+          <a:p>
+            <a:pPr indent="0" lvl="0" marL="0" marR="0" rtl="0" algn="l">
+              <a:lnSpc>
+                <a:spcPct val="100000"/>
+              </a:lnSpc>
+              <a:spcBef>
+                <a:spcPts val="0"/>
+              </a:spcBef>
+              <a:spcAft>
+                <a:spcPts val="0"/>
+              </a:spcAft>
+              <a:buNone/>
+            </a:pPr>
+            <a:r>
+              <a:rPr b="1" i="0" lang="en-US" sz="1500" u="none" cap="none" strike="noStrike">
+                <a:solidFill>
+                  <a:srgbClr val="0B1733"/>
+                </a:solidFill>
+                <a:latin typeface="Quattrocento Sans"/>
+                <a:ea typeface="Quattrocento Sans"/>
+                <a:cs typeface="Quattrocento Sans"/>
+                <a:sym typeface="Quattrocento Sans"/>
+              </a:rPr>
+              <a:t>Synthetic data generation</a:t>
+            </a:r>
+            <a:endParaRPr/>
+          </a:p>
+        </p:txBody>
+      </p:sp>
+      <p:sp>
+        <p:nvSpPr>
+          <p:cNvPr id="462" name="Google Shape;462;p24"/>
+          <p:cNvSpPr txBox="1"/>
+          <p:nvPr/>
+        </p:nvSpPr>
+        <p:spPr>
+          <a:xfrm>
+            <a:off x="8284464" y="4571999"/>
+            <a:ext cx="3108960" cy="914400"/>
+          </a:xfrm>
+          <a:prstGeom prst="rect">
+            <a:avLst/>
+          </a:prstGeom>
+          <a:noFill/>
+          <a:ln>
+            <a:noFill/>
+          </a:ln>
+        </p:spPr>
+        <p:txBody>
+          <a:bodyPr anchorCtr="0" anchor="t" bIns="0" lIns="0" spcFirstLastPara="1" rIns="0" wrap="square" tIns="0">
+            <a:spAutoFit/>
+          </a:bodyPr>
+          <a:lstStyle/>
+          <a:p>
+            <a:pPr indent="0" lvl="0" marL="0" marR="0" rtl="0" algn="l">
+              <a:lnSpc>
+                <a:spcPct val="115000"/>
+              </a:lnSpc>
+              <a:spcBef>
+                <a:spcPts val="0"/>
+              </a:spcBef>
+              <a:spcAft>
+                <a:spcPts val="0"/>
+              </a:spcAft>
+              <a:buNone/>
+            </a:pPr>
+            <a:r>
+              <a:rPr b="0" i="0" lang="en-US" sz="1200" u="none" cap="none" strike="noStrike">
+                <a:solidFill>
+                  <a:srgbClr val="1A1A2E"/>
+                </a:solidFill>
+                <a:latin typeface="Quattrocento Sans"/>
+                <a:ea typeface="Quattrocento Sans"/>
+                <a:cs typeface="Quattrocento Sans"/>
+                <a:sym typeface="Quattrocento Sans"/>
+              </a:rPr>
+              <a:t>Faker + Spark patterns produced realistic KOL, inquiry and engagement data at demo scale.</a:t>
+            </a:r>
+            <a:endParaRPr/>
+          </a:p>
+        </p:txBody>
+      </p:sp>
+      <p:sp>
+        <p:nvSpPr>
+          <p:cNvPr id="463" name="Google Shape;463;p24"/>
+          <p:cNvSpPr txBox="1"/>
+          <p:nvPr/>
+        </p:nvSpPr>
+        <p:spPr>
+          <a:xfrm>
+            <a:off x="548640" y="6510528"/>
+            <a:ext cx="11064240" cy="274320"/>
+          </a:xfrm>
+          <a:prstGeom prst="rect">
+            <a:avLst/>
+          </a:prstGeom>
+          <a:noFill/>
+          <a:ln>
+            <a:noFill/>
+          </a:ln>
+        </p:spPr>
+        <p:txBody>
+          <a:bodyPr anchorCtr="0" anchor="t" bIns="0" lIns="0" spcFirstLastPara="1" rIns="0" wrap="square" tIns="0">
+            <a:spAutoFit/>
+          </a:bodyPr>
+          <a:lstStyle/>
+          <a:p>
+            <a:pPr indent="0" lvl="0" marL="0" marR="0" rtl="0" algn="l">
+              <a:lnSpc>
+                <a:spcPct val="100000"/>
+              </a:lnSpc>
+              <a:spcBef>
+                <a:spcPts val="0"/>
+              </a:spcBef>
+              <a:spcAft>
+                <a:spcPts val="0"/>
+              </a:spcAft>
+              <a:buNone/>
+            </a:pPr>
+            <a:r>
+              <a:rPr b="0" i="0" lang="en-US" sz="850" u="none" cap="none" strike="noStrike">
+                <a:solidFill>
+                  <a:srgbClr val="909AAA"/>
+                </a:solidFill>
+                <a:latin typeface="Quattrocento Sans"/>
+                <a:ea typeface="Quattrocento Sans"/>
+                <a:cs typeface="Quattrocento Sans"/>
+                <a:sym typeface="Quattrocento Sans"/>
+              </a:rPr>
+              <a:t>Medical Omnichannel Intelligence  ·  Daiichi Sankyo (synthetic)  ·  Databricks  ·  _sa701.moa</a:t>
             </a:r>
             <a:endParaRPr/>
           </a:p>
@@ -17437,7 +21144,7 @@
                 <a:cs typeface="Quattrocento Sans"/>
                 <a:sym typeface="Quattrocento Sans"/>
               </a:rPr>
-              <a:t>02</a:t>
+              <a:t>03</a:t>
             </a:r>
             <a:endParaRPr/>
           </a:p>
@@ -18729,7 +22436,7 @@
                 <a:cs typeface="Quattrocento Sans"/>
                 <a:sym typeface="Quattrocento Sans"/>
               </a:rPr>
-              <a:t>03</a:t>
+              <a:t>04</a:t>
             </a:r>
             <a:endParaRPr/>
           </a:p>
@@ -20490,7 +24197,7 @@
                 <a:cs typeface="Quattrocento Sans"/>
                 <a:sym typeface="Quattrocento Sans"/>
               </a:rPr>
-              <a:t>04</a:t>
+              <a:t>05</a:t>
             </a:r>
             <a:endParaRPr/>
           </a:p>
@@ -23441,7 +27148,7 @@
                 <a:cs typeface="Quattrocento Sans"/>
                 <a:sym typeface="Quattrocento Sans"/>
               </a:rPr>
-              <a:t>05</a:t>
+              <a:t>06</a:t>
             </a:r>
             <a:endParaRPr/>
           </a:p>
@@ -25721,7 +29428,7 @@
                 <a:cs typeface="Quattrocento Sans"/>
                 <a:sym typeface="Quattrocento Sans"/>
               </a:rPr>
-              <a:t>06</a:t>
+              <a:t>07</a:t>
             </a:r>
             <a:endParaRPr/>
           </a:p>
@@ -27571,7 +31278,7 @@
                 <a:cs typeface="Quattrocento Sans"/>
                 <a:sym typeface="Quattrocento Sans"/>
               </a:rPr>
-              <a:t>07</a:t>
+              <a:t>08</a:t>
             </a:r>
             <a:endParaRPr/>
           </a:p>
@@ -28952,7 +32659,7 @@
                 <a:cs typeface="Quattrocento Sans"/>
                 <a:sym typeface="Quattrocento Sans"/>
               </a:rPr>
-              <a:t>08</a:t>
+              <a:t>09</a:t>
             </a:r>
             <a:endParaRPr/>
           </a:p>
@@ -30921,7 +34628,7 @@
                 <a:cs typeface="Quattrocento Sans"/>
                 <a:sym typeface="Quattrocento Sans"/>
               </a:rPr>
-              <a:t>09</a:t>
+              <a:t>10</a:t>
             </a:r>
             <a:endParaRPr/>
           </a:p>
